--- a/si-portal/catalogues/TerraGridX_Catalogue.pptx
+++ b/si-portal/catalogues/TerraGridX_Catalogue.pptx
@@ -6,11 +6,12 @@
   </p:sldMasterIdLst>
   <p:sldIdLst>
     <p:sldId id="256" r:id="rId7"/>
-    <p:sldId id="257" r:id="rId8"/>
-    <p:sldId id="258" r:id="rId9"/>
-    <p:sldId id="259" r:id="rId10"/>
-    <p:sldId id="260" r:id="rId11"/>
-    <p:sldId id="261" r:id="rId12"/>
+    <p:sldId id="257" r:id="rId9"/>
+    <p:sldId id="258" r:id="rId10"/>
+    <p:sldId id="259" r:id="rId11"/>
+    <p:sldId id="260" r:id="rId12"/>
+    <p:sldId id="261" r:id="rId13"/>
+    <p:sldId id="262" r:id="rId14"/>
   </p:sldIdLst>
   <p:sldSz cx="12191695" cy="6858000" type="screen4x3"/>
   <p:notesSz cx="6858000" cy="9144000"/>
@@ -110,6 +111,1177 @@
     </a:lvl9pPr>
   </p:defaultTextStyle>
 </p:presentation>
+</file>
+
+<file path=ppt/notesMasters/notesMaster1.xml><?xml version="1.0" encoding="utf-8"?>
+<p:notesMaster xmlns:a="http://schemas.openxmlformats.org/drawingml/2006/main" xmlns:p="http://schemas.openxmlformats.org/presentationml/2006/main" xmlns:r="http://schemas.openxmlformats.org/officeDocument/2006/relationships">
+  <p:cSld>
+    <p:bg>
+      <p:bgRef idx="1001">
+        <a:schemeClr val="bg1"/>
+      </p:bgRef>
+    </p:bg>
+    <p:spTree>
+      <p:nvGrpSpPr>
+        <p:cNvPr id="1" name=""/>
+        <p:cNvGrpSpPr/>
+        <p:nvPr/>
+      </p:nvGrpSpPr>
+      <p:grpSpPr>
+        <a:xfrm>
+          <a:off x="0" y="0"/>
+          <a:ext cx="0" cy="0"/>
+          <a:chOff x="0" y="0"/>
+          <a:chExt cx="0" cy="0"/>
+        </a:xfrm>
+      </p:grpSpPr>
+      <p:sp>
+        <p:nvSpPr>
+          <p:cNvPr id="2" name="Header Placeholder 1"/>
+          <p:cNvSpPr>
+            <a:spLocks noGrp="1"/>
+          </p:cNvSpPr>
+          <p:nvPr>
+            <p:ph type="hdr" sz="quarter"/>
+          </p:nvPr>
+        </p:nvSpPr>
+        <p:spPr>
+          <a:xfrm>
+            <a:off x="0" y="0"/>
+            <a:ext cx="2971800" cy="457200"/>
+          </a:xfrm>
+          <a:prstGeom prst="rect">
+            <a:avLst/>
+          </a:prstGeom>
+        </p:spPr>
+        <p:txBody>
+          <a:bodyPr vert="horz" lIns="91440" tIns="45720" rIns="91440" bIns="45720" rtlCol="0"/>
+          <a:lstStyle>
+            <a:lvl1pPr algn="l">
+              <a:defRPr sz="1200"/>
+            </a:lvl1pPr>
+          </a:lstStyle>
+          <a:p>
+            <a:endParaRPr lang="en-US"/>
+          </a:p>
+        </p:txBody>
+      </p:sp>
+      <p:sp>
+        <p:nvSpPr>
+          <p:cNvPr id="3" name="Date Placeholder 2"/>
+          <p:cNvSpPr>
+            <a:spLocks noGrp="1"/>
+          </p:cNvSpPr>
+          <p:nvPr>
+            <p:ph type="dt" idx="1"/>
+          </p:nvPr>
+        </p:nvSpPr>
+        <p:spPr>
+          <a:xfrm>
+            <a:off x="3884613" y="0"/>
+            <a:ext cx="2971800" cy="457200"/>
+          </a:xfrm>
+          <a:prstGeom prst="rect">
+            <a:avLst/>
+          </a:prstGeom>
+        </p:spPr>
+        <p:txBody>
+          <a:bodyPr vert="horz" lIns="91440" tIns="45720" rIns="91440" bIns="45720" rtlCol="0"/>
+          <a:lstStyle>
+            <a:lvl1pPr algn="r">
+              <a:defRPr sz="1200"/>
+            </a:lvl1pPr>
+          </a:lstStyle>
+          <a:p>
+            <a:fld id="{0F89C1C7-3DCD-1040-A9CF-14679D8B5DDD}" type="datetimeFigureOut">
+              <a:rPr lang="en-US" smtClean="0"/>
+              <a:t>10/17/16</a:t>
+            </a:fld>
+            <a:endParaRPr lang="en-US"/>
+          </a:p>
+        </p:txBody>
+      </p:sp>
+      <p:sp>
+        <p:nvSpPr>
+          <p:cNvPr id="4" name="Slide Image Placeholder 3"/>
+          <p:cNvSpPr>
+            <a:spLocks noGrp="1" noRot="1" noChangeAspect="1"/>
+          </p:cNvSpPr>
+          <p:nvPr>
+            <p:ph type="sldImg" idx="2"/>
+          </p:nvPr>
+        </p:nvSpPr>
+        <p:spPr>
+          <a:xfrm>
+            <a:off x="1143000" y="685800"/>
+            <a:ext cx="4572000" cy="3429000"/>
+          </a:xfrm>
+          <a:prstGeom prst="rect">
+            <a:avLst/>
+          </a:prstGeom>
+          <a:noFill/>
+          <a:ln w="12700">
+            <a:solidFill>
+              <a:prstClr val="black"/>
+            </a:solidFill>
+          </a:ln>
+        </p:spPr>
+        <p:txBody>
+          <a:bodyPr vert="horz" lIns="91440" tIns="45720" rIns="91440" bIns="45720" rtlCol="0" anchor="ctr"/>
+          <a:lstStyle/>
+          <a:p>
+            <a:endParaRPr lang="en-US"/>
+          </a:p>
+        </p:txBody>
+      </p:sp>
+      <p:sp>
+        <p:nvSpPr>
+          <p:cNvPr id="5" name="Notes Placeholder 4"/>
+          <p:cNvSpPr>
+            <a:spLocks noGrp="1"/>
+          </p:cNvSpPr>
+          <p:nvPr>
+            <p:ph type="body" sz="quarter" idx="3"/>
+          </p:nvPr>
+        </p:nvSpPr>
+        <p:spPr>
+          <a:xfrm>
+            <a:off x="685800" y="4343400"/>
+            <a:ext cx="5486400" cy="4114800"/>
+          </a:xfrm>
+          <a:prstGeom prst="rect">
+            <a:avLst/>
+          </a:prstGeom>
+        </p:spPr>
+        <p:txBody>
+          <a:bodyPr vert="horz" lIns="91440" tIns="45720" rIns="91440" bIns="45720" rtlCol="0"/>
+          <a:lstStyle/>
+          <a:p>
+            <a:pPr lvl="0"/>
+            <a:r>
+              <a:rPr lang="en-US" smtClean="0"/>
+              <a:t>Click to edit Master text styles</a:t>
+            </a:r>
+          </a:p>
+          <a:p>
+            <a:pPr lvl="1"/>
+            <a:r>
+              <a:rPr lang="en-US" smtClean="0"/>
+              <a:t>Second level</a:t>
+            </a:r>
+          </a:p>
+          <a:p>
+            <a:pPr lvl="2"/>
+            <a:r>
+              <a:rPr lang="en-US" smtClean="0"/>
+              <a:t>Third level</a:t>
+            </a:r>
+          </a:p>
+          <a:p>
+            <a:pPr lvl="3"/>
+            <a:r>
+              <a:rPr lang="en-US" smtClean="0"/>
+              <a:t>Fourth level</a:t>
+            </a:r>
+          </a:p>
+          <a:p>
+            <a:pPr lvl="4"/>
+            <a:r>
+              <a:rPr lang="en-US" smtClean="0"/>
+              <a:t>Fifth level</a:t>
+            </a:r>
+            <a:endParaRPr lang="en-US"/>
+          </a:p>
+        </p:txBody>
+      </p:sp>
+      <p:sp>
+        <p:nvSpPr>
+          <p:cNvPr id="6" name="Footer Placeholder 5"/>
+          <p:cNvSpPr>
+            <a:spLocks noGrp="1"/>
+          </p:cNvSpPr>
+          <p:nvPr>
+            <p:ph type="ftr" sz="quarter" idx="4"/>
+          </p:nvPr>
+        </p:nvSpPr>
+        <p:spPr>
+          <a:xfrm>
+            <a:off x="0" y="8685213"/>
+            <a:ext cx="2971800" cy="457200"/>
+          </a:xfrm>
+          <a:prstGeom prst="rect">
+            <a:avLst/>
+          </a:prstGeom>
+        </p:spPr>
+        <p:txBody>
+          <a:bodyPr vert="horz" lIns="91440" tIns="45720" rIns="91440" bIns="45720" rtlCol="0" anchor="b"/>
+          <a:lstStyle>
+            <a:lvl1pPr algn="l">
+              <a:defRPr sz="1200"/>
+            </a:lvl1pPr>
+          </a:lstStyle>
+          <a:p>
+            <a:endParaRPr lang="en-US"/>
+          </a:p>
+        </p:txBody>
+      </p:sp>
+      <p:sp>
+        <p:nvSpPr>
+          <p:cNvPr id="7" name="Slide Number Placeholder 6"/>
+          <p:cNvSpPr>
+            <a:spLocks noGrp="1"/>
+          </p:cNvSpPr>
+          <p:nvPr>
+            <p:ph type="sldNum" sz="quarter" idx="5"/>
+          </p:nvPr>
+        </p:nvSpPr>
+        <p:spPr>
+          <a:xfrm>
+            <a:off x="3884613" y="8685213"/>
+            <a:ext cx="2971800" cy="457200"/>
+          </a:xfrm>
+          <a:prstGeom prst="rect">
+            <a:avLst/>
+          </a:prstGeom>
+        </p:spPr>
+        <p:txBody>
+          <a:bodyPr vert="horz" lIns="91440" tIns="45720" rIns="91440" bIns="45720" rtlCol="0" anchor="b"/>
+          <a:lstStyle>
+            <a:lvl1pPr algn="r">
+              <a:defRPr sz="1200"/>
+            </a:lvl1pPr>
+          </a:lstStyle>
+          <a:p>
+            <a:fld id="{BB5E49A5-4136-284D-997B-48E1D791AD67}" type="slidenum">
+              <a:rPr lang="en-US" smtClean="0"/>
+              <a:t>‹#›</a:t>
+            </a:fld>
+            <a:endParaRPr lang="en-US"/>
+          </a:p>
+        </p:txBody>
+      </p:sp>
+    </p:spTree>
+    <p:extLst>
+      <p:ext uri="{BB962C8B-B14F-4D97-AF65-F5344CB8AC3E}">
+        <p14:creationId xmlns:p14="http://schemas.microsoft.com/office/powerpoint/2010/main" val="2623252185"/>
+      </p:ext>
+    </p:extLst>
+  </p:cSld>
+  <p:clrMap bg1="lt1" tx1="dk1" bg2="lt2" tx2="dk2" accent1="accent1" accent2="accent2" accent3="accent3" accent4="accent4" accent5="accent5" accent6="accent6" hlink="hlink" folHlink="folHlink"/>
+  <p:notesStyle>
+    <a:lvl1pPr marL="0" algn="l" defTabSz="457200" rtl="0" eaLnBrk="1" latinLnBrk="0" hangingPunct="1">
+      <a:defRPr sz="1200" kern="1200">
+        <a:solidFill>
+          <a:schemeClr val="tx1"/>
+        </a:solidFill>
+        <a:latin typeface="+mn-lt"/>
+        <a:ea typeface="+mn-ea"/>
+        <a:cs typeface="+mn-cs"/>
+      </a:defRPr>
+    </a:lvl1pPr>
+    <a:lvl2pPr marL="457200" algn="l" defTabSz="457200" rtl="0" eaLnBrk="1" latinLnBrk="0" hangingPunct="1">
+      <a:defRPr sz="1200" kern="1200">
+        <a:solidFill>
+          <a:schemeClr val="tx1"/>
+        </a:solidFill>
+        <a:latin typeface="+mn-lt"/>
+        <a:ea typeface="+mn-ea"/>
+        <a:cs typeface="+mn-cs"/>
+      </a:defRPr>
+    </a:lvl2pPr>
+    <a:lvl3pPr marL="914400" algn="l" defTabSz="457200" rtl="0" eaLnBrk="1" latinLnBrk="0" hangingPunct="1">
+      <a:defRPr sz="1200" kern="1200">
+        <a:solidFill>
+          <a:schemeClr val="tx1"/>
+        </a:solidFill>
+        <a:latin typeface="+mn-lt"/>
+        <a:ea typeface="+mn-ea"/>
+        <a:cs typeface="+mn-cs"/>
+      </a:defRPr>
+    </a:lvl3pPr>
+    <a:lvl4pPr marL="1371600" algn="l" defTabSz="457200" rtl="0" eaLnBrk="1" latinLnBrk="0" hangingPunct="1">
+      <a:defRPr sz="1200" kern="1200">
+        <a:solidFill>
+          <a:schemeClr val="tx1"/>
+        </a:solidFill>
+        <a:latin typeface="+mn-lt"/>
+        <a:ea typeface="+mn-ea"/>
+        <a:cs typeface="+mn-cs"/>
+      </a:defRPr>
+    </a:lvl4pPr>
+    <a:lvl5pPr marL="1828800" algn="l" defTabSz="457200" rtl="0" eaLnBrk="1" latinLnBrk="0" hangingPunct="1">
+      <a:defRPr sz="1200" kern="1200">
+        <a:solidFill>
+          <a:schemeClr val="tx1"/>
+        </a:solidFill>
+        <a:latin typeface="+mn-lt"/>
+        <a:ea typeface="+mn-ea"/>
+        <a:cs typeface="+mn-cs"/>
+      </a:defRPr>
+    </a:lvl5pPr>
+    <a:lvl6pPr marL="2286000" algn="l" defTabSz="457200" rtl="0" eaLnBrk="1" latinLnBrk="0" hangingPunct="1">
+      <a:defRPr sz="1200" kern="1200">
+        <a:solidFill>
+          <a:schemeClr val="tx1"/>
+        </a:solidFill>
+        <a:latin typeface="+mn-lt"/>
+        <a:ea typeface="+mn-ea"/>
+        <a:cs typeface="+mn-cs"/>
+      </a:defRPr>
+    </a:lvl6pPr>
+    <a:lvl7pPr marL="2743200" algn="l" defTabSz="457200" rtl="0" eaLnBrk="1" latinLnBrk="0" hangingPunct="1">
+      <a:defRPr sz="1200" kern="1200">
+        <a:solidFill>
+          <a:schemeClr val="tx1"/>
+        </a:solidFill>
+        <a:latin typeface="+mn-lt"/>
+        <a:ea typeface="+mn-ea"/>
+        <a:cs typeface="+mn-cs"/>
+      </a:defRPr>
+    </a:lvl7pPr>
+    <a:lvl8pPr marL="3200400" algn="l" defTabSz="457200" rtl="0" eaLnBrk="1" latinLnBrk="0" hangingPunct="1">
+      <a:defRPr sz="1200" kern="1200">
+        <a:solidFill>
+          <a:schemeClr val="tx1"/>
+        </a:solidFill>
+        <a:latin typeface="+mn-lt"/>
+        <a:ea typeface="+mn-ea"/>
+        <a:cs typeface="+mn-cs"/>
+      </a:defRPr>
+    </a:lvl8pPr>
+    <a:lvl9pPr marL="3657600" algn="l" defTabSz="457200" rtl="0" eaLnBrk="1" latinLnBrk="0" hangingPunct="1">
+      <a:defRPr sz="1200" kern="1200">
+        <a:solidFill>
+          <a:schemeClr val="tx1"/>
+        </a:solidFill>
+        <a:latin typeface="+mn-lt"/>
+        <a:ea typeface="+mn-ea"/>
+        <a:cs typeface="+mn-cs"/>
+      </a:defRPr>
+    </a:lvl9pPr>
+  </p:notesStyle>
+</p:notesMaster>
+</file>
+
+<file path=ppt/notesSlides/notesSlide1.xml><?xml version="1.0" encoding="utf-8"?>
+<p:notes xmlns:a="http://schemas.openxmlformats.org/drawingml/2006/main" xmlns:p="http://schemas.openxmlformats.org/presentationml/2006/main" xmlns:r="http://schemas.openxmlformats.org/officeDocument/2006/relationships">
+  <p:cSld>
+    <p:spTree>
+      <p:nvGrpSpPr>
+        <p:cNvPr id="1" name=""/>
+        <p:cNvGrpSpPr/>
+        <p:nvPr/>
+      </p:nvGrpSpPr>
+      <p:grpSpPr>
+        <a:xfrm>
+          <a:off x="0" y="0"/>
+          <a:ext cx="0" cy="0"/>
+          <a:chOff x="0" y="0"/>
+          <a:chExt cx="0" cy="0"/>
+        </a:xfrm>
+      </p:grpSpPr>
+      <p:sp>
+        <p:nvSpPr>
+          <p:cNvPr id="2" name="Slide Image Placeholder 1"/>
+          <p:cNvSpPr>
+            <a:spLocks noGrp="1"/>
+          </p:cNvSpPr>
+          <p:nvPr>
+            <p:ph type="sldImg" idx="2"/>
+          </p:nvPr>
+        </p:nvSpPr>
+        <p:spPr/>
+      </p:sp>
+      <p:sp>
+        <p:nvSpPr>
+          <p:cNvPr id="3" name="Notes Placeholder 2"/>
+          <p:cNvSpPr>
+            <a:spLocks noGrp="1"/>
+          </p:cNvSpPr>
+          <p:nvPr>
+            <p:ph type="body" idx="3" sz="quarter"/>
+          </p:nvPr>
+        </p:nvSpPr>
+        <p:spPr/>
+        <p:txBody>
+          <a:bodyPr/>
+          <a:lstStyle/>
+          <a:p>
+            <a:r>
+              <a:t>TerraGridX - Enterprise Product Specification</a:t>
+            </a:r>
+          </a:p>
+          <a:p>
+            <a:r>
+              <a:t>Tagline: Automated Substation Disturbance Analytics &amp; Transmission Intelligence</a:t>
+            </a:r>
+          </a:p>
+          <a:p/>
+          <a:p>
+            <a:r>
+              <a:t>Outcome Quote:</a:t>
+            </a:r>
+          </a:p>
+          <a:p>
+            <a:r>
+              <a:t>“Transforming transmission grid operations through automated COMTRADE harvest, waveform AI diagnostics, and nanosecond SOE timeline stitching.” (— THE OUTCOME-BASED REVOLUTION)</a:t>
+            </a:r>
+          </a:p>
+          <a:p/>
+          <a:p>
+            <a:r>
+              <a:t>Executive Overview:</a:t>
+            </a:r>
+          </a:p>
+          <a:p>
+            <a:r>
+              <a:t>TerraGridX is the disturbance intelligence platform for transmission utilities and substations. It automatically harvests COMTRADE oscillography files from distributed protection relays, uses AI waveform diagnostics (DFT, Fortescue sequence components, impedance loops) to locate fault distance down to tower numbers, and stitches nanosecond Sequence of Events (SOE).</a:t>
+            </a:r>
+          </a:p>
+          <a:p/>
+          <a:p>
+            <a:r>
+              <a:t>Key Telemetry Metrics:</a:t>
+            </a:r>
+          </a:p>
+          <a:p>
+            <a:r>
+              <a:t>- SUBSTATION BUS:: IEC 61850 MMS</a:t>
+            </a:r>
+          </a:p>
+          <a:p>
+            <a:r>
+              <a:t>- GOOSE TRIPPING:: &lt; 4 ms Wire-Speed</a:t>
+            </a:r>
+          </a:p>
+          <a:p>
+            <a:r>
+              <a:t>- FAULT LOCATION:: ±100m Precision</a:t>
+            </a:r>
+          </a:p>
+          <a:p>
+            <a:r>
+              <a:t>- DUAL BUS PROTOCOL:: PRP / HSR Zero-Loss</a:t>
+            </a:r>
+          </a:p>
+        </p:txBody>
+      </p:sp>
+      <p:sp>
+        <p:nvSpPr>
+          <p:cNvPr id="4" name="Slide Number Placeholder 3"/>
+          <p:cNvSpPr>
+            <a:spLocks noGrp="1"/>
+          </p:cNvSpPr>
+          <p:nvPr>
+            <p:ph type="sldNum" idx="5" sz="quarter"/>
+          </p:nvPr>
+        </p:nvSpPr>
+        <p:spPr/>
+      </p:sp>
+    </p:spTree>
+  </p:cSld>
+  <p:clrMapOvr>
+    <a:masterClrMapping/>
+  </p:clrMapOvr>
+</p:notes>
+</file>
+
+<file path=ppt/notesSlides/notesSlide2.xml><?xml version="1.0" encoding="utf-8"?>
+<p:notes xmlns:a="http://schemas.openxmlformats.org/drawingml/2006/main" xmlns:p="http://schemas.openxmlformats.org/presentationml/2006/main" xmlns:r="http://schemas.openxmlformats.org/officeDocument/2006/relationships">
+  <p:cSld>
+    <p:spTree>
+      <p:nvGrpSpPr>
+        <p:cNvPr id="1" name=""/>
+        <p:cNvGrpSpPr/>
+        <p:nvPr/>
+      </p:nvGrpSpPr>
+      <p:grpSpPr>
+        <a:xfrm>
+          <a:off x="0" y="0"/>
+          <a:ext cx="0" cy="0"/>
+          <a:chOff x="0" y="0"/>
+          <a:chExt cx="0" cy="0"/>
+        </a:xfrm>
+      </p:grpSpPr>
+      <p:sp>
+        <p:nvSpPr>
+          <p:cNvPr id="2" name="Slide Image Placeholder 1"/>
+          <p:cNvSpPr>
+            <a:spLocks noGrp="1"/>
+          </p:cNvSpPr>
+          <p:nvPr>
+            <p:ph type="sldImg" idx="2"/>
+          </p:nvPr>
+        </p:nvSpPr>
+        <p:spPr/>
+      </p:sp>
+      <p:sp>
+        <p:nvSpPr>
+          <p:cNvPr id="3" name="Notes Placeholder 2"/>
+          <p:cNvSpPr>
+            <a:spLocks noGrp="1"/>
+          </p:cNvSpPr>
+          <p:nvPr>
+            <p:ph type="body" idx="3" sz="quarter"/>
+          </p:nvPr>
+        </p:nvSpPr>
+        <p:spPr/>
+        <p:txBody>
+          <a:bodyPr/>
+          <a:lstStyle/>
+          <a:p>
+            <a:r>
+              <a:t>TerraGridX - ANSI/ISA-101 Verified Operational Interface</a:t>
+            </a:r>
+          </a:p>
+          <a:p>
+            <a:r>
+              <a:t>Representation: TerraGridX ANSI/ISA-101 Operational Interface &amp; Real-Time System Representation</a:t>
+            </a:r>
+          </a:p>
+          <a:p>
+            <a:r>
+              <a:t>Compliance: ANSI/ISA-101 Verified HMI</a:t>
+            </a:r>
+          </a:p>
+          <a:p>
+            <a:r>
+              <a:t>Asset File: terra_gridx_showcase.jpg</a:t>
+            </a:r>
+          </a:p>
+        </p:txBody>
+      </p:sp>
+      <p:sp>
+        <p:nvSpPr>
+          <p:cNvPr id="4" name="Slide Number Placeholder 3"/>
+          <p:cNvSpPr>
+            <a:spLocks noGrp="1"/>
+          </p:cNvSpPr>
+          <p:nvPr>
+            <p:ph type="sldNum" idx="5" sz="quarter"/>
+          </p:nvPr>
+        </p:nvSpPr>
+        <p:spPr/>
+      </p:sp>
+    </p:spTree>
+  </p:cSld>
+  <p:clrMapOvr>
+    <a:masterClrMapping/>
+  </p:clrMapOvr>
+</p:notes>
+</file>
+
+<file path=ppt/notesSlides/notesSlide3.xml><?xml version="1.0" encoding="utf-8"?>
+<p:notes xmlns:a="http://schemas.openxmlformats.org/drawingml/2006/main" xmlns:p="http://schemas.openxmlformats.org/presentationml/2006/main" xmlns:r="http://schemas.openxmlformats.org/officeDocument/2006/relationships">
+  <p:cSld>
+    <p:spTree>
+      <p:nvGrpSpPr>
+        <p:cNvPr id="1" name=""/>
+        <p:cNvGrpSpPr/>
+        <p:nvPr/>
+      </p:nvGrpSpPr>
+      <p:grpSpPr>
+        <a:xfrm>
+          <a:off x="0" y="0"/>
+          <a:ext cx="0" cy="0"/>
+          <a:chOff x="0" y="0"/>
+          <a:chExt cx="0" cy="0"/>
+        </a:xfrm>
+      </p:grpSpPr>
+      <p:sp>
+        <p:nvSpPr>
+          <p:cNvPr id="2" name="Slide Image Placeholder 1"/>
+          <p:cNvSpPr>
+            <a:spLocks noGrp="1"/>
+          </p:cNvSpPr>
+          <p:nvPr>
+            <p:ph type="sldImg" idx="2"/>
+          </p:nvPr>
+        </p:nvSpPr>
+        <p:spPr/>
+      </p:sp>
+      <p:sp>
+        <p:nvSpPr>
+          <p:cNvPr id="3" name="Notes Placeholder 2"/>
+          <p:cNvSpPr>
+            <a:spLocks noGrp="1"/>
+          </p:cNvSpPr>
+          <p:nvPr>
+            <p:ph type="body" idx="3" sz="quarter"/>
+          </p:nvPr>
+        </p:nvSpPr>
+        <p:spPr/>
+        <p:txBody>
+          <a:bodyPr/>
+          <a:lstStyle/>
+          <a:p>
+            <a:r>
+              <a:t>What TerraGridX Will Do:</a:t>
+            </a:r>
+          </a:p>
+          <a:p>
+            <a:r>
+              <a:t>[1] Automated COMTRADE Harvest:</a:t>
+            </a:r>
+          </a:p>
+          <a:p>
+            <a:r>
+              <a:t>Continuous retrieval of IEEE C37.111-1991/1999/2013 CFG, DAT, and CFF files across distributed IEDs.</a:t>
+            </a:r>
+          </a:p>
+          <a:p/>
+          <a:p>
+            <a:r>
+              <a:t>[2] Full-Cycle Sliding-Window DFT Phasor Engine:</a:t>
+            </a:r>
+          </a:p>
+          <a:p>
+            <a:r>
+              <a:t>Extracts instantaneous fundamental phasors and symmetrical sequence components (positive, negative, zero).</a:t>
+            </a:r>
+          </a:p>
+          <a:p/>
+          <a:p>
+            <a:r>
+              <a:t>[3] K₀-Compensated R-X Impedance Loops:</a:t>
+            </a:r>
+          </a:p>
+          <a:p>
+            <a:r>
+              <a:t>Computes fault impedance trajectory on complex R-X plane to pinpoint distance to line fault.</a:t>
+            </a:r>
+          </a:p>
+          <a:p/>
+          <a:p>
+            <a:r>
+              <a:t>[4] IEC 60255 IDMT Protection Curve Verification:</a:t>
+            </a:r>
+          </a:p>
+          <a:p>
+            <a:r>
+              <a:t>Validates Standard Inverse, Very Inverse, and Extremely Inverse overcurrent trip curves against actual relay times.</a:t>
+            </a:r>
+          </a:p>
+        </p:txBody>
+      </p:sp>
+      <p:sp>
+        <p:nvSpPr>
+          <p:cNvPr id="4" name="Slide Number Placeholder 3"/>
+          <p:cNvSpPr>
+            <a:spLocks noGrp="1"/>
+          </p:cNvSpPr>
+          <p:nvPr>
+            <p:ph type="sldNum" idx="5" sz="quarter"/>
+          </p:nvPr>
+        </p:nvSpPr>
+        <p:spPr/>
+      </p:sp>
+    </p:spTree>
+  </p:cSld>
+  <p:clrMapOvr>
+    <a:masterClrMapping/>
+  </p:clrMapOvr>
+</p:notes>
+</file>
+
+<file path=ppt/notesSlides/notesSlide4.xml><?xml version="1.0" encoding="utf-8"?>
+<p:notes xmlns:a="http://schemas.openxmlformats.org/drawingml/2006/main" xmlns:p="http://schemas.openxmlformats.org/presentationml/2006/main" xmlns:r="http://schemas.openxmlformats.org/officeDocument/2006/relationships">
+  <p:cSld>
+    <p:spTree>
+      <p:nvGrpSpPr>
+        <p:cNvPr id="1" name=""/>
+        <p:cNvGrpSpPr/>
+        <p:nvPr/>
+      </p:nvGrpSpPr>
+      <p:grpSpPr>
+        <a:xfrm>
+          <a:off x="0" y="0"/>
+          <a:ext cx="0" cy="0"/>
+          <a:chOff x="0" y="0"/>
+          <a:chExt cx="0" cy="0"/>
+        </a:xfrm>
+      </p:grpSpPr>
+      <p:sp>
+        <p:nvSpPr>
+          <p:cNvPr id="2" name="Slide Image Placeholder 1"/>
+          <p:cNvSpPr>
+            <a:spLocks noGrp="1"/>
+          </p:cNvSpPr>
+          <p:nvPr>
+            <p:ph type="sldImg" idx="2"/>
+          </p:nvPr>
+        </p:nvSpPr>
+        <p:spPr/>
+      </p:sp>
+      <p:sp>
+        <p:nvSpPr>
+          <p:cNvPr id="3" name="Notes Placeholder 2"/>
+          <p:cNvSpPr>
+            <a:spLocks noGrp="1"/>
+          </p:cNvSpPr>
+          <p:nvPr>
+            <p:ph type="body" idx="3" sz="quarter"/>
+          </p:nvPr>
+        </p:nvSpPr>
+        <p:spPr/>
+        <p:txBody>
+          <a:bodyPr/>
+          <a:lstStyle/>
+          <a:p>
+            <a:r>
+              <a:t>TerraGridX - Operational Use Cases &amp; Field Impact:</a:t>
+            </a:r>
+          </a:p>
+          <a:p>
+            <a:r>
+              <a:t>[Productivity &amp; SAIDI/SAIFI Reduction] Productivity &amp; SAIDI/SAIFI Reduction (Fault Localization):</a:t>
+            </a:r>
+          </a:p>
+          <a:p>
+            <a:r>
+              <a:t>Calculates exact fault distance down to tower numbers within 30 seconds of line trip, guiding repair crews directly to the spot. (TerraGridX openwiki).</a:t>
+            </a:r>
+          </a:p>
+          <a:p/>
+          <a:p>
+            <a:r>
+              <a:t>[Reduced Manpower] Reduced Manpower (Automated Remote COMTRADE Ingestion):</a:t>
+            </a:r>
+          </a:p>
+          <a:p>
+            <a:r>
+              <a:t>Replaces manual substation visits with automated background harvesting of IEEE C37.111 COMTRADE files across all connected relays. (TerraGridX openwiki).</a:t>
+            </a:r>
+          </a:p>
+          <a:p/>
+          <a:p>
+            <a:r>
+              <a:t>[QA &amp; Protection Coordination] QA &amp; Protection Coordination (IEC 60255 IDMT Verification):</a:t>
+            </a:r>
+          </a:p>
+          <a:p>
+            <a:r>
+              <a:t>Compares recorded trip times against Standard Inverse, Very Inverse, and Extremely Inverse curves to flag miscoordinated relay settings. (TerraGridX openwiki).</a:t>
+            </a:r>
+          </a:p>
+          <a:p/>
+          <a:p>
+            <a:r>
+              <a:t>[Efficiency] Efficiency (Circuit Breaker Arcing &amp; Timing Audit):</a:t>
+            </a:r>
+          </a:p>
+          <a:p>
+            <a:r>
+              <a:t>Measures trip coil currents and breaker arcing times during each fault to schedule breaker overhauls before failures occur.</a:t>
+            </a:r>
+          </a:p>
+        </p:txBody>
+      </p:sp>
+      <p:sp>
+        <p:nvSpPr>
+          <p:cNvPr id="4" name="Slide Number Placeholder 3"/>
+          <p:cNvSpPr>
+            <a:spLocks noGrp="1"/>
+          </p:cNvSpPr>
+          <p:nvPr>
+            <p:ph type="sldNum" idx="5" sz="quarter"/>
+          </p:nvPr>
+        </p:nvSpPr>
+        <p:spPr/>
+      </p:sp>
+    </p:spTree>
+  </p:cSld>
+  <p:clrMapOvr>
+    <a:masterClrMapping/>
+  </p:clrMapOvr>
+</p:notes>
+</file>
+
+<file path=ppt/notesSlides/notesSlide5.xml><?xml version="1.0" encoding="utf-8"?>
+<p:notes xmlns:a="http://schemas.openxmlformats.org/drawingml/2006/main" xmlns:p="http://schemas.openxmlformats.org/presentationml/2006/main" xmlns:r="http://schemas.openxmlformats.org/officeDocument/2006/relationships">
+  <p:cSld>
+    <p:spTree>
+      <p:nvGrpSpPr>
+        <p:cNvPr id="1" name=""/>
+        <p:cNvGrpSpPr/>
+        <p:nvPr/>
+      </p:nvGrpSpPr>
+      <p:grpSpPr>
+        <a:xfrm>
+          <a:off x="0" y="0"/>
+          <a:ext cx="0" cy="0"/>
+          <a:chOff x="0" y="0"/>
+          <a:chExt cx="0" cy="0"/>
+        </a:xfrm>
+      </p:grpSpPr>
+      <p:sp>
+        <p:nvSpPr>
+          <p:cNvPr id="2" name="Slide Image Placeholder 1"/>
+          <p:cNvSpPr>
+            <a:spLocks noGrp="1"/>
+          </p:cNvSpPr>
+          <p:nvPr>
+            <p:ph type="sldImg" idx="2"/>
+          </p:nvPr>
+        </p:nvSpPr>
+        <p:spPr/>
+      </p:sp>
+      <p:sp>
+        <p:nvSpPr>
+          <p:cNvPr id="3" name="Notes Placeholder 2"/>
+          <p:cNvSpPr>
+            <a:spLocks noGrp="1"/>
+          </p:cNvSpPr>
+          <p:nvPr>
+            <p:ph type="body" idx="3" sz="quarter"/>
+          </p:nvPr>
+        </p:nvSpPr>
+        <p:spPr/>
+        <p:txBody>
+          <a:bodyPr/>
+          <a:lstStyle/>
+          <a:p>
+            <a:r>
+              <a:t>TerraGridX - Architectural Contrast (Legacy SCADA vs Terrestrial Platform):</a:t>
+            </a:r>
+          </a:p>
+          <a:p>
+            <a:r>
+              <a:t>LEGACY:</a:t>
+            </a:r>
+          </a:p>
+          <a:p>
+            <a:r>
+              <a:t>Engineers must manually travel to remote substations with laptops to download oscillography files after grid blackouts.</a:t>
+            </a:r>
+          </a:p>
+          <a:p/>
+          <a:p>
+            <a:r>
+              <a:t>TERRESTRIAL ADVANTAGE:</a:t>
+            </a:r>
+          </a:p>
+          <a:p>
+            <a:r>
+              <a:t>Instant automated harvesting of CFG, DAT, and HDR files across hundreds of distributed IEDs over WAN.</a:t>
+            </a:r>
+          </a:p>
+          <a:p/>
+          <a:p>
+            <a:r>
+              <a:t>LEGACY:</a:t>
+            </a:r>
+          </a:p>
+          <a:p>
+            <a:r>
+              <a:t>Manual inspection of raw sine wave traces taking days to determine breaker opening times and fault types.</a:t>
+            </a:r>
+          </a:p>
+          <a:p/>
+          <a:p>
+            <a:r>
+              <a:t>TERRESTRIAL ADVANTAGE:</a:t>
+            </a:r>
+          </a:p>
+          <a:p>
+            <a:r>
+              <a:t>Instantaneous AI waveform diagnostics calculating fault impedance, arc resistance, and clearing times in seconds.</a:t>
+            </a:r>
+          </a:p>
+          <a:p/>
+          <a:p>
+            <a:r>
+              <a:t>LEGACY:</a:t>
+            </a:r>
+          </a:p>
+          <a:p>
+            <a:r>
+              <a:t>Unsynchronized relay clocks leading to conflicting theories of what caused the blackout.</a:t>
+            </a:r>
+          </a:p>
+          <a:p/>
+          <a:p>
+            <a:r>
+              <a:t>TERRESTRIAL ADVANTAGE:</a:t>
+            </a:r>
+          </a:p>
+          <a:p>
+            <a:r>
+              <a:t>GPS and PTP nanosecond-synchronized timeline stitching proving the precise root cause without dispute.</a:t>
+            </a:r>
+          </a:p>
+        </p:txBody>
+      </p:sp>
+      <p:sp>
+        <p:nvSpPr>
+          <p:cNvPr id="4" name="Slide Number Placeholder 3"/>
+          <p:cNvSpPr>
+            <a:spLocks noGrp="1"/>
+          </p:cNvSpPr>
+          <p:nvPr>
+            <p:ph type="sldNum" idx="5" sz="quarter"/>
+          </p:nvPr>
+        </p:nvSpPr>
+        <p:spPr/>
+      </p:sp>
+    </p:spTree>
+  </p:cSld>
+  <p:clrMapOvr>
+    <a:masterClrMapping/>
+  </p:clrMapOvr>
+</p:notes>
+</file>
+
+<file path=ppt/notesSlides/notesSlide6.xml><?xml version="1.0" encoding="utf-8"?>
+<p:notes xmlns:a="http://schemas.openxmlformats.org/drawingml/2006/main" xmlns:p="http://schemas.openxmlformats.org/presentationml/2006/main" xmlns:r="http://schemas.openxmlformats.org/officeDocument/2006/relationships">
+  <p:cSld>
+    <p:spTree>
+      <p:nvGrpSpPr>
+        <p:cNvPr id="1" name=""/>
+        <p:cNvGrpSpPr/>
+        <p:nvPr/>
+      </p:nvGrpSpPr>
+      <p:grpSpPr>
+        <a:xfrm>
+          <a:off x="0" y="0"/>
+          <a:ext cx="0" cy="0"/>
+          <a:chOff x="0" y="0"/>
+          <a:chExt cx="0" cy="0"/>
+        </a:xfrm>
+      </p:grpSpPr>
+      <p:sp>
+        <p:nvSpPr>
+          <p:cNvPr id="2" name="Slide Image Placeholder 1"/>
+          <p:cNvSpPr>
+            <a:spLocks noGrp="1"/>
+          </p:cNvSpPr>
+          <p:nvPr>
+            <p:ph type="sldImg" idx="2"/>
+          </p:nvPr>
+        </p:nvSpPr>
+        <p:spPr/>
+      </p:sp>
+      <p:sp>
+        <p:nvSpPr>
+          <p:cNvPr id="3" name="Notes Placeholder 2"/>
+          <p:cNvSpPr>
+            <a:spLocks noGrp="1"/>
+          </p:cNvSpPr>
+          <p:nvPr>
+            <p:ph type="body" idx="3" sz="quarter"/>
+          </p:nvPr>
+        </p:nvSpPr>
+        <p:spPr/>
+        <p:txBody>
+          <a:bodyPr/>
+          <a:lstStyle/>
+          <a:p>
+            <a:r>
+              <a:t>TerraGridX - End-to-End System Diagram &amp; Data Pipeline:</a:t>
+            </a:r>
+          </a:p>
+          <a:p/>
+          <a:p>
+            <a:r>
+              <a:t>Layer 01: Substation Process Bus Ingestion</a:t>
+            </a:r>
+          </a:p>
+          <a:p>
+            <a:r>
+              <a:t>Ultra-fast signal acquisition from optical CT/PT instrument transformers, merging units (MU), protection relays, and circuit breaker controllers.</a:t>
+            </a:r>
+          </a:p>
+          <a:p>
+            <a:r>
+              <a:t>Protocols: IEC 61850-9-2 (Sampled Values), IEC 61850-8-1 (GOOSE), IEEE COMTRADE</a:t>
+            </a:r>
+          </a:p>
+          <a:p/>
+          <a:p>
+            <a:r>
+              <a:t>Layer 02: Microsecond Process Bus</a:t>
+            </a:r>
+          </a:p>
+          <a:p>
+            <a:r>
+              <a:t>Hardware-accelerated PRP/HSR redundant Ethernet streaming, IEEE 1588 PTP nanosecond synchronization, and sub-cycle waveform capture.</a:t>
+            </a:r>
+          </a:p>
+          <a:p>
+            <a:r>
+              <a:t>Protocols: IEEE 1588 PTP Time-Sync, PRP/HSR Redundant Bus, Sub-Cycle Waveform Stream</a:t>
+            </a:r>
+          </a:p>
+          <a:p/>
+          <a:p>
+            <a:r>
+              <a:t>Layer 03: Synchrophasor Stability Core</a:t>
+            </a:r>
+          </a:p>
+          <a:p>
+            <a:r>
+              <a:t>Real-time phasor measurement unit (PMU) angle divergence analysis, transmission grid oscillation damping, and fault location estimation.</a:t>
+            </a:r>
+          </a:p>
+          <a:p>
+            <a:r>
+              <a:t>Protocols: PMU Angle Analysis, Grid Oscillation AI, Fault Location Engine</a:t>
+            </a:r>
+          </a:p>
+          <a:p/>
+          <a:p>
+            <a:r>
+              <a:t>Layer 04: Breaker Trip &amp; Grid Cockpit</a:t>
+            </a:r>
+          </a:p>
+          <a:p>
+            <a:r>
+              <a:t>Sub-4ms GOOSE protective trip command verification, automated synchrocheck breaker closing, and ANSI/ISA-101 single-line substation cockpits.</a:t>
+            </a:r>
+          </a:p>
+          <a:p>
+            <a:r>
+              <a:t>Protocols: Sub-4ms GOOSE Trips, Synchrocheck Closing, ISA-101 Grid HMI</a:t>
+            </a:r>
+          </a:p>
+          <a:p/>
+          <a:p>
+            <a:r>
+              <a:t>Pipeline Flow:</a:t>
+            </a:r>
+          </a:p>
+          <a:p>
+            <a:r>
+              <a:t>DATA PIPELINE FLOW: IEC 61850 Sampled Values ➔ Redundant Microsecond Process Bus ➔ Synchrophasor Dynamic Stability AI ➔ Sub-4ms GOOSE Breaker Trip Execution</a:t>
+            </a:r>
+          </a:p>
+        </p:txBody>
+      </p:sp>
+      <p:sp>
+        <p:nvSpPr>
+          <p:cNvPr id="4" name="Slide Number Placeholder 3"/>
+          <p:cNvSpPr>
+            <a:spLocks noGrp="1"/>
+          </p:cNvSpPr>
+          <p:nvPr>
+            <p:ph type="sldNum" idx="5" sz="quarter"/>
+          </p:nvPr>
+        </p:nvSpPr>
+        <p:spPr/>
+      </p:sp>
+    </p:spTree>
+  </p:cSld>
+  <p:clrMapOvr>
+    <a:masterClrMapping/>
+  </p:clrMapOvr>
+</p:notes>
+</file>
+
+<file path=ppt/notesSlides/notesSlide7.xml><?xml version="1.0" encoding="utf-8"?>
+<p:notes xmlns:a="http://schemas.openxmlformats.org/drawingml/2006/main" xmlns:p="http://schemas.openxmlformats.org/presentationml/2006/main" xmlns:r="http://schemas.openxmlformats.org/officeDocument/2006/relationships">
+  <p:cSld>
+    <p:spTree>
+      <p:nvGrpSpPr>
+        <p:cNvPr id="1" name=""/>
+        <p:cNvGrpSpPr/>
+        <p:nvPr/>
+      </p:nvGrpSpPr>
+      <p:grpSpPr>
+        <a:xfrm>
+          <a:off x="0" y="0"/>
+          <a:ext cx="0" cy="0"/>
+          <a:chOff x="0" y="0"/>
+          <a:chExt cx="0" cy="0"/>
+        </a:xfrm>
+      </p:grpSpPr>
+      <p:sp>
+        <p:nvSpPr>
+          <p:cNvPr id="2" name="Slide Image Placeholder 1"/>
+          <p:cNvSpPr>
+            <a:spLocks noGrp="1"/>
+          </p:cNvSpPr>
+          <p:nvPr>
+            <p:ph type="sldImg" idx="2"/>
+          </p:nvPr>
+        </p:nvSpPr>
+        <p:spPr/>
+      </p:sp>
+      <p:sp>
+        <p:nvSpPr>
+          <p:cNvPr id="3" name="Notes Placeholder 2"/>
+          <p:cNvSpPr>
+            <a:spLocks noGrp="1"/>
+          </p:cNvSpPr>
+          <p:nvPr>
+            <p:ph type="body" idx="3" sz="quarter"/>
+          </p:nvPr>
+        </p:nvSpPr>
+        <p:spPr/>
+        <p:txBody>
+          <a:bodyPr/>
+          <a:lstStyle/>
+          <a:p>
+            <a:r>
+              <a:t>TerraGridX - System Integrator Deployment Framework &amp; Commercial Model:</a:t>
+            </a:r>
+          </a:p>
+          <a:p/>
+          <a:p>
+            <a:r>
+              <a:t>Phase 1: Connectivity &amp; Audit</a:t>
+            </a:r>
+          </a:p>
+          <a:p>
+            <a:r>
+              <a:t>Phase 2: Twin Calibration</a:t>
+            </a:r>
+          </a:p>
+          <a:p>
+            <a:r>
+              <a:t>Phase 3: Autonomous Go-Live</a:t>
+            </a:r>
+          </a:p>
+          <a:p/>
+          <a:p>
+            <a:r>
+              <a:t>Commercial Enablement:</a:t>
+            </a:r>
+          </a:p>
+          <a:p>
+            <a:r>
+              <a:t>- 25%-35% recurring SaaS margins</a:t>
+            </a:r>
+          </a:p>
+          <a:p>
+            <a:r>
+              <a:t>- 7-14 day rapid commissioning</a:t>
+            </a:r>
+          </a:p>
+          <a:p>
+            <a:r>
+              <a:t>- Co-selling and enterprise enablement support</a:t>
+            </a:r>
+          </a:p>
+        </p:txBody>
+      </p:sp>
+      <p:sp>
+        <p:nvSpPr>
+          <p:cNvPr id="4" name="Slide Number Placeholder 3"/>
+          <p:cNvSpPr>
+            <a:spLocks noGrp="1"/>
+          </p:cNvSpPr>
+          <p:nvPr>
+            <p:ph type="sldNum" idx="5" sz="quarter"/>
+          </p:nvPr>
+        </p:nvSpPr>
+        <p:spPr/>
+      </p:sp>
+    </p:spTree>
+  </p:cSld>
+  <p:clrMapOvr>
+    <a:masterClrMapping/>
+  </p:clrMapOvr>
+</p:notes>
 </file>
 
 <file path=ppt/slideLayouts/slideLayout1.xml><?xml version="1.0" encoding="utf-8"?>
@@ -3108,7 +4280,7 @@
             <a:avLst/>
           </a:prstGeom>
           <a:solidFill>
-            <a:srgbClr val="0A0E1A"/>
+            <a:srgbClr val="0B0F17"/>
           </a:solidFill>
           <a:ln>
             <a:noFill/>
@@ -3144,17 +4316,19 @@
         </p:nvSpPr>
         <p:spPr>
           <a:xfrm>
-            <a:off x="0" y="0"/>
-            <a:ext cx="12191695" cy="54864"/>
+            <a:off x="731520" y="365760"/>
+            <a:ext cx="10728655" cy="18288"/>
           </a:xfrm>
           <a:prstGeom prst="rect">
             <a:avLst/>
           </a:prstGeom>
           <a:solidFill>
-            <a:srgbClr val="00D4FF"/>
+            <a:srgbClr val="38BDF8"/>
           </a:solidFill>
           <a:ln>
-            <a:noFill/>
+            <a:solidFill>
+              <a:srgbClr val="38BDF8"/>
+            </a:solidFill>
           </a:ln>
         </p:spPr>
         <p:style>
@@ -3187,8 +4361,8 @@
         </p:nvSpPr>
         <p:spPr>
           <a:xfrm>
-            <a:off x="731520" y="6446520"/>
-            <a:ext cx="10698480" cy="320040"/>
+            <a:off x="731520" y="438912"/>
+            <a:ext cx="8229600" cy="274320"/>
           </a:xfrm>
           <a:prstGeom prst="rect">
             <a:avLst/>
@@ -3196,20 +4370,20 @@
           <a:noFill/>
         </p:spPr>
         <p:txBody>
-          <a:bodyPr wrap="none">
+          <a:bodyPr wrap="square" lIns="0" rIns="0" tIns="0" bIns="0">
             <a:spAutoFit/>
           </a:bodyPr>
           <a:lstStyle/>
           <a:p>
             <a:pPr>
-              <a:defRPr sz="1000">
-                <a:solidFill>
-                  <a:srgbClr val="94A3B8"/>
-                </a:solidFill>
-              </a:defRPr>
-            </a:pPr>
-            <a:r>
-              <a:t>TERRESTRIAL PLATFORM  |  TERRAGRIDX CATALOGUE  |  CONFIDENTIAL - AUTHORISED SYSTEM INTEGRATORS ONLY</a:t>
+              <a:defRPr sz="950" b="1">
+                <a:solidFill>
+                  <a:srgbClr val="38BDF8"/>
+                </a:solidFill>
+              </a:defRPr>
+            </a:pPr>
+            <a:r>
+              <a:t>TERRESTRIAL PLATFORM  |  TERRAGRIDX  |  ENTERPRISE SPECIFICATION</a:t>
             </a:r>
           </a:p>
         </p:txBody>
@@ -3222,8 +4396,8 @@
         </p:nvSpPr>
         <p:spPr>
           <a:xfrm>
-            <a:off x="731520" y="777240"/>
-            <a:ext cx="10698480" cy="3474720"/>
+            <a:off x="731520" y="731520"/>
+            <a:ext cx="9601200" cy="777240"/>
           </a:xfrm>
           <a:prstGeom prst="rect">
             <a:avLst/>
@@ -3231,104 +4405,83 @@
           <a:noFill/>
         </p:spPr>
         <p:txBody>
-          <a:bodyPr wrap="square">
+          <a:bodyPr wrap="square" lIns="0" rIns="0" tIns="0" bIns="0">
             <a:spAutoFit/>
           </a:bodyPr>
           <a:lstStyle/>
           <a:p>
             <a:pPr>
-              <a:spcAft>
-                <a:spcPts val="800"/>
-              </a:spcAft>
-              <a:defRPr sz="1250" b="1">
-                <a:solidFill>
-                  <a:srgbClr val="00D4FF"/>
-                </a:solidFill>
-              </a:defRPr>
-            </a:pPr>
-            <a:r>
-              <a:t>ENTERPRISE PRODUCT SPECIFICATION  |  GRIDS &amp; UTILITIES</a:t>
-            </a:r>
-          </a:p>
-          <a:p>
-            <a:pPr>
-              <a:spcAft>
-                <a:spcPts val="600"/>
-              </a:spcAft>
-              <a:defRPr sz="4600" b="1">
+              <a:defRPr sz="1900" b="1">
                 <a:solidFill>
                   <a:srgbClr val="FFFFFF"/>
                 </a:solidFill>
               </a:defRPr>
             </a:pPr>
             <a:r>
-              <a:t>TerraGridX</a:t>
-            </a:r>
-          </a:p>
-          <a:p>
-            <a:pPr>
-              <a:spcAft>
-                <a:spcPts val="1200"/>
-              </a:spcAft>
-              <a:defRPr sz="1900" b="1">
-                <a:solidFill>
-                  <a:srgbClr val="F5C842"/>
-                </a:solidFill>
-              </a:defRPr>
-            </a:pPr>
-            <a:r>
-              <a:t>Automated Substation Disturbance Analytics &amp; Transmission Intelligence</a:t>
-            </a:r>
-          </a:p>
-          <a:p>
-            <a:pPr>
-              <a:spcAft>
-                <a:spcPts val="1200"/>
-              </a:spcAft>
-              <a:defRPr sz="1400">
-                <a:solidFill>
-                  <a:srgbClr val="C8D8F0"/>
-                </a:solidFill>
-              </a:defRPr>
-            </a:pPr>
-            <a:r>
-              <a:t>Industrial Protocol: IEEE COMTRADE C37.111    |    Domain Architecture: Terrestrial Deterministic Edge Core</a:t>
-            </a:r>
-          </a:p>
-          <a:p>
-            <a:pPr>
-              <a:defRPr sz="1500">
+              <a:t>TerraGridX: Automated Substation Disturbance Analytics &amp; Transmission Intelligence</a:t>
+            </a:r>
+          </a:p>
+          <a:p>
+            <a:pPr>
+              <a:spcBef>
+                <a:spcPts val="300"/>
+              </a:spcBef>
+              <a:defRPr sz="1050">
                 <a:solidFill>
                   <a:srgbClr val="94A3B8"/>
                 </a:solidFill>
               </a:defRPr>
             </a:pPr>
             <a:r>
-              <a:t>Automated Substation Disturbance Analytics &amp; Transmission Intelligence</a:t>
-            </a:r>
-          </a:p>
-        </p:txBody>
-      </p:sp>
-      <p:sp>
-        <p:nvSpPr>
-          <p:cNvPr id="6" name="Rounded Rectangle 5"/>
+              <a:t>Autonomous Industrial Intelligence Suite · Tier-1 Plant Architecture</a:t>
+            </a:r>
+          </a:p>
+        </p:txBody>
+      </p:sp>
+      <p:pic>
+        <p:nvPicPr>
+          <p:cNvPr id="6" name="Picture 5" descr="tp_logo_white.png"/>
+          <p:cNvPicPr>
+            <a:picLocks noChangeAspect="1"/>
+          </p:cNvPicPr>
+          <p:nvPr/>
+        </p:nvPicPr>
+        <p:blipFill>
+          <a:blip r:embed="rId2"/>
+          <a:stretch>
+            <a:fillRect/>
+          </a:stretch>
+        </p:blipFill>
+        <p:spPr>
+          <a:xfrm>
+            <a:off x="10469880" y="411480"/>
+            <a:ext cx="987552" cy="384048"/>
+          </a:xfrm>
+          <a:prstGeom prst="rect">
+            <a:avLst/>
+          </a:prstGeom>
+        </p:spPr>
+      </p:pic>
+      <p:sp>
+        <p:nvSpPr>
+          <p:cNvPr id="7" name="Rounded Rectangle 6"/>
           <p:cNvSpPr/>
           <p:nvPr/>
         </p:nvSpPr>
         <p:spPr>
           <a:xfrm>
-            <a:off x="731520" y="4663440"/>
-            <a:ext cx="2523744" cy="1280160"/>
+            <a:off x="731520" y="1691640"/>
+            <a:ext cx="6217920" cy="4663440"/>
           </a:xfrm>
           <a:prstGeom prst="roundRect">
             <a:avLst/>
           </a:prstGeom>
           <a:solidFill>
-            <a:srgbClr val="0F172A"/>
+            <a:srgbClr val="131926"/>
           </a:solidFill>
-          <a:ln>
+          <a:ln w="12700">
             <a:solidFill>
-              <a:srgbClr val="1E293B"/>
+              <a:srgbClr val="28344B"/>
             </a:solidFill>
           </a:ln>
         </p:spPr>
@@ -3347,57 +4500,113 @@
           </a:fontRef>
         </p:style>
         <p:txBody>
-          <a:bodyPr rtlCol="0" anchor="ctr" wrap="square"/>
-          <a:lstStyle/>
-          <a:p>
-            <a:pPr algn="ctr">
+          <a:bodyPr rtlCol="0" anchor="ctr"/>
+          <a:lstStyle/>
+          <a:p>
+            <a:pPr algn="ctr"/>
+          </a:p>
+        </p:txBody>
+      </p:sp>
+      <p:sp>
+        <p:nvSpPr>
+          <p:cNvPr id="8" name="TextBox 7"/>
+          <p:cNvSpPr txBox="1"/>
+          <p:nvPr/>
+        </p:nvSpPr>
+        <p:spPr>
+          <a:xfrm>
+            <a:off x="960120" y="1874519"/>
+            <a:ext cx="5760720" cy="4297680"/>
+          </a:xfrm>
+          <a:prstGeom prst="rect">
+            <a:avLst/>
+          </a:prstGeom>
+          <a:noFill/>
+        </p:spPr>
+        <p:txBody>
+          <a:bodyPr wrap="square" lIns="0" rIns="0" tIns="0" bIns="0">
+            <a:spAutoFit/>
+          </a:bodyPr>
+          <a:lstStyle/>
+          <a:p>
+            <a:pPr>
+              <a:defRPr sz="1200" i="1" b="1">
+                <a:solidFill>
+                  <a:srgbClr val="38BDF8"/>
+                </a:solidFill>
+              </a:defRPr>
+            </a:pPr>
+            <a:r>
+              <a:t>““Transforming transmission grid operations through automated COMTRADE harvest, waveform AI diagnostics, and nanosecond SOE timeline stitching.””</a:t>
+            </a:r>
+          </a:p>
+          <a:p>
+            <a:pPr>
+              <a:spcBef>
+                <a:spcPts val="400"/>
+              </a:spcBef>
+              <a:spcAft>
+                <a:spcPts val="1200"/>
+              </a:spcAft>
+              <a:defRPr sz="950" b="1">
+                <a:solidFill>
+                  <a:srgbClr val="94A3B8"/>
+                </a:solidFill>
+              </a:defRPr>
+            </a:pPr>
+            <a:r>
+              <a:t>— — THE OUTCOME-BASED REVOLUTION</a:t>
+            </a:r>
+          </a:p>
+          <a:p>
+            <a:pPr>
               <a:spcAft>
                 <a:spcPts val="600"/>
               </a:spcAft>
-              <a:defRPr sz="1100" b="1">
-                <a:solidFill>
-                  <a:srgbClr val="94A3B8"/>
-                </a:solidFill>
-              </a:defRPr>
-            </a:pPr>
-            <a:r>
-              <a:t>SUBSTATION BUS</a:t>
-            </a:r>
-          </a:p>
-          <a:p>
-            <a:pPr algn="ctr">
-              <a:defRPr sz="1650" b="1">
-                <a:solidFill>
-                  <a:srgbClr val="00D4FF"/>
-                </a:solidFill>
-              </a:defRPr>
-            </a:pPr>
-            <a:r>
-              <a:t>IEC 61850 MMS</a:t>
-            </a:r>
-          </a:p>
-        </p:txBody>
-      </p:sp>
-      <p:sp>
-        <p:nvSpPr>
-          <p:cNvPr id="7" name="Rounded Rectangle 6"/>
+              <a:defRPr sz="1050" b="1">
+                <a:solidFill>
+                  <a:srgbClr val="FFFFFF"/>
+                </a:solidFill>
+              </a:defRPr>
+            </a:pPr>
+            <a:r>
+              <a:t>EXECUTIVE OPERATIONAL SYNOPSIS</a:t>
+            </a:r>
+          </a:p>
+          <a:p>
+            <a:pPr>
+              <a:defRPr sz="1050">
+                <a:solidFill>
+                  <a:srgbClr val="F1F5F9"/>
+                </a:solidFill>
+              </a:defRPr>
+            </a:pPr>
+            <a:r>
+              <a:t>TerraGridX is the disturbance intelligence platform for transmission utilities and substations. It automatically harvests COMTRADE oscillography files from distributed protection relays, uses AI waveform diagnostics (DFT, Fortescue sequence components, impedance loops) to locate fault distance down to tower numbers, and stitches nanosecond Sequence of Events (SOE).</a:t>
+            </a:r>
+          </a:p>
+        </p:txBody>
+      </p:sp>
+      <p:sp>
+        <p:nvSpPr>
+          <p:cNvPr id="9" name="Rounded Rectangle 8"/>
           <p:cNvSpPr/>
           <p:nvPr/>
         </p:nvSpPr>
         <p:spPr>
           <a:xfrm>
-            <a:off x="3456432" y="4663440"/>
-            <a:ext cx="2523744" cy="1280160"/>
+            <a:off x="7132320" y="1691640"/>
+            <a:ext cx="2084831" cy="1188720"/>
           </a:xfrm>
           <a:prstGeom prst="roundRect">
             <a:avLst/>
           </a:prstGeom>
           <a:solidFill>
-            <a:srgbClr val="0F172A"/>
+            <a:srgbClr val="131926"/>
           </a:solidFill>
-          <a:ln>
+          <a:ln w="12700">
             <a:solidFill>
-              <a:srgbClr val="1E293B"/>
+              <a:srgbClr val="38BDF8"/>
             </a:solidFill>
           </a:ln>
         </p:spPr>
@@ -3416,57 +4625,83 @@
           </a:fontRef>
         </p:style>
         <p:txBody>
-          <a:bodyPr rtlCol="0" anchor="ctr" wrap="square"/>
-          <a:lstStyle/>
-          <a:p>
-            <a:pPr algn="ctr">
-              <a:spcAft>
-                <a:spcPts val="600"/>
-              </a:spcAft>
-              <a:defRPr sz="1100" b="1">
+          <a:bodyPr rtlCol="0" anchor="ctr"/>
+          <a:lstStyle/>
+          <a:p>
+            <a:pPr algn="ctr"/>
+          </a:p>
+        </p:txBody>
+      </p:sp>
+      <p:sp>
+        <p:nvSpPr>
+          <p:cNvPr id="10" name="TextBox 9"/>
+          <p:cNvSpPr txBox="1"/>
+          <p:nvPr/>
+        </p:nvSpPr>
+        <p:spPr>
+          <a:xfrm>
+            <a:off x="7269480" y="1828800"/>
+            <a:ext cx="1810511" cy="914400"/>
+          </a:xfrm>
+          <a:prstGeom prst="rect">
+            <a:avLst/>
+          </a:prstGeom>
+          <a:noFill/>
+        </p:spPr>
+        <p:txBody>
+          <a:bodyPr wrap="square" lIns="0" rIns="0" tIns="0" bIns="0">
+            <a:spAutoFit/>
+          </a:bodyPr>
+          <a:lstStyle/>
+          <a:p>
+            <a:pPr>
+              <a:defRPr sz="850" b="1">
                 <a:solidFill>
                   <a:srgbClr val="94A3B8"/>
                 </a:solidFill>
               </a:defRPr>
             </a:pPr>
             <a:r>
-              <a:t>GOOSE TRIPPING</a:t>
-            </a:r>
-          </a:p>
-          <a:p>
-            <a:pPr algn="ctr">
-              <a:defRPr sz="1650" b="1">
-                <a:solidFill>
-                  <a:srgbClr val="00D4FF"/>
-                </a:solidFill>
-              </a:defRPr>
-            </a:pPr>
-            <a:r>
-              <a:t>&lt; 4 ms Wire-Speed</a:t>
-            </a:r>
-          </a:p>
-        </p:txBody>
-      </p:sp>
-      <p:sp>
-        <p:nvSpPr>
-          <p:cNvPr id="8" name="Rounded Rectangle 7"/>
+              <a:t>SUBSTATION BUS</a:t>
+            </a:r>
+          </a:p>
+          <a:p>
+            <a:pPr>
+              <a:spcBef>
+                <a:spcPts val="400"/>
+              </a:spcBef>
+              <a:defRPr sz="1400" b="1">
+                <a:solidFill>
+                  <a:srgbClr val="FFFFFF"/>
+                </a:solidFill>
+              </a:defRPr>
+            </a:pPr>
+            <a:r>
+              <a:t>IEC 61850 MMS</a:t>
+            </a:r>
+          </a:p>
+        </p:txBody>
+      </p:sp>
+      <p:sp>
+        <p:nvSpPr>
+          <p:cNvPr id="11" name="Rounded Rectangle 10"/>
           <p:cNvSpPr/>
           <p:nvPr/>
         </p:nvSpPr>
         <p:spPr>
           <a:xfrm>
-            <a:off x="6181344" y="4663440"/>
-            <a:ext cx="2523744" cy="1280160"/>
+            <a:off x="9381743" y="1691640"/>
+            <a:ext cx="2084831" cy="1188720"/>
           </a:xfrm>
           <a:prstGeom prst="roundRect">
             <a:avLst/>
           </a:prstGeom>
           <a:solidFill>
-            <a:srgbClr val="0F172A"/>
+            <a:srgbClr val="131926"/>
           </a:solidFill>
-          <a:ln>
+          <a:ln w="12700">
             <a:solidFill>
-              <a:srgbClr val="1E293B"/>
+              <a:srgbClr val="38BDF8"/>
             </a:solidFill>
           </a:ln>
         </p:spPr>
@@ -3485,57 +4720,83 @@
           </a:fontRef>
         </p:style>
         <p:txBody>
-          <a:bodyPr rtlCol="0" anchor="ctr" wrap="square"/>
-          <a:lstStyle/>
-          <a:p>
-            <a:pPr algn="ctr">
-              <a:spcAft>
-                <a:spcPts val="600"/>
-              </a:spcAft>
-              <a:defRPr sz="1100" b="1">
+          <a:bodyPr rtlCol="0" anchor="ctr"/>
+          <a:lstStyle/>
+          <a:p>
+            <a:pPr algn="ctr"/>
+          </a:p>
+        </p:txBody>
+      </p:sp>
+      <p:sp>
+        <p:nvSpPr>
+          <p:cNvPr id="12" name="TextBox 11"/>
+          <p:cNvSpPr txBox="1"/>
+          <p:nvPr/>
+        </p:nvSpPr>
+        <p:spPr>
+          <a:xfrm>
+            <a:off x="9518903" y="1828800"/>
+            <a:ext cx="1810511" cy="914400"/>
+          </a:xfrm>
+          <a:prstGeom prst="rect">
+            <a:avLst/>
+          </a:prstGeom>
+          <a:noFill/>
+        </p:spPr>
+        <p:txBody>
+          <a:bodyPr wrap="square" lIns="0" rIns="0" tIns="0" bIns="0">
+            <a:spAutoFit/>
+          </a:bodyPr>
+          <a:lstStyle/>
+          <a:p>
+            <a:pPr>
+              <a:defRPr sz="850" b="1">
                 <a:solidFill>
                   <a:srgbClr val="94A3B8"/>
                 </a:solidFill>
               </a:defRPr>
             </a:pPr>
             <a:r>
-              <a:t>FAULT LOCATION</a:t>
-            </a:r>
-          </a:p>
-          <a:p>
-            <a:pPr algn="ctr">
-              <a:defRPr sz="1650" b="1">
-                <a:solidFill>
-                  <a:srgbClr val="00D4FF"/>
-                </a:solidFill>
-              </a:defRPr>
-            </a:pPr>
-            <a:r>
-              <a:t>±100m Precision</a:t>
-            </a:r>
-          </a:p>
-        </p:txBody>
-      </p:sp>
-      <p:sp>
-        <p:nvSpPr>
-          <p:cNvPr id="9" name="Rounded Rectangle 8"/>
+              <a:t>GOOSE TRIPPING</a:t>
+            </a:r>
+          </a:p>
+          <a:p>
+            <a:pPr>
+              <a:spcBef>
+                <a:spcPts val="400"/>
+              </a:spcBef>
+              <a:defRPr sz="1400" b="1">
+                <a:solidFill>
+                  <a:srgbClr val="38BDF8"/>
+                </a:solidFill>
+              </a:defRPr>
+            </a:pPr>
+            <a:r>
+              <a:t>&lt; 4 ms Wire-Speed</a:t>
+            </a:r>
+          </a:p>
+        </p:txBody>
+      </p:sp>
+      <p:sp>
+        <p:nvSpPr>
+          <p:cNvPr id="13" name="Rounded Rectangle 12"/>
           <p:cNvSpPr/>
           <p:nvPr/>
         </p:nvSpPr>
         <p:spPr>
           <a:xfrm>
-            <a:off x="8906256" y="4663440"/>
-            <a:ext cx="2523744" cy="1280160"/>
+            <a:off x="7132320" y="3044952"/>
+            <a:ext cx="2084831" cy="1188720"/>
           </a:xfrm>
           <a:prstGeom prst="roundRect">
             <a:avLst/>
           </a:prstGeom>
           <a:solidFill>
-            <a:srgbClr val="0F172A"/>
+            <a:srgbClr val="131926"/>
           </a:solidFill>
-          <a:ln>
+          <a:ln w="12700">
             <a:solidFill>
-              <a:srgbClr val="1E293B"/>
+              <a:srgbClr val="38BDF8"/>
             </a:solidFill>
           </a:ln>
         </p:spPr>
@@ -3554,33 +4815,264 @@
           </a:fontRef>
         </p:style>
         <p:txBody>
-          <a:bodyPr rtlCol="0" anchor="ctr" wrap="square"/>
-          <a:lstStyle/>
-          <a:p>
-            <a:pPr algn="ctr">
-              <a:spcAft>
-                <a:spcPts val="600"/>
-              </a:spcAft>
+          <a:bodyPr rtlCol="0" anchor="ctr"/>
+          <a:lstStyle/>
+          <a:p>
+            <a:pPr algn="ctr"/>
+          </a:p>
+        </p:txBody>
+      </p:sp>
+      <p:sp>
+        <p:nvSpPr>
+          <p:cNvPr id="14" name="TextBox 13"/>
+          <p:cNvSpPr txBox="1"/>
+          <p:nvPr/>
+        </p:nvSpPr>
+        <p:spPr>
+          <a:xfrm>
+            <a:off x="7269480" y="3182112"/>
+            <a:ext cx="1810511" cy="914400"/>
+          </a:xfrm>
+          <a:prstGeom prst="rect">
+            <a:avLst/>
+          </a:prstGeom>
+          <a:noFill/>
+        </p:spPr>
+        <p:txBody>
+          <a:bodyPr wrap="square" lIns="0" rIns="0" tIns="0" bIns="0">
+            <a:spAutoFit/>
+          </a:bodyPr>
+          <a:lstStyle/>
+          <a:p>
+            <a:pPr>
+              <a:defRPr sz="850" b="1">
+                <a:solidFill>
+                  <a:srgbClr val="94A3B8"/>
+                </a:solidFill>
+              </a:defRPr>
+            </a:pPr>
+            <a:r>
+              <a:t>FAULT LOCATION</a:t>
+            </a:r>
+          </a:p>
+          <a:p>
+            <a:pPr>
+              <a:spcBef>
+                <a:spcPts val="400"/>
+              </a:spcBef>
+              <a:defRPr sz="1400" b="1">
+                <a:solidFill>
+                  <a:srgbClr val="FFFFFF"/>
+                </a:solidFill>
+              </a:defRPr>
+            </a:pPr>
+            <a:r>
+              <a:t>±100m Precision</a:t>
+            </a:r>
+          </a:p>
+        </p:txBody>
+      </p:sp>
+      <p:sp>
+        <p:nvSpPr>
+          <p:cNvPr id="15" name="Rounded Rectangle 14"/>
+          <p:cNvSpPr/>
+          <p:nvPr/>
+        </p:nvSpPr>
+        <p:spPr>
+          <a:xfrm>
+            <a:off x="9381743" y="3044952"/>
+            <a:ext cx="2084831" cy="1188720"/>
+          </a:xfrm>
+          <a:prstGeom prst="roundRect">
+            <a:avLst/>
+          </a:prstGeom>
+          <a:solidFill>
+            <a:srgbClr val="131926"/>
+          </a:solidFill>
+          <a:ln w="12700">
+            <a:solidFill>
+              <a:srgbClr val="38BDF8"/>
+            </a:solidFill>
+          </a:ln>
+        </p:spPr>
+        <p:style>
+          <a:lnRef idx="1">
+            <a:schemeClr val="accent1"/>
+          </a:lnRef>
+          <a:fillRef idx="3">
+            <a:schemeClr val="accent1"/>
+          </a:fillRef>
+          <a:effectRef idx="2">
+            <a:schemeClr val="accent1"/>
+          </a:effectRef>
+          <a:fontRef idx="minor">
+            <a:schemeClr val="lt1"/>
+          </a:fontRef>
+        </p:style>
+        <p:txBody>
+          <a:bodyPr rtlCol="0" anchor="ctr"/>
+          <a:lstStyle/>
+          <a:p>
+            <a:pPr algn="ctr"/>
+          </a:p>
+        </p:txBody>
+      </p:sp>
+      <p:sp>
+        <p:nvSpPr>
+          <p:cNvPr id="16" name="TextBox 15"/>
+          <p:cNvSpPr txBox="1"/>
+          <p:nvPr/>
+        </p:nvSpPr>
+        <p:spPr>
+          <a:xfrm>
+            <a:off x="9518903" y="3182112"/>
+            <a:ext cx="1810511" cy="914400"/>
+          </a:xfrm>
+          <a:prstGeom prst="rect">
+            <a:avLst/>
+          </a:prstGeom>
+          <a:noFill/>
+        </p:spPr>
+        <p:txBody>
+          <a:bodyPr wrap="square" lIns="0" rIns="0" tIns="0" bIns="0">
+            <a:spAutoFit/>
+          </a:bodyPr>
+          <a:lstStyle/>
+          <a:p>
+            <a:pPr>
+              <a:defRPr sz="850" b="1">
+                <a:solidFill>
+                  <a:srgbClr val="94A3B8"/>
+                </a:solidFill>
+              </a:defRPr>
+            </a:pPr>
+            <a:r>
+              <a:t>DUAL BUS PROTOCOL</a:t>
+            </a:r>
+          </a:p>
+          <a:p>
+            <a:pPr>
+              <a:spcBef>
+                <a:spcPts val="400"/>
+              </a:spcBef>
+              <a:defRPr sz="1400" b="1">
+                <a:solidFill>
+                  <a:srgbClr val="FFFFFF"/>
+                </a:solidFill>
+              </a:defRPr>
+            </a:pPr>
+            <a:r>
+              <a:t>PRP / HSR Zero-Loss</a:t>
+            </a:r>
+          </a:p>
+        </p:txBody>
+      </p:sp>
+      <p:sp>
+        <p:nvSpPr>
+          <p:cNvPr id="17" name="Rounded Rectangle 16"/>
+          <p:cNvSpPr/>
+          <p:nvPr/>
+        </p:nvSpPr>
+        <p:spPr>
+          <a:xfrm>
+            <a:off x="7132320" y="4434840"/>
+            <a:ext cx="4334256" cy="1920240"/>
+          </a:xfrm>
+          <a:prstGeom prst="roundRect">
+            <a:avLst/>
+          </a:prstGeom>
+          <a:solidFill>
+            <a:srgbClr val="131926"/>
+          </a:solidFill>
+          <a:ln w="12700">
+            <a:solidFill>
+              <a:srgbClr val="28344B"/>
+            </a:solidFill>
+          </a:ln>
+        </p:spPr>
+        <p:style>
+          <a:lnRef idx="1">
+            <a:schemeClr val="accent1"/>
+          </a:lnRef>
+          <a:fillRef idx="3">
+            <a:schemeClr val="accent1"/>
+          </a:fillRef>
+          <a:effectRef idx="2">
+            <a:schemeClr val="accent1"/>
+          </a:effectRef>
+          <a:fontRef idx="minor">
+            <a:schemeClr val="lt1"/>
+          </a:fontRef>
+        </p:style>
+        <p:txBody>
+          <a:bodyPr rtlCol="0" anchor="ctr"/>
+          <a:lstStyle/>
+          <a:p>
+            <a:pPr algn="ctr"/>
+          </a:p>
+        </p:txBody>
+      </p:sp>
+      <p:sp>
+        <p:nvSpPr>
+          <p:cNvPr id="18" name="TextBox 17"/>
+          <p:cNvSpPr txBox="1"/>
+          <p:nvPr/>
+        </p:nvSpPr>
+        <p:spPr>
+          <a:xfrm>
+            <a:off x="7360920" y="4617720"/>
+            <a:ext cx="3840480" cy="1554480"/>
+          </a:xfrm>
+          <a:prstGeom prst="rect">
+            <a:avLst/>
+          </a:prstGeom>
+          <a:noFill/>
+        </p:spPr>
+        <p:txBody>
+          <a:bodyPr wrap="square" lIns="0" rIns="0" tIns="0" bIns="0">
+            <a:spAutoFit/>
+          </a:bodyPr>
+          <a:lstStyle/>
+          <a:p>
+            <a:pPr>
+              <a:defRPr sz="950" b="1">
+                <a:solidFill>
+                  <a:srgbClr val="38BDF8"/>
+                </a:solidFill>
+              </a:defRPr>
+            </a:pPr>
+            <a:r>
+              <a:t>TERRESTRIAL PLATFORM CORE</a:t>
+            </a:r>
+          </a:p>
+          <a:p>
+            <a:pPr>
+              <a:spcBef>
+                <a:spcPts val="200"/>
+              </a:spcBef>
               <a:defRPr sz="1100" b="1">
                 <a:solidFill>
+                  <a:srgbClr val="FFFFFF"/>
+                </a:solidFill>
+              </a:defRPr>
+            </a:pPr>
+            <a:r>
+              <a:t>Edge-to-Cloud Cognitive Nervous System</a:t>
+            </a:r>
+          </a:p>
+          <a:p>
+            <a:pPr>
+              <a:spcBef>
+                <a:spcPts val="400"/>
+              </a:spcBef>
+              <a:defRPr sz="900">
+                <a:solidFill>
                   <a:srgbClr val="94A3B8"/>
                 </a:solidFill>
               </a:defRPr>
             </a:pPr>
             <a:r>
-              <a:t>DUAL BUS PROTOCOL</a:t>
-            </a:r>
-          </a:p>
-          <a:p>
-            <a:pPr algn="ctr">
-              <a:defRPr sz="1650" b="1">
-                <a:solidFill>
-                  <a:srgbClr val="00D4FF"/>
-                </a:solidFill>
-              </a:defRPr>
-            </a:pPr>
-            <a:r>
-              <a:t>PRP / HSR Zero-Loss</a:t>
+              <a:t>Physics-informed mathematical twin running sub-25ms closed-loop supervisory control with full ISA-95/101 conformity.</a:t>
             </a:r>
           </a:p>
         </p:txBody>
@@ -3618,7 +5110,7 @@
             <a:avLst/>
           </a:prstGeom>
           <a:solidFill>
-            <a:srgbClr val="0A0E1A"/>
+            <a:srgbClr val="0B0F17"/>
           </a:solidFill>
           <a:ln>
             <a:noFill/>
@@ -3654,17 +5146,19 @@
         </p:nvSpPr>
         <p:spPr>
           <a:xfrm>
-            <a:off x="0" y="0"/>
-            <a:ext cx="12191695" cy="54864"/>
+            <a:off x="731520" y="365760"/>
+            <a:ext cx="10728655" cy="18288"/>
           </a:xfrm>
           <a:prstGeom prst="rect">
             <a:avLst/>
           </a:prstGeom>
           <a:solidFill>
-            <a:srgbClr val="00D4FF"/>
+            <a:srgbClr val="38BDF8"/>
           </a:solidFill>
           <a:ln>
-            <a:noFill/>
+            <a:solidFill>
+              <a:srgbClr val="38BDF8"/>
+            </a:solidFill>
           </a:ln>
         </p:spPr>
         <p:style>
@@ -3697,8 +5191,8 @@
         </p:nvSpPr>
         <p:spPr>
           <a:xfrm>
-            <a:off x="731520" y="365760"/>
-            <a:ext cx="10698480" cy="1005840"/>
+            <a:off x="731520" y="438912"/>
+            <a:ext cx="8229600" cy="274320"/>
           </a:xfrm>
           <a:prstGeom prst="rect">
             <a:avLst/>
@@ -3706,35 +5200,20 @@
           <a:noFill/>
         </p:spPr>
         <p:txBody>
-          <a:bodyPr wrap="square">
+          <a:bodyPr wrap="square" lIns="0" rIns="0" tIns="0" bIns="0">
             <a:spAutoFit/>
           </a:bodyPr>
           <a:lstStyle/>
           <a:p>
             <a:pPr>
-              <a:spcAft>
-                <a:spcPts val="400"/>
-              </a:spcAft>
-              <a:defRPr sz="1150" b="1">
-                <a:solidFill>
-                  <a:srgbClr val="00D4FF"/>
-                </a:solidFill>
-              </a:defRPr>
-            </a:pPr>
-            <a:r>
-              <a:t>TERRAGRIDX  |  TERRESTRIAL PLATFORM</a:t>
-            </a:r>
-          </a:p>
-          <a:p>
-            <a:pPr>
-              <a:defRPr sz="2500" b="1">
-                <a:solidFill>
-                  <a:srgbClr val="FFFFFF"/>
-                </a:solidFill>
-              </a:defRPr>
-            </a:pPr>
-            <a:r>
-              <a:t>Core Functional Deliverables &amp; Architectural Pillars</a:t>
+              <a:defRPr sz="950" b="1">
+                <a:solidFill>
+                  <a:srgbClr val="38BDF8"/>
+                </a:solidFill>
+              </a:defRPr>
+            </a:pPr>
+            <a:r>
+              <a:t>TERRESTRIAL PLATFORM  |  TERRAGRIDX  |  OPERATIONAL INTERFACE</a:t>
             </a:r>
           </a:p>
         </p:txBody>
@@ -3747,8 +5226,8 @@
         </p:nvSpPr>
         <p:spPr>
           <a:xfrm>
-            <a:off x="731520" y="6446520"/>
-            <a:ext cx="10698480" cy="320040"/>
+            <a:off x="731520" y="731520"/>
+            <a:ext cx="9601200" cy="777240"/>
           </a:xfrm>
           <a:prstGeom prst="rect">
             <a:avLst/>
@@ -3756,44 +5235,83 @@
           <a:noFill/>
         </p:spPr>
         <p:txBody>
-          <a:bodyPr wrap="none">
+          <a:bodyPr wrap="square" lIns="0" rIns="0" tIns="0" bIns="0">
             <a:spAutoFit/>
           </a:bodyPr>
           <a:lstStyle/>
           <a:p>
             <a:pPr>
-              <a:defRPr sz="1000">
+              <a:defRPr sz="1900" b="1">
+                <a:solidFill>
+                  <a:srgbClr val="FFFFFF"/>
+                </a:solidFill>
+              </a:defRPr>
+            </a:pPr>
+            <a:r>
+              <a:t>TerraGridX ANSI/ISA-101 Operational Interface &amp; Real-Time System Representation</a:t>
+            </a:r>
+          </a:p>
+          <a:p>
+            <a:pPr>
+              <a:spcBef>
+                <a:spcPts val="300"/>
+              </a:spcBef>
+              <a:defRPr sz="1050">
                 <a:solidFill>
                   <a:srgbClr val="94A3B8"/>
                 </a:solidFill>
               </a:defRPr>
             </a:pPr>
             <a:r>
-              <a:t>TERRESTRIAL PLATFORM  |  TERRAGRIDX CATALOGUE  |  CONFIDENTIAL - AUTHORISED SYSTEM INTEGRATORS ONLY</a:t>
-            </a:r>
-          </a:p>
-        </p:txBody>
-      </p:sp>
-      <p:sp>
-        <p:nvSpPr>
-          <p:cNvPr id="6" name="Rounded Rectangle 5"/>
+              <a:t>ANSI/ISA-101 Ergonomic High-Performance HMI · Real-Time System Representation</a:t>
+            </a:r>
+          </a:p>
+        </p:txBody>
+      </p:sp>
+      <p:pic>
+        <p:nvPicPr>
+          <p:cNvPr id="6" name="Picture 5" descr="tp_logo_white.png"/>
+          <p:cNvPicPr>
+            <a:picLocks noChangeAspect="1"/>
+          </p:cNvPicPr>
+          <p:nvPr/>
+        </p:nvPicPr>
+        <p:blipFill>
+          <a:blip r:embed="rId2"/>
+          <a:stretch>
+            <a:fillRect/>
+          </a:stretch>
+        </p:blipFill>
+        <p:spPr>
+          <a:xfrm>
+            <a:off x="10469880" y="411480"/>
+            <a:ext cx="987552" cy="384048"/>
+          </a:xfrm>
+          <a:prstGeom prst="rect">
+            <a:avLst/>
+          </a:prstGeom>
+        </p:spPr>
+      </p:pic>
+      <p:sp>
+        <p:nvSpPr>
+          <p:cNvPr id="7" name="Rounded Rectangle 6"/>
           <p:cNvSpPr/>
           <p:nvPr/>
         </p:nvSpPr>
         <p:spPr>
           <a:xfrm>
             <a:off x="731520" y="1645920"/>
-            <a:ext cx="5212080" cy="2148840"/>
+            <a:ext cx="10728655" cy="4709160"/>
           </a:xfrm>
           <a:prstGeom prst="roundRect">
             <a:avLst/>
           </a:prstGeom>
           <a:solidFill>
-            <a:srgbClr val="0F172A"/>
+            <a:srgbClr val="131926"/>
           </a:solidFill>
-          <a:ln>
+          <a:ln w="12700">
             <a:solidFill>
-              <a:srgbClr val="1E293B"/>
+              <a:srgbClr val="38BDF8"/>
             </a:solidFill>
           </a:ln>
         </p:spPr>
@@ -3812,304 +5330,37 @@
           </a:fontRef>
         </p:style>
         <p:txBody>
-          <a:bodyPr rtlCol="0" anchor="ctr" wrap="square"/>
-          <a:lstStyle/>
-          <a:p>
-            <a:pPr algn="ctr">
-              <a:spcAft>
-                <a:spcPts val="400"/>
-              </a:spcAft>
-              <a:defRPr sz="1100" b="1">
-                <a:solidFill>
-                  <a:srgbClr val="00D4FF"/>
-                </a:solidFill>
-              </a:defRPr>
-            </a:pPr>
-            <a:r>
-              <a:t>PILLAR 01</a:t>
-            </a:r>
-          </a:p>
-          <a:p>
-            <a:pPr>
-              <a:spcAft>
-                <a:spcPts val="600"/>
-              </a:spcAft>
-              <a:defRPr sz="1650" b="1">
-                <a:solidFill>
-                  <a:srgbClr val="FFFFFF"/>
-                </a:solidFill>
-              </a:defRPr>
-            </a:pPr>
-            <a:r>
-              <a:t>Automated COMTRADE Harvest</a:t>
-            </a:r>
-          </a:p>
-          <a:p>
-            <a:pPr>
-              <a:defRPr sz="1300">
-                <a:solidFill>
-                  <a:srgbClr val="C8D8F0"/>
-                </a:solidFill>
-              </a:defRPr>
-            </a:pPr>
-            <a:r>
-              <a:t>Continuous retrieval of IEEE C37.111-1991/1999/2013 CFG, DAT, and CFF files across distributed IEDs.</a:t>
-            </a:r>
-          </a:p>
-        </p:txBody>
-      </p:sp>
-      <p:sp>
-        <p:nvSpPr>
-          <p:cNvPr id="7" name="Rounded Rectangle 6"/>
-          <p:cNvSpPr/>
-          <p:nvPr/>
-        </p:nvSpPr>
-        <p:spPr>
-          <a:xfrm>
-            <a:off x="6217920" y="1645920"/>
-            <a:ext cx="5212080" cy="2148840"/>
-          </a:xfrm>
-          <a:prstGeom prst="roundRect">
-            <a:avLst/>
-          </a:prstGeom>
-          <a:solidFill>
-            <a:srgbClr val="0F172A"/>
-          </a:solidFill>
-          <a:ln>
-            <a:solidFill>
-              <a:srgbClr val="1E293B"/>
-            </a:solidFill>
-          </a:ln>
-        </p:spPr>
-        <p:style>
-          <a:lnRef idx="1">
-            <a:schemeClr val="accent1"/>
-          </a:lnRef>
-          <a:fillRef idx="3">
-            <a:schemeClr val="accent1"/>
-          </a:fillRef>
-          <a:effectRef idx="2">
-            <a:schemeClr val="accent1"/>
-          </a:effectRef>
-          <a:fontRef idx="minor">
-            <a:schemeClr val="lt1"/>
-          </a:fontRef>
-        </p:style>
-        <p:txBody>
-          <a:bodyPr rtlCol="0" anchor="ctr" wrap="square"/>
-          <a:lstStyle/>
-          <a:p>
-            <a:pPr algn="ctr">
-              <a:spcAft>
-                <a:spcPts val="400"/>
-              </a:spcAft>
-              <a:defRPr sz="1100" b="1">
-                <a:solidFill>
-                  <a:srgbClr val="00D4FF"/>
-                </a:solidFill>
-              </a:defRPr>
-            </a:pPr>
-            <a:r>
-              <a:t>PILLAR 02</a:t>
-            </a:r>
-          </a:p>
-          <a:p>
-            <a:pPr>
-              <a:spcAft>
-                <a:spcPts val="600"/>
-              </a:spcAft>
-              <a:defRPr sz="1650" b="1">
-                <a:solidFill>
-                  <a:srgbClr val="FFFFFF"/>
-                </a:solidFill>
-              </a:defRPr>
-            </a:pPr>
-            <a:r>
-              <a:t>Full-Cycle Sliding-Window DFT Phasor Engine</a:t>
-            </a:r>
-          </a:p>
-          <a:p>
-            <a:pPr>
-              <a:defRPr sz="1300">
-                <a:solidFill>
-                  <a:srgbClr val="C8D8F0"/>
-                </a:solidFill>
-              </a:defRPr>
-            </a:pPr>
-            <a:r>
-              <a:t>Extracts instantaneous fundamental phasors and symmetrical sequence components (positive, negative, zero).</a:t>
-            </a:r>
-          </a:p>
-        </p:txBody>
-      </p:sp>
-      <p:sp>
-        <p:nvSpPr>
-          <p:cNvPr id="8" name="Rounded Rectangle 7"/>
-          <p:cNvSpPr/>
-          <p:nvPr/>
-        </p:nvSpPr>
-        <p:spPr>
-          <a:xfrm>
-            <a:off x="731520" y="4069080"/>
-            <a:ext cx="5212080" cy="2148840"/>
-          </a:xfrm>
-          <a:prstGeom prst="roundRect">
-            <a:avLst/>
-          </a:prstGeom>
-          <a:solidFill>
-            <a:srgbClr val="0F172A"/>
-          </a:solidFill>
-          <a:ln>
-            <a:solidFill>
-              <a:srgbClr val="1E293B"/>
-            </a:solidFill>
-          </a:ln>
-        </p:spPr>
-        <p:style>
-          <a:lnRef idx="1">
-            <a:schemeClr val="accent1"/>
-          </a:lnRef>
-          <a:fillRef idx="3">
-            <a:schemeClr val="accent1"/>
-          </a:fillRef>
-          <a:effectRef idx="2">
-            <a:schemeClr val="accent1"/>
-          </a:effectRef>
-          <a:fontRef idx="minor">
-            <a:schemeClr val="lt1"/>
-          </a:fontRef>
-        </p:style>
-        <p:txBody>
-          <a:bodyPr rtlCol="0" anchor="ctr" wrap="square"/>
-          <a:lstStyle/>
-          <a:p>
-            <a:pPr algn="ctr">
-              <a:spcAft>
-                <a:spcPts val="400"/>
-              </a:spcAft>
-              <a:defRPr sz="1100" b="1">
-                <a:solidFill>
-                  <a:srgbClr val="00D4FF"/>
-                </a:solidFill>
-              </a:defRPr>
-            </a:pPr>
-            <a:r>
-              <a:t>PILLAR 03</a:t>
-            </a:r>
-          </a:p>
-          <a:p>
-            <a:pPr>
-              <a:spcAft>
-                <a:spcPts val="600"/>
-              </a:spcAft>
-              <a:defRPr sz="1650" b="1">
-                <a:solidFill>
-                  <a:srgbClr val="FFFFFF"/>
-                </a:solidFill>
-              </a:defRPr>
-            </a:pPr>
-            <a:r>
-              <a:t>K₀-Compensated R-X Impedance Loops</a:t>
-            </a:r>
-          </a:p>
-          <a:p>
-            <a:pPr>
-              <a:defRPr sz="1300">
-                <a:solidFill>
-                  <a:srgbClr val="C8D8F0"/>
-                </a:solidFill>
-              </a:defRPr>
-            </a:pPr>
-            <a:r>
-              <a:t>Computes fault impedance trajectory on complex R-X plane to pinpoint distance to line fault.</a:t>
-            </a:r>
-          </a:p>
-        </p:txBody>
-      </p:sp>
-      <p:sp>
-        <p:nvSpPr>
-          <p:cNvPr id="9" name="Rounded Rectangle 8"/>
-          <p:cNvSpPr/>
-          <p:nvPr/>
-        </p:nvSpPr>
-        <p:spPr>
-          <a:xfrm>
-            <a:off x="6217920" y="4069080"/>
-            <a:ext cx="5212080" cy="2148840"/>
-          </a:xfrm>
-          <a:prstGeom prst="roundRect">
-            <a:avLst/>
-          </a:prstGeom>
-          <a:solidFill>
-            <a:srgbClr val="0F172A"/>
-          </a:solidFill>
-          <a:ln>
-            <a:solidFill>
-              <a:srgbClr val="1E293B"/>
-            </a:solidFill>
-          </a:ln>
-        </p:spPr>
-        <p:style>
-          <a:lnRef idx="1">
-            <a:schemeClr val="accent1"/>
-          </a:lnRef>
-          <a:fillRef idx="3">
-            <a:schemeClr val="accent1"/>
-          </a:fillRef>
-          <a:effectRef idx="2">
-            <a:schemeClr val="accent1"/>
-          </a:effectRef>
-          <a:fontRef idx="minor">
-            <a:schemeClr val="lt1"/>
-          </a:fontRef>
-        </p:style>
-        <p:txBody>
-          <a:bodyPr rtlCol="0" anchor="ctr" wrap="square"/>
-          <a:lstStyle/>
-          <a:p>
-            <a:pPr algn="ctr">
-              <a:spcAft>
-                <a:spcPts val="400"/>
-              </a:spcAft>
-              <a:defRPr sz="1100" b="1">
-                <a:solidFill>
-                  <a:srgbClr val="00D4FF"/>
-                </a:solidFill>
-              </a:defRPr>
-            </a:pPr>
-            <a:r>
-              <a:t>PILLAR 04</a:t>
-            </a:r>
-          </a:p>
-          <a:p>
-            <a:pPr>
-              <a:spcAft>
-                <a:spcPts val="600"/>
-              </a:spcAft>
-              <a:defRPr sz="1650" b="1">
-                <a:solidFill>
-                  <a:srgbClr val="FFFFFF"/>
-                </a:solidFill>
-              </a:defRPr>
-            </a:pPr>
-            <a:r>
-              <a:t>IEC 60255 IDMT Protection Curve Verification</a:t>
-            </a:r>
-          </a:p>
-          <a:p>
-            <a:pPr>
-              <a:defRPr sz="1300">
-                <a:solidFill>
-                  <a:srgbClr val="C8D8F0"/>
-                </a:solidFill>
-              </a:defRPr>
-            </a:pPr>
-            <a:r>
-              <a:t>Validates Standard Inverse, Very Inverse, and Extremely Inverse overcurrent trip curves against actual relay times.</a:t>
-            </a:r>
-          </a:p>
-        </p:txBody>
-      </p:sp>
+          <a:bodyPr rtlCol="0" anchor="ctr"/>
+          <a:lstStyle/>
+          <a:p>
+            <a:pPr algn="ctr"/>
+          </a:p>
+        </p:txBody>
+      </p:sp>
+      <p:pic>
+        <p:nvPicPr>
+          <p:cNvPr id="8" name="Picture 7" descr="terra_gridx_showcase.jpg"/>
+          <p:cNvPicPr>
+            <a:picLocks noChangeAspect="1"/>
+          </p:cNvPicPr>
+          <p:nvPr/>
+        </p:nvPicPr>
+        <p:blipFill>
+          <a:blip r:embed="rId3"/>
+          <a:stretch>
+            <a:fillRect/>
+          </a:stretch>
+        </p:blipFill>
+        <p:spPr>
+          <a:xfrm>
+            <a:off x="777240" y="1691640"/>
+            <a:ext cx="10637215" cy="4617720"/>
+          </a:xfrm>
+          <a:prstGeom prst="rect">
+            <a:avLst/>
+          </a:prstGeom>
+        </p:spPr>
+      </p:pic>
     </p:spTree>
   </p:cSld>
   <p:clrMapOvr>
@@ -4143,7 +5394,7 @@
             <a:avLst/>
           </a:prstGeom>
           <a:solidFill>
-            <a:srgbClr val="0A0E1A"/>
+            <a:srgbClr val="0B0F17"/>
           </a:solidFill>
           <a:ln>
             <a:noFill/>
@@ -4179,17 +5430,19 @@
         </p:nvSpPr>
         <p:spPr>
           <a:xfrm>
-            <a:off x="0" y="0"/>
-            <a:ext cx="12191695" cy="54864"/>
+            <a:off x="731520" y="365760"/>
+            <a:ext cx="10728655" cy="18288"/>
           </a:xfrm>
           <a:prstGeom prst="rect">
             <a:avLst/>
           </a:prstGeom>
           <a:solidFill>
-            <a:srgbClr val="00D4FF"/>
+            <a:srgbClr val="38BDF8"/>
           </a:solidFill>
           <a:ln>
-            <a:noFill/>
+            <a:solidFill>
+              <a:srgbClr val="38BDF8"/>
+            </a:solidFill>
           </a:ln>
         </p:spPr>
         <p:style>
@@ -4222,8 +5475,8 @@
         </p:nvSpPr>
         <p:spPr>
           <a:xfrm>
-            <a:off x="731520" y="365760"/>
-            <a:ext cx="10698480" cy="1005840"/>
+            <a:off x="731520" y="438912"/>
+            <a:ext cx="8229600" cy="274320"/>
           </a:xfrm>
           <a:prstGeom prst="rect">
             <a:avLst/>
@@ -4231,35 +5484,20 @@
           <a:noFill/>
         </p:spPr>
         <p:txBody>
-          <a:bodyPr wrap="square">
+          <a:bodyPr wrap="square" lIns="0" rIns="0" tIns="0" bIns="0">
             <a:spAutoFit/>
           </a:bodyPr>
           <a:lstStyle/>
           <a:p>
             <a:pPr>
-              <a:spcAft>
-                <a:spcPts val="400"/>
-              </a:spcAft>
-              <a:defRPr sz="1150" b="1">
-                <a:solidFill>
-                  <a:srgbClr val="00D4FF"/>
-                </a:solidFill>
-              </a:defRPr>
-            </a:pPr>
-            <a:r>
-              <a:t>TERRAGRIDX  |  TERRESTRIAL PLATFORM</a:t>
-            </a:r>
-          </a:p>
-          <a:p>
-            <a:pPr>
-              <a:defRPr sz="2500" b="1">
-                <a:solidFill>
-                  <a:srgbClr val="FFFFFF"/>
-                </a:solidFill>
-              </a:defRPr>
-            </a:pPr>
-            <a:r>
-              <a:t>Field-Validated Operational Use Cases &amp; Quantifiable ROI</a:t>
+              <a:defRPr sz="950" b="1">
+                <a:solidFill>
+                  <a:srgbClr val="38BDF8"/>
+                </a:solidFill>
+              </a:defRPr>
+            </a:pPr>
+            <a:r>
+              <a:t>TERRESTRIAL PLATFORM  |  TERRAGRIDX  |  CORE CAPABILITIES</a:t>
             </a:r>
           </a:p>
         </p:txBody>
@@ -4272,8 +5510,8 @@
         </p:nvSpPr>
         <p:spPr>
           <a:xfrm>
-            <a:off x="731520" y="6446520"/>
-            <a:ext cx="10698480" cy="320040"/>
+            <a:off x="731520" y="731520"/>
+            <a:ext cx="9601200" cy="777240"/>
           </a:xfrm>
           <a:prstGeom prst="rect">
             <a:avLst/>
@@ -4281,44 +5519,83 @@
           <a:noFill/>
         </p:spPr>
         <p:txBody>
-          <a:bodyPr wrap="none">
+          <a:bodyPr wrap="square" lIns="0" rIns="0" tIns="0" bIns="0">
             <a:spAutoFit/>
           </a:bodyPr>
           <a:lstStyle/>
           <a:p>
             <a:pPr>
-              <a:defRPr sz="1000">
+              <a:defRPr sz="1900" b="1">
+                <a:solidFill>
+                  <a:srgbClr val="FFFFFF"/>
+                </a:solidFill>
+              </a:defRPr>
+            </a:pPr>
+            <a:r>
+              <a:t>What TerraGridX Will Do</a:t>
+            </a:r>
+          </a:p>
+          <a:p>
+            <a:pPr>
+              <a:spcBef>
+                <a:spcPts val="300"/>
+              </a:spcBef>
+              <a:defRPr sz="1050">
                 <a:solidFill>
                   <a:srgbClr val="94A3B8"/>
                 </a:solidFill>
               </a:defRPr>
             </a:pPr>
             <a:r>
-              <a:t>TERRESTRIAL PLATFORM  |  TERRAGRIDX CATALOGUE  |  CONFIDENTIAL - AUTHORISED SYSTEM INTEGRATORS ONLY</a:t>
-            </a:r>
-          </a:p>
-        </p:txBody>
-      </p:sp>
-      <p:sp>
-        <p:nvSpPr>
-          <p:cNvPr id="6" name="Rounded Rectangle 5"/>
+              <a:t>Specific operational functions and engineering capabilities directly sourced from technical documentation.</a:t>
+            </a:r>
+          </a:p>
+        </p:txBody>
+      </p:sp>
+      <p:pic>
+        <p:nvPicPr>
+          <p:cNvPr id="6" name="Picture 5" descr="tp_logo_white.png"/>
+          <p:cNvPicPr>
+            <a:picLocks noChangeAspect="1"/>
+          </p:cNvPicPr>
+          <p:nvPr/>
+        </p:nvPicPr>
+        <p:blipFill>
+          <a:blip r:embed="rId2"/>
+          <a:stretch>
+            <a:fillRect/>
+          </a:stretch>
+        </p:blipFill>
+        <p:spPr>
+          <a:xfrm>
+            <a:off x="10469880" y="411480"/>
+            <a:ext cx="987552" cy="384048"/>
+          </a:xfrm>
+          <a:prstGeom prst="rect">
+            <a:avLst/>
+          </a:prstGeom>
+        </p:spPr>
+      </p:pic>
+      <p:sp>
+        <p:nvSpPr>
+          <p:cNvPr id="7" name="Rounded Rectangle 6"/>
           <p:cNvSpPr/>
           <p:nvPr/>
         </p:nvSpPr>
         <p:spPr>
           <a:xfrm>
-            <a:off x="731520" y="1645920"/>
-            <a:ext cx="3401568" cy="4389120"/>
+            <a:off x="731520" y="1691640"/>
+            <a:ext cx="5230368" cy="2194560"/>
           </a:xfrm>
           <a:prstGeom prst="roundRect">
             <a:avLst/>
           </a:prstGeom>
           <a:solidFill>
-            <a:srgbClr val="0F172A"/>
+            <a:srgbClr val="131926"/>
           </a:solidFill>
-          <a:ln>
+          <a:ln w="12700">
             <a:solidFill>
-              <a:srgbClr val="1E293B"/>
+              <a:srgbClr val="28344B"/>
             </a:solidFill>
           </a:ln>
         </p:spPr>
@@ -4337,72 +5614,98 @@
           </a:fontRef>
         </p:style>
         <p:txBody>
-          <a:bodyPr rtlCol="0" anchor="ctr" wrap="square"/>
-          <a:lstStyle/>
-          <a:p>
-            <a:pPr algn="ctr">
+          <a:bodyPr rtlCol="0" anchor="ctr"/>
+          <a:lstStyle/>
+          <a:p>
+            <a:pPr algn="ctr"/>
+          </a:p>
+        </p:txBody>
+      </p:sp>
+      <p:sp>
+        <p:nvSpPr>
+          <p:cNvPr id="8" name="TextBox 7"/>
+          <p:cNvSpPr txBox="1"/>
+          <p:nvPr/>
+        </p:nvSpPr>
+        <p:spPr>
+          <a:xfrm>
+            <a:off x="960120" y="1874520"/>
+            <a:ext cx="4773168" cy="1828800"/>
+          </a:xfrm>
+          <a:prstGeom prst="rect">
+            <a:avLst/>
+          </a:prstGeom>
+          <a:noFill/>
+        </p:spPr>
+        <p:txBody>
+          <a:bodyPr wrap="square" lIns="0" rIns="0" tIns="0" bIns="0">
+            <a:spAutoFit/>
+          </a:bodyPr>
+          <a:lstStyle/>
+          <a:p>
+            <a:pPr>
+              <a:defRPr sz="850" b="1">
+                <a:solidFill>
+                  <a:srgbClr val="38BDF8"/>
+                </a:solidFill>
+              </a:defRPr>
+            </a:pPr>
+            <a:r>
+              <a:t>PILLAR 01  |  ENGINEERING CAPABILITY</a:t>
+            </a:r>
+          </a:p>
+          <a:p>
+            <a:pPr>
+              <a:spcBef>
+                <a:spcPts val="300"/>
+              </a:spcBef>
               <a:spcAft>
-                <a:spcPts val="800"/>
+                <a:spcPts val="600"/>
               </a:spcAft>
-              <a:defRPr sz="1100" b="1">
-                <a:solidFill>
-                  <a:srgbClr val="F5C842"/>
-                </a:solidFill>
-              </a:defRPr>
-            </a:pPr>
-            <a:r>
-              <a:t>PRODUCTIVITY &amp; SAIDI/SAIFI REDUCTION</a:t>
-            </a:r>
-          </a:p>
-          <a:p>
-            <a:pPr>
-              <a:spcAft>
-                <a:spcPts val="1200"/>
-              </a:spcAft>
-              <a:defRPr sz="1600" b="1">
+              <a:defRPr sz="1300" b="1">
                 <a:solidFill>
                   <a:srgbClr val="FFFFFF"/>
                 </a:solidFill>
               </a:defRPr>
             </a:pPr>
             <a:r>
-              <a:t>Productivity &amp; SAIDI/SAIFI Reduction (Fault Localization)</a:t>
-            </a:r>
-          </a:p>
-          <a:p>
-            <a:pPr>
-              <a:defRPr sz="1300">
-                <a:solidFill>
-                  <a:srgbClr val="C8D8F0"/>
-                </a:solidFill>
-              </a:defRPr>
-            </a:pPr>
-            <a:r>
-              <a:t>Calculates exact fault distance down to tower numbers within 30 seconds of line trip, guiding repair crews directly to the spot. (TerraGridX openwiki).</a:t>
-            </a:r>
-          </a:p>
-        </p:txBody>
-      </p:sp>
-      <p:sp>
-        <p:nvSpPr>
-          <p:cNvPr id="7" name="Rounded Rectangle 6"/>
+              <a:t>Automated COMTRADE Harvest</a:t>
+            </a:r>
+          </a:p>
+          <a:p>
+            <a:pPr>
+              <a:defRPr sz="1000">
+                <a:solidFill>
+                  <a:srgbClr val="F1F5F9"/>
+                </a:solidFill>
+              </a:defRPr>
+            </a:pPr>
+            <a:r>
+              <a:t>Continuous retrieval of IEEE C37.111-1991/1999/2013 CFG, DAT, and CFF files across distributed IEDs.</a:t>
+            </a:r>
+          </a:p>
+        </p:txBody>
+      </p:sp>
+      <p:sp>
+        <p:nvSpPr>
+          <p:cNvPr id="9" name="Rounded Rectangle 8"/>
           <p:cNvSpPr/>
           <p:nvPr/>
         </p:nvSpPr>
         <p:spPr>
           <a:xfrm>
-            <a:off x="4379976" y="1645920"/>
-            <a:ext cx="3401568" cy="4389120"/>
+            <a:off x="6227064" y="1691640"/>
+            <a:ext cx="5230368" cy="2194560"/>
           </a:xfrm>
           <a:prstGeom prst="roundRect">
             <a:avLst/>
           </a:prstGeom>
           <a:solidFill>
-            <a:srgbClr val="0F172A"/>
+            <a:srgbClr val="131926"/>
           </a:solidFill>
-          <a:ln>
+          <a:ln w="12700">
             <a:solidFill>
-              <a:srgbClr val="1E293B"/>
+              <a:srgbClr val="28344B"/>
             </a:solidFill>
           </a:ln>
         </p:spPr>
@@ -4421,72 +5724,98 @@
           </a:fontRef>
         </p:style>
         <p:txBody>
-          <a:bodyPr rtlCol="0" anchor="ctr" wrap="square"/>
-          <a:lstStyle/>
-          <a:p>
-            <a:pPr algn="ctr">
+          <a:bodyPr rtlCol="0" anchor="ctr"/>
+          <a:lstStyle/>
+          <a:p>
+            <a:pPr algn="ctr"/>
+          </a:p>
+        </p:txBody>
+      </p:sp>
+      <p:sp>
+        <p:nvSpPr>
+          <p:cNvPr id="10" name="TextBox 9"/>
+          <p:cNvSpPr txBox="1"/>
+          <p:nvPr/>
+        </p:nvSpPr>
+        <p:spPr>
+          <a:xfrm>
+            <a:off x="6455664" y="1874520"/>
+            <a:ext cx="4773168" cy="1828800"/>
+          </a:xfrm>
+          <a:prstGeom prst="rect">
+            <a:avLst/>
+          </a:prstGeom>
+          <a:noFill/>
+        </p:spPr>
+        <p:txBody>
+          <a:bodyPr wrap="square" lIns="0" rIns="0" tIns="0" bIns="0">
+            <a:spAutoFit/>
+          </a:bodyPr>
+          <a:lstStyle/>
+          <a:p>
+            <a:pPr>
+              <a:defRPr sz="850" b="1">
+                <a:solidFill>
+                  <a:srgbClr val="38BDF8"/>
+                </a:solidFill>
+              </a:defRPr>
+            </a:pPr>
+            <a:r>
+              <a:t>PILLAR 02  |  ENGINEERING CAPABILITY</a:t>
+            </a:r>
+          </a:p>
+          <a:p>
+            <a:pPr>
+              <a:spcBef>
+                <a:spcPts val="300"/>
+              </a:spcBef>
               <a:spcAft>
-                <a:spcPts val="800"/>
+                <a:spcPts val="600"/>
               </a:spcAft>
-              <a:defRPr sz="1100" b="1">
-                <a:solidFill>
-                  <a:srgbClr val="F5C842"/>
-                </a:solidFill>
-              </a:defRPr>
-            </a:pPr>
-            <a:r>
-              <a:t>REDUCED MANPOWER</a:t>
-            </a:r>
-          </a:p>
-          <a:p>
-            <a:pPr>
-              <a:spcAft>
-                <a:spcPts val="1200"/>
-              </a:spcAft>
-              <a:defRPr sz="1600" b="1">
+              <a:defRPr sz="1300" b="1">
                 <a:solidFill>
                   <a:srgbClr val="FFFFFF"/>
                 </a:solidFill>
               </a:defRPr>
             </a:pPr>
             <a:r>
-              <a:t>Reduced Manpower (Automated Remote COMTRADE Ingestion)</a:t>
-            </a:r>
-          </a:p>
-          <a:p>
-            <a:pPr>
-              <a:defRPr sz="1300">
-                <a:solidFill>
-                  <a:srgbClr val="C8D8F0"/>
-                </a:solidFill>
-              </a:defRPr>
-            </a:pPr>
-            <a:r>
-              <a:t>Replaces manual substation visits with automated background harvesting of IEEE C37.111 COMTRADE files across all connected relays. (TerraGridX openwiki).</a:t>
-            </a:r>
-          </a:p>
-        </p:txBody>
-      </p:sp>
-      <p:sp>
-        <p:nvSpPr>
-          <p:cNvPr id="8" name="Rounded Rectangle 7"/>
+              <a:t>Full-Cycle Sliding-Window DFT Phasor Engine</a:t>
+            </a:r>
+          </a:p>
+          <a:p>
+            <a:pPr>
+              <a:defRPr sz="1000">
+                <a:solidFill>
+                  <a:srgbClr val="F1F5F9"/>
+                </a:solidFill>
+              </a:defRPr>
+            </a:pPr>
+            <a:r>
+              <a:t>Extracts instantaneous fundamental phasors and symmetrical sequence components (positive, negative, zero).</a:t>
+            </a:r>
+          </a:p>
+        </p:txBody>
+      </p:sp>
+      <p:sp>
+        <p:nvSpPr>
+          <p:cNvPr id="11" name="Rounded Rectangle 10"/>
           <p:cNvSpPr/>
           <p:nvPr/>
         </p:nvSpPr>
         <p:spPr>
           <a:xfrm>
-            <a:off x="8028432" y="1645920"/>
-            <a:ext cx="3401568" cy="4389120"/>
+            <a:off x="731520" y="4114800"/>
+            <a:ext cx="5230368" cy="2194560"/>
           </a:xfrm>
           <a:prstGeom prst="roundRect">
             <a:avLst/>
           </a:prstGeom>
           <a:solidFill>
-            <a:srgbClr val="0F172A"/>
+            <a:srgbClr val="131926"/>
           </a:solidFill>
-          <a:ln>
+          <a:ln w="12700">
             <a:solidFill>
-              <a:srgbClr val="1E293B"/>
+              <a:srgbClr val="28344B"/>
             </a:solidFill>
           </a:ln>
         </p:spPr>
@@ -4505,48 +5834,184 @@
           </a:fontRef>
         </p:style>
         <p:txBody>
-          <a:bodyPr rtlCol="0" anchor="ctr" wrap="square"/>
-          <a:lstStyle/>
-          <a:p>
-            <a:pPr algn="ctr">
+          <a:bodyPr rtlCol="0" anchor="ctr"/>
+          <a:lstStyle/>
+          <a:p>
+            <a:pPr algn="ctr"/>
+          </a:p>
+        </p:txBody>
+      </p:sp>
+      <p:sp>
+        <p:nvSpPr>
+          <p:cNvPr id="12" name="TextBox 11"/>
+          <p:cNvSpPr txBox="1"/>
+          <p:nvPr/>
+        </p:nvSpPr>
+        <p:spPr>
+          <a:xfrm>
+            <a:off x="960120" y="4297680"/>
+            <a:ext cx="4773168" cy="1828800"/>
+          </a:xfrm>
+          <a:prstGeom prst="rect">
+            <a:avLst/>
+          </a:prstGeom>
+          <a:noFill/>
+        </p:spPr>
+        <p:txBody>
+          <a:bodyPr wrap="square" lIns="0" rIns="0" tIns="0" bIns="0">
+            <a:spAutoFit/>
+          </a:bodyPr>
+          <a:lstStyle/>
+          <a:p>
+            <a:pPr>
+              <a:defRPr sz="850" b="1">
+                <a:solidFill>
+                  <a:srgbClr val="38BDF8"/>
+                </a:solidFill>
+              </a:defRPr>
+            </a:pPr>
+            <a:r>
+              <a:t>PILLAR 03  |  ENGINEERING CAPABILITY</a:t>
+            </a:r>
+          </a:p>
+          <a:p>
+            <a:pPr>
+              <a:spcBef>
+                <a:spcPts val="300"/>
+              </a:spcBef>
               <a:spcAft>
-                <a:spcPts val="800"/>
+                <a:spcPts val="600"/>
               </a:spcAft>
-              <a:defRPr sz="1100" b="1">
-                <a:solidFill>
-                  <a:srgbClr val="F5C842"/>
-                </a:solidFill>
-              </a:defRPr>
-            </a:pPr>
-            <a:r>
-              <a:t>QA &amp; PROTECTION COORDINATION</a:t>
-            </a:r>
-          </a:p>
-          <a:p>
-            <a:pPr>
+              <a:defRPr sz="1300" b="1">
+                <a:solidFill>
+                  <a:srgbClr val="FFFFFF"/>
+                </a:solidFill>
+              </a:defRPr>
+            </a:pPr>
+            <a:r>
+              <a:t>K₀-Compensated R-X Impedance Loops</a:t>
+            </a:r>
+          </a:p>
+          <a:p>
+            <a:pPr>
+              <a:defRPr sz="1000">
+                <a:solidFill>
+                  <a:srgbClr val="F1F5F9"/>
+                </a:solidFill>
+              </a:defRPr>
+            </a:pPr>
+            <a:r>
+              <a:t>Computes fault impedance trajectory on complex R-X plane to pinpoint distance to line fault.</a:t>
+            </a:r>
+          </a:p>
+        </p:txBody>
+      </p:sp>
+      <p:sp>
+        <p:nvSpPr>
+          <p:cNvPr id="13" name="Rounded Rectangle 12"/>
+          <p:cNvSpPr/>
+          <p:nvPr/>
+        </p:nvSpPr>
+        <p:spPr>
+          <a:xfrm>
+            <a:off x="6227064" y="4114800"/>
+            <a:ext cx="5230368" cy="2194560"/>
+          </a:xfrm>
+          <a:prstGeom prst="roundRect">
+            <a:avLst/>
+          </a:prstGeom>
+          <a:solidFill>
+            <a:srgbClr val="131926"/>
+          </a:solidFill>
+          <a:ln w="12700">
+            <a:solidFill>
+              <a:srgbClr val="28344B"/>
+            </a:solidFill>
+          </a:ln>
+        </p:spPr>
+        <p:style>
+          <a:lnRef idx="1">
+            <a:schemeClr val="accent1"/>
+          </a:lnRef>
+          <a:fillRef idx="3">
+            <a:schemeClr val="accent1"/>
+          </a:fillRef>
+          <a:effectRef idx="2">
+            <a:schemeClr val="accent1"/>
+          </a:effectRef>
+          <a:fontRef idx="minor">
+            <a:schemeClr val="lt1"/>
+          </a:fontRef>
+        </p:style>
+        <p:txBody>
+          <a:bodyPr rtlCol="0" anchor="ctr"/>
+          <a:lstStyle/>
+          <a:p>
+            <a:pPr algn="ctr"/>
+          </a:p>
+        </p:txBody>
+      </p:sp>
+      <p:sp>
+        <p:nvSpPr>
+          <p:cNvPr id="14" name="TextBox 13"/>
+          <p:cNvSpPr txBox="1"/>
+          <p:nvPr/>
+        </p:nvSpPr>
+        <p:spPr>
+          <a:xfrm>
+            <a:off x="6455664" y="4297680"/>
+            <a:ext cx="4773168" cy="1828800"/>
+          </a:xfrm>
+          <a:prstGeom prst="rect">
+            <a:avLst/>
+          </a:prstGeom>
+          <a:noFill/>
+        </p:spPr>
+        <p:txBody>
+          <a:bodyPr wrap="square" lIns="0" rIns="0" tIns="0" bIns="0">
+            <a:spAutoFit/>
+          </a:bodyPr>
+          <a:lstStyle/>
+          <a:p>
+            <a:pPr>
+              <a:defRPr sz="850" b="1">
+                <a:solidFill>
+                  <a:srgbClr val="38BDF8"/>
+                </a:solidFill>
+              </a:defRPr>
+            </a:pPr>
+            <a:r>
+              <a:t>PILLAR 04  |  ENGINEERING CAPABILITY</a:t>
+            </a:r>
+          </a:p>
+          <a:p>
+            <a:pPr>
+              <a:spcBef>
+                <a:spcPts val="300"/>
+              </a:spcBef>
               <a:spcAft>
-                <a:spcPts val="1200"/>
+                <a:spcPts val="600"/>
               </a:spcAft>
-              <a:defRPr sz="1600" b="1">
+              <a:defRPr sz="1300" b="1">
                 <a:solidFill>
                   <a:srgbClr val="FFFFFF"/>
                 </a:solidFill>
               </a:defRPr>
             </a:pPr>
             <a:r>
-              <a:t>QA &amp; Protection Coordination (IEC 60255 IDMT Verification)</a:t>
-            </a:r>
-          </a:p>
-          <a:p>
-            <a:pPr>
-              <a:defRPr sz="1300">
-                <a:solidFill>
-                  <a:srgbClr val="C8D8F0"/>
-                </a:solidFill>
-              </a:defRPr>
-            </a:pPr>
-            <a:r>
-              <a:t>Compares recorded trip times against Standard Inverse, Very Inverse, and Extremely Inverse curves to flag miscoordinated relay settings. (TerraGridX openwiki).</a:t>
+              <a:t>IEC 60255 IDMT Protection Curve Verification</a:t>
+            </a:r>
+          </a:p>
+          <a:p>
+            <a:pPr>
+              <a:defRPr sz="1000">
+                <a:solidFill>
+                  <a:srgbClr val="F1F5F9"/>
+                </a:solidFill>
+              </a:defRPr>
+            </a:pPr>
+            <a:r>
+              <a:t>Validates Standard Inverse, Very Inverse, and Extremely Inverse overcurrent trip curves against actual relay times.</a:t>
             </a:r>
           </a:p>
         </p:txBody>
@@ -4584,7 +6049,7 @@
             <a:avLst/>
           </a:prstGeom>
           <a:solidFill>
-            <a:srgbClr val="0A0E1A"/>
+            <a:srgbClr val="0B0F17"/>
           </a:solidFill>
           <a:ln>
             <a:noFill/>
@@ -4620,17 +6085,19 @@
         </p:nvSpPr>
         <p:spPr>
           <a:xfrm>
-            <a:off x="0" y="0"/>
-            <a:ext cx="12191695" cy="54864"/>
+            <a:off x="731520" y="365760"/>
+            <a:ext cx="10728655" cy="18288"/>
           </a:xfrm>
           <a:prstGeom prst="rect">
             <a:avLst/>
           </a:prstGeom>
           <a:solidFill>
-            <a:srgbClr val="00D4FF"/>
+            <a:srgbClr val="38BDF8"/>
           </a:solidFill>
           <a:ln>
-            <a:noFill/>
+            <a:solidFill>
+              <a:srgbClr val="38BDF8"/>
+            </a:solidFill>
           </a:ln>
         </p:spPr>
         <p:style>
@@ -4663,8 +6130,8 @@
         </p:nvSpPr>
         <p:spPr>
           <a:xfrm>
-            <a:off x="731520" y="365760"/>
-            <a:ext cx="10698480" cy="1005840"/>
+            <a:off x="731520" y="438912"/>
+            <a:ext cx="8229600" cy="274320"/>
           </a:xfrm>
           <a:prstGeom prst="rect">
             <a:avLst/>
@@ -4672,35 +6139,20 @@
           <a:noFill/>
         </p:spPr>
         <p:txBody>
-          <a:bodyPr wrap="square">
+          <a:bodyPr wrap="square" lIns="0" rIns="0" tIns="0" bIns="0">
             <a:spAutoFit/>
           </a:bodyPr>
           <a:lstStyle/>
           <a:p>
             <a:pPr>
-              <a:spcAft>
-                <a:spcPts val="400"/>
-              </a:spcAft>
-              <a:defRPr sz="1150" b="1">
-                <a:solidFill>
-                  <a:srgbClr val="00D4FF"/>
-                </a:solidFill>
-              </a:defRPr>
-            </a:pPr>
-            <a:r>
-              <a:t>TERRAGRIDX  |  TERRESTRIAL PLATFORM</a:t>
-            </a:r>
-          </a:p>
-          <a:p>
-            <a:pPr>
-              <a:defRPr sz="2500" b="1">
-                <a:solidFill>
-                  <a:srgbClr val="FFFFFF"/>
-                </a:solidFill>
-              </a:defRPr>
-            </a:pPr>
-            <a:r>
-              <a:t>Competitive Advantage: Terrestrial Platform vs. Legacy Systems</a:t>
+              <a:defRPr sz="950" b="1">
+                <a:solidFill>
+                  <a:srgbClr val="38BDF8"/>
+                </a:solidFill>
+              </a:defRPr>
+            </a:pPr>
+            <a:r>
+              <a:t>TERRESTRIAL PLATFORM  |  TERRAGRIDX  |  FIELD USE CASES</a:t>
             </a:r>
           </a:p>
         </p:txBody>
@@ -4713,8 +6165,8 @@
         </p:nvSpPr>
         <p:spPr>
           <a:xfrm>
-            <a:off x="731520" y="6446520"/>
-            <a:ext cx="10698480" cy="320040"/>
+            <a:off x="731520" y="731520"/>
+            <a:ext cx="9601200" cy="777240"/>
           </a:xfrm>
           <a:prstGeom prst="rect">
             <a:avLst/>
@@ -4722,44 +6174,83 @@
           <a:noFill/>
         </p:spPr>
         <p:txBody>
-          <a:bodyPr wrap="none">
+          <a:bodyPr wrap="square" lIns="0" rIns="0" tIns="0" bIns="0">
             <a:spAutoFit/>
           </a:bodyPr>
           <a:lstStyle/>
           <a:p>
             <a:pPr>
-              <a:defRPr sz="1000">
+              <a:defRPr sz="1900" b="1">
+                <a:solidFill>
+                  <a:srgbClr val="FFFFFF"/>
+                </a:solidFill>
+              </a:defRPr>
+            </a:pPr>
+            <a:r>
+              <a:t>Operational Use Cases &amp; Field Impact</a:t>
+            </a:r>
+          </a:p>
+          <a:p>
+            <a:pPr>
+              <a:spcBef>
+                <a:spcPts val="300"/>
+              </a:spcBef>
+              <a:defRPr sz="1050">
                 <a:solidFill>
                   <a:srgbClr val="94A3B8"/>
                 </a:solidFill>
               </a:defRPr>
             </a:pPr>
             <a:r>
-              <a:t>TERRESTRIAL PLATFORM  |  TERRAGRIDX CATALOGUE  |  CONFIDENTIAL - AUTHORISED SYSTEM INTEGRATORS ONLY</a:t>
-            </a:r>
-          </a:p>
-        </p:txBody>
-      </p:sp>
-      <p:sp>
-        <p:nvSpPr>
-          <p:cNvPr id="6" name="Rectangle 5"/>
+              <a:t>Actual documented use cases across Quality Assurance, Reduced Manpower, Efficiency, and Asset Productivity.</a:t>
+            </a:r>
+          </a:p>
+        </p:txBody>
+      </p:sp>
+      <p:pic>
+        <p:nvPicPr>
+          <p:cNvPr id="6" name="Picture 5" descr="tp_logo_white.png"/>
+          <p:cNvPicPr>
+            <a:picLocks noChangeAspect="1"/>
+          </p:cNvPicPr>
+          <p:nvPr/>
+        </p:nvPicPr>
+        <p:blipFill>
+          <a:blip r:embed="rId2"/>
+          <a:stretch>
+            <a:fillRect/>
+          </a:stretch>
+        </p:blipFill>
+        <p:spPr>
+          <a:xfrm>
+            <a:off x="10469880" y="411480"/>
+            <a:ext cx="987552" cy="384048"/>
+          </a:xfrm>
+          <a:prstGeom prst="rect">
+            <a:avLst/>
+          </a:prstGeom>
+        </p:spPr>
+      </p:pic>
+      <p:sp>
+        <p:nvSpPr>
+          <p:cNvPr id="7" name="Rounded Rectangle 6"/>
           <p:cNvSpPr/>
           <p:nvPr/>
         </p:nvSpPr>
         <p:spPr>
           <a:xfrm>
-            <a:off x="731520" y="1645920"/>
-            <a:ext cx="5212080" cy="502920"/>
-          </a:xfrm>
-          <a:prstGeom prst="rect">
+            <a:off x="731520" y="1691640"/>
+            <a:ext cx="5230368" cy="2194560"/>
+          </a:xfrm>
+          <a:prstGeom prst="roundRect">
             <a:avLst/>
           </a:prstGeom>
           <a:solidFill>
-            <a:srgbClr val="280F14"/>
+            <a:srgbClr val="131926"/>
           </a:solidFill>
-          <a:ln>
+          <a:ln w="12700">
             <a:solidFill>
-              <a:srgbClr val="FF5555"/>
+              <a:srgbClr val="28344B"/>
             </a:solidFill>
           </a:ln>
         </p:spPr>
@@ -4781,39 +6272,95 @@
           <a:bodyPr rtlCol="0" anchor="ctr"/>
           <a:lstStyle/>
           <a:p>
-            <a:pPr algn="ctr">
-              <a:defRPr sz="1250" b="1">
-                <a:solidFill>
-                  <a:srgbClr val="FF5555"/>
-                </a:solidFill>
-              </a:defRPr>
-            </a:pPr>
-            <a:r>
-              <a:t>TRADITIONAL LEGACY SCADA / SILOED SYSTEMS</a:t>
-            </a:r>
-          </a:p>
-        </p:txBody>
-      </p:sp>
-      <p:sp>
-        <p:nvSpPr>
-          <p:cNvPr id="7" name="Rectangle 6"/>
+            <a:pPr algn="ctr"/>
+          </a:p>
+        </p:txBody>
+      </p:sp>
+      <p:sp>
+        <p:nvSpPr>
+          <p:cNvPr id="8" name="TextBox 7"/>
+          <p:cNvSpPr txBox="1"/>
+          <p:nvPr/>
+        </p:nvSpPr>
+        <p:spPr>
+          <a:xfrm>
+            <a:off x="960120" y="1874520"/>
+            <a:ext cx="4773168" cy="1828800"/>
+          </a:xfrm>
+          <a:prstGeom prst="rect">
+            <a:avLst/>
+          </a:prstGeom>
+          <a:noFill/>
+        </p:spPr>
+        <p:txBody>
+          <a:bodyPr wrap="square" lIns="0" rIns="0" tIns="0" bIns="0">
+            <a:spAutoFit/>
+          </a:bodyPr>
+          <a:lstStyle/>
+          <a:p>
+            <a:pPr>
+              <a:defRPr sz="850" b="1">
+                <a:solidFill>
+                  <a:srgbClr val="34D399"/>
+                </a:solidFill>
+              </a:defRPr>
+            </a:pPr>
+            <a:r>
+              <a:t>CASE 01  |  PRODUCTIVITY &amp; SAIDI/SAIFI REDUCTION</a:t>
+            </a:r>
+          </a:p>
+          <a:p>
+            <a:pPr>
+              <a:spcBef>
+                <a:spcPts val="300"/>
+              </a:spcBef>
+              <a:spcAft>
+                <a:spcPts val="600"/>
+              </a:spcAft>
+              <a:defRPr sz="1300" b="1">
+                <a:solidFill>
+                  <a:srgbClr val="FFFFFF"/>
+                </a:solidFill>
+              </a:defRPr>
+            </a:pPr>
+            <a:r>
+              <a:t>Productivity &amp; SAIDI/SAIFI Reduction (Fault Localization)</a:t>
+            </a:r>
+          </a:p>
+          <a:p>
+            <a:pPr>
+              <a:defRPr sz="1000">
+                <a:solidFill>
+                  <a:srgbClr val="F1F5F9"/>
+                </a:solidFill>
+              </a:defRPr>
+            </a:pPr>
+            <a:r>
+              <a:t>Calculates exact fault distance down to tower numbers within 30 seconds of line trip, guiding repair crews directly to the spot. (TerraGridX openwiki).</a:t>
+            </a:r>
+          </a:p>
+        </p:txBody>
+      </p:sp>
+      <p:sp>
+        <p:nvSpPr>
+          <p:cNvPr id="9" name="Rounded Rectangle 8"/>
           <p:cNvSpPr/>
           <p:nvPr/>
         </p:nvSpPr>
         <p:spPr>
           <a:xfrm>
-            <a:off x="6217920" y="1645920"/>
-            <a:ext cx="5212080" cy="502920"/>
-          </a:xfrm>
-          <a:prstGeom prst="rect">
+            <a:off x="6227064" y="1691640"/>
+            <a:ext cx="5230368" cy="2194560"/>
+          </a:xfrm>
+          <a:prstGeom prst="roundRect">
             <a:avLst/>
           </a:prstGeom>
           <a:solidFill>
-            <a:srgbClr val="0A2D3C"/>
+            <a:srgbClr val="131926"/>
           </a:solidFill>
-          <a:ln>
+          <a:ln w="12700">
             <a:solidFill>
-              <a:srgbClr val="00D4FF"/>
+              <a:srgbClr val="28344B"/>
             </a:solidFill>
           </a:ln>
         </p:spPr>
@@ -4835,39 +6382,95 @@
           <a:bodyPr rtlCol="0" anchor="ctr"/>
           <a:lstStyle/>
           <a:p>
-            <a:pPr algn="ctr">
-              <a:defRPr sz="1250" b="1">
-                <a:solidFill>
-                  <a:srgbClr val="00D4FF"/>
-                </a:solidFill>
-              </a:defRPr>
-            </a:pPr>
-            <a:r>
-              <a:t>TERRAGRIDX TERRESTRIAL PLATFORM ADVANTAGE</a:t>
-            </a:r>
-          </a:p>
-        </p:txBody>
-      </p:sp>
-      <p:sp>
-        <p:nvSpPr>
-          <p:cNvPr id="8" name="Rounded Rectangle 7"/>
+            <a:pPr algn="ctr"/>
+          </a:p>
+        </p:txBody>
+      </p:sp>
+      <p:sp>
+        <p:nvSpPr>
+          <p:cNvPr id="10" name="TextBox 9"/>
+          <p:cNvSpPr txBox="1"/>
+          <p:nvPr/>
+        </p:nvSpPr>
+        <p:spPr>
+          <a:xfrm>
+            <a:off x="6455664" y="1874520"/>
+            <a:ext cx="4773168" cy="1828800"/>
+          </a:xfrm>
+          <a:prstGeom prst="rect">
+            <a:avLst/>
+          </a:prstGeom>
+          <a:noFill/>
+        </p:spPr>
+        <p:txBody>
+          <a:bodyPr wrap="square" lIns="0" rIns="0" tIns="0" bIns="0">
+            <a:spAutoFit/>
+          </a:bodyPr>
+          <a:lstStyle/>
+          <a:p>
+            <a:pPr>
+              <a:defRPr sz="850" b="1">
+                <a:solidFill>
+                  <a:srgbClr val="34D399"/>
+                </a:solidFill>
+              </a:defRPr>
+            </a:pPr>
+            <a:r>
+              <a:t>CASE 02  |  REDUCED MANPOWER</a:t>
+            </a:r>
+          </a:p>
+          <a:p>
+            <a:pPr>
+              <a:spcBef>
+                <a:spcPts val="300"/>
+              </a:spcBef>
+              <a:spcAft>
+                <a:spcPts val="600"/>
+              </a:spcAft>
+              <a:defRPr sz="1300" b="1">
+                <a:solidFill>
+                  <a:srgbClr val="FFFFFF"/>
+                </a:solidFill>
+              </a:defRPr>
+            </a:pPr>
+            <a:r>
+              <a:t>Reduced Manpower (Automated Remote COMTRADE Ingestion)</a:t>
+            </a:r>
+          </a:p>
+          <a:p>
+            <a:pPr>
+              <a:defRPr sz="1000">
+                <a:solidFill>
+                  <a:srgbClr val="F1F5F9"/>
+                </a:solidFill>
+              </a:defRPr>
+            </a:pPr>
+            <a:r>
+              <a:t>Replaces manual substation visits with automated background harvesting of IEEE C37.111 COMTRADE files across all connected relays. (TerraGridX openwiki).</a:t>
+            </a:r>
+          </a:p>
+        </p:txBody>
+      </p:sp>
+      <p:sp>
+        <p:nvSpPr>
+          <p:cNvPr id="11" name="Rounded Rectangle 10"/>
           <p:cNvSpPr/>
           <p:nvPr/>
         </p:nvSpPr>
         <p:spPr>
           <a:xfrm>
-            <a:off x="731520" y="2240280"/>
-            <a:ext cx="5212080" cy="960120"/>
+            <a:off x="731520" y="4114800"/>
+            <a:ext cx="5230368" cy="2194560"/>
           </a:xfrm>
           <a:prstGeom prst="roundRect">
             <a:avLst/>
           </a:prstGeom>
           <a:solidFill>
-            <a:srgbClr val="0F172A"/>
+            <a:srgbClr val="131926"/>
           </a:solidFill>
-          <a:ln>
+          <a:ln w="12700">
             <a:solidFill>
-              <a:srgbClr val="1E293B"/>
+              <a:srgbClr val="28344B"/>
             </a:solidFill>
           </a:ln>
         </p:spPr>
@@ -4886,42 +6489,98 @@
           </a:fontRef>
         </p:style>
         <p:txBody>
-          <a:bodyPr rtlCol="0" anchor="ctr" wrap="square"/>
-          <a:lstStyle/>
-          <a:p>
-            <a:pPr algn="ctr">
-              <a:defRPr sz="1200">
-                <a:solidFill>
-                  <a:srgbClr val="94A3B8"/>
-                </a:solidFill>
-              </a:defRPr>
-            </a:pPr>
-            <a:r>
-              <a:t>Engineers must manually travel to remote substations with laptops to download oscillography files after grid blackouts.</a:t>
-            </a:r>
-          </a:p>
-        </p:txBody>
-      </p:sp>
-      <p:sp>
-        <p:nvSpPr>
-          <p:cNvPr id="9" name="Rounded Rectangle 8"/>
+          <a:bodyPr rtlCol="0" anchor="ctr"/>
+          <a:lstStyle/>
+          <a:p>
+            <a:pPr algn="ctr"/>
+          </a:p>
+        </p:txBody>
+      </p:sp>
+      <p:sp>
+        <p:nvSpPr>
+          <p:cNvPr id="12" name="TextBox 11"/>
+          <p:cNvSpPr txBox="1"/>
+          <p:nvPr/>
+        </p:nvSpPr>
+        <p:spPr>
+          <a:xfrm>
+            <a:off x="960120" y="4297680"/>
+            <a:ext cx="4773168" cy="1828800"/>
+          </a:xfrm>
+          <a:prstGeom prst="rect">
+            <a:avLst/>
+          </a:prstGeom>
+          <a:noFill/>
+        </p:spPr>
+        <p:txBody>
+          <a:bodyPr wrap="square" lIns="0" rIns="0" tIns="0" bIns="0">
+            <a:spAutoFit/>
+          </a:bodyPr>
+          <a:lstStyle/>
+          <a:p>
+            <a:pPr>
+              <a:defRPr sz="850" b="1">
+                <a:solidFill>
+                  <a:srgbClr val="34D399"/>
+                </a:solidFill>
+              </a:defRPr>
+            </a:pPr>
+            <a:r>
+              <a:t>CASE 03  |  QA &amp; PROTECTION COORDINATION</a:t>
+            </a:r>
+          </a:p>
+          <a:p>
+            <a:pPr>
+              <a:spcBef>
+                <a:spcPts val="300"/>
+              </a:spcBef>
+              <a:spcAft>
+                <a:spcPts val="600"/>
+              </a:spcAft>
+              <a:defRPr sz="1300" b="1">
+                <a:solidFill>
+                  <a:srgbClr val="FFFFFF"/>
+                </a:solidFill>
+              </a:defRPr>
+            </a:pPr>
+            <a:r>
+              <a:t>QA &amp; Protection Coordination (IEC 60255 IDMT Verification)</a:t>
+            </a:r>
+          </a:p>
+          <a:p>
+            <a:pPr>
+              <a:defRPr sz="1000">
+                <a:solidFill>
+                  <a:srgbClr val="F1F5F9"/>
+                </a:solidFill>
+              </a:defRPr>
+            </a:pPr>
+            <a:r>
+              <a:t>Compares recorded trip times against Standard Inverse, Very Inverse, and Extremely Inverse curves to flag miscoordinated relay settings. (TerraGridX openwiki).</a:t>
+            </a:r>
+          </a:p>
+        </p:txBody>
+      </p:sp>
+      <p:sp>
+        <p:nvSpPr>
+          <p:cNvPr id="13" name="Rounded Rectangle 12"/>
           <p:cNvSpPr/>
           <p:nvPr/>
         </p:nvSpPr>
         <p:spPr>
           <a:xfrm>
-            <a:off x="6217920" y="2240280"/>
-            <a:ext cx="5212080" cy="960120"/>
+            <a:off x="6227064" y="4114800"/>
+            <a:ext cx="5230368" cy="2194560"/>
           </a:xfrm>
           <a:prstGeom prst="roundRect">
             <a:avLst/>
           </a:prstGeom>
           <a:solidFill>
-            <a:srgbClr val="141E37"/>
+            <a:srgbClr val="131926"/>
           </a:solidFill>
-          <a:ln>
+          <a:ln w="12700">
             <a:solidFill>
-              <a:srgbClr val="00D4FF"/>
+              <a:srgbClr val="28344B"/>
             </a:solidFill>
           </a:ln>
         </p:spPr>
@@ -4940,342 +6599,74 @@
           </a:fontRef>
         </p:style>
         <p:txBody>
-          <a:bodyPr rtlCol="0" anchor="ctr" wrap="square"/>
-          <a:lstStyle/>
-          <a:p>
-            <a:pPr algn="ctr">
-              <a:defRPr sz="1250" b="1">
+          <a:bodyPr rtlCol="0" anchor="ctr"/>
+          <a:lstStyle/>
+          <a:p>
+            <a:pPr algn="ctr"/>
+          </a:p>
+        </p:txBody>
+      </p:sp>
+      <p:sp>
+        <p:nvSpPr>
+          <p:cNvPr id="14" name="TextBox 13"/>
+          <p:cNvSpPr txBox="1"/>
+          <p:nvPr/>
+        </p:nvSpPr>
+        <p:spPr>
+          <a:xfrm>
+            <a:off x="6455664" y="4297680"/>
+            <a:ext cx="4773168" cy="1828800"/>
+          </a:xfrm>
+          <a:prstGeom prst="rect">
+            <a:avLst/>
+          </a:prstGeom>
+          <a:noFill/>
+        </p:spPr>
+        <p:txBody>
+          <a:bodyPr wrap="square" lIns="0" rIns="0" tIns="0" bIns="0">
+            <a:spAutoFit/>
+          </a:bodyPr>
+          <a:lstStyle/>
+          <a:p>
+            <a:pPr>
+              <a:defRPr sz="850" b="1">
+                <a:solidFill>
+                  <a:srgbClr val="34D399"/>
+                </a:solidFill>
+              </a:defRPr>
+            </a:pPr>
+            <a:r>
+              <a:t>CASE 04  |  EFFICIENCY</a:t>
+            </a:r>
+          </a:p>
+          <a:p>
+            <a:pPr>
+              <a:spcBef>
+                <a:spcPts val="300"/>
+              </a:spcBef>
+              <a:spcAft>
+                <a:spcPts val="600"/>
+              </a:spcAft>
+              <a:defRPr sz="1300" b="1">
                 <a:solidFill>
                   <a:srgbClr val="FFFFFF"/>
                 </a:solidFill>
               </a:defRPr>
             </a:pPr>
             <a:r>
-              <a:t>Instant automated harvesting of CFG, DAT, and HDR files across hundreds of distributed IEDs over WAN.</a:t>
-            </a:r>
-          </a:p>
-        </p:txBody>
-      </p:sp>
-      <p:sp>
-        <p:nvSpPr>
-          <p:cNvPr id="10" name="Rounded Rectangle 9"/>
-          <p:cNvSpPr/>
-          <p:nvPr/>
-        </p:nvSpPr>
-        <p:spPr>
-          <a:xfrm>
-            <a:off x="731520" y="3291840"/>
-            <a:ext cx="5212080" cy="960120"/>
-          </a:xfrm>
-          <a:prstGeom prst="roundRect">
-            <a:avLst/>
-          </a:prstGeom>
-          <a:solidFill>
-            <a:srgbClr val="0F172A"/>
-          </a:solidFill>
-          <a:ln>
-            <a:solidFill>
-              <a:srgbClr val="1E293B"/>
-            </a:solidFill>
-          </a:ln>
-        </p:spPr>
-        <p:style>
-          <a:lnRef idx="1">
-            <a:schemeClr val="accent1"/>
-          </a:lnRef>
-          <a:fillRef idx="3">
-            <a:schemeClr val="accent1"/>
-          </a:fillRef>
-          <a:effectRef idx="2">
-            <a:schemeClr val="accent1"/>
-          </a:effectRef>
-          <a:fontRef idx="minor">
-            <a:schemeClr val="lt1"/>
-          </a:fontRef>
-        </p:style>
-        <p:txBody>
-          <a:bodyPr rtlCol="0" anchor="ctr" wrap="square"/>
-          <a:lstStyle/>
-          <a:p>
-            <a:pPr algn="ctr">
-              <a:defRPr sz="1200">
-                <a:solidFill>
-                  <a:srgbClr val="94A3B8"/>
-                </a:solidFill>
-              </a:defRPr>
-            </a:pPr>
-            <a:r>
-              <a:t>Manual inspection of raw sine wave traces taking days to determine breaker opening times and fault types.</a:t>
-            </a:r>
-          </a:p>
-        </p:txBody>
-      </p:sp>
-      <p:sp>
-        <p:nvSpPr>
-          <p:cNvPr id="11" name="Rounded Rectangle 10"/>
-          <p:cNvSpPr/>
-          <p:nvPr/>
-        </p:nvSpPr>
-        <p:spPr>
-          <a:xfrm>
-            <a:off x="6217920" y="3291840"/>
-            <a:ext cx="5212080" cy="960120"/>
-          </a:xfrm>
-          <a:prstGeom prst="roundRect">
-            <a:avLst/>
-          </a:prstGeom>
-          <a:solidFill>
-            <a:srgbClr val="141E37"/>
-          </a:solidFill>
-          <a:ln>
-            <a:solidFill>
-              <a:srgbClr val="00D4FF"/>
-            </a:solidFill>
-          </a:ln>
-        </p:spPr>
-        <p:style>
-          <a:lnRef idx="1">
-            <a:schemeClr val="accent1"/>
-          </a:lnRef>
-          <a:fillRef idx="3">
-            <a:schemeClr val="accent1"/>
-          </a:fillRef>
-          <a:effectRef idx="2">
-            <a:schemeClr val="accent1"/>
-          </a:effectRef>
-          <a:fontRef idx="minor">
-            <a:schemeClr val="lt1"/>
-          </a:fontRef>
-        </p:style>
-        <p:txBody>
-          <a:bodyPr rtlCol="0" anchor="ctr" wrap="square"/>
-          <a:lstStyle/>
-          <a:p>
-            <a:pPr algn="ctr">
-              <a:defRPr sz="1250" b="1">
-                <a:solidFill>
-                  <a:srgbClr val="FFFFFF"/>
-                </a:solidFill>
-              </a:defRPr>
-            </a:pPr>
-            <a:r>
-              <a:t>Instantaneous AI waveform diagnostics calculating fault impedance, arc resistance, and clearing times in seconds.</a:t>
-            </a:r>
-          </a:p>
-        </p:txBody>
-      </p:sp>
-      <p:sp>
-        <p:nvSpPr>
-          <p:cNvPr id="12" name="Rounded Rectangle 11"/>
-          <p:cNvSpPr/>
-          <p:nvPr/>
-        </p:nvSpPr>
-        <p:spPr>
-          <a:xfrm>
-            <a:off x="731520" y="4343400"/>
-            <a:ext cx="5212080" cy="960120"/>
-          </a:xfrm>
-          <a:prstGeom prst="roundRect">
-            <a:avLst/>
-          </a:prstGeom>
-          <a:solidFill>
-            <a:srgbClr val="0F172A"/>
-          </a:solidFill>
-          <a:ln>
-            <a:solidFill>
-              <a:srgbClr val="1E293B"/>
-            </a:solidFill>
-          </a:ln>
-        </p:spPr>
-        <p:style>
-          <a:lnRef idx="1">
-            <a:schemeClr val="accent1"/>
-          </a:lnRef>
-          <a:fillRef idx="3">
-            <a:schemeClr val="accent1"/>
-          </a:fillRef>
-          <a:effectRef idx="2">
-            <a:schemeClr val="accent1"/>
-          </a:effectRef>
-          <a:fontRef idx="minor">
-            <a:schemeClr val="lt1"/>
-          </a:fontRef>
-        </p:style>
-        <p:txBody>
-          <a:bodyPr rtlCol="0" anchor="ctr" wrap="square"/>
-          <a:lstStyle/>
-          <a:p>
-            <a:pPr algn="ctr">
-              <a:defRPr sz="1200">
-                <a:solidFill>
-                  <a:srgbClr val="94A3B8"/>
-                </a:solidFill>
-              </a:defRPr>
-            </a:pPr>
-            <a:r>
-              <a:t>Unsynchronized relay clocks leading to conflicting theories of what caused the blackout.</a:t>
-            </a:r>
-          </a:p>
-        </p:txBody>
-      </p:sp>
-      <p:sp>
-        <p:nvSpPr>
-          <p:cNvPr id="13" name="Rounded Rectangle 12"/>
-          <p:cNvSpPr/>
-          <p:nvPr/>
-        </p:nvSpPr>
-        <p:spPr>
-          <a:xfrm>
-            <a:off x="6217920" y="4343400"/>
-            <a:ext cx="5212080" cy="960120"/>
-          </a:xfrm>
-          <a:prstGeom prst="roundRect">
-            <a:avLst/>
-          </a:prstGeom>
-          <a:solidFill>
-            <a:srgbClr val="141E37"/>
-          </a:solidFill>
-          <a:ln>
-            <a:solidFill>
-              <a:srgbClr val="00D4FF"/>
-            </a:solidFill>
-          </a:ln>
-        </p:spPr>
-        <p:style>
-          <a:lnRef idx="1">
-            <a:schemeClr val="accent1"/>
-          </a:lnRef>
-          <a:fillRef idx="3">
-            <a:schemeClr val="accent1"/>
-          </a:fillRef>
-          <a:effectRef idx="2">
-            <a:schemeClr val="accent1"/>
-          </a:effectRef>
-          <a:fontRef idx="minor">
-            <a:schemeClr val="lt1"/>
-          </a:fontRef>
-        </p:style>
-        <p:txBody>
-          <a:bodyPr rtlCol="0" anchor="ctr" wrap="square"/>
-          <a:lstStyle/>
-          <a:p>
-            <a:pPr algn="ctr">
-              <a:defRPr sz="1250" b="1">
-                <a:solidFill>
-                  <a:srgbClr val="FFFFFF"/>
-                </a:solidFill>
-              </a:defRPr>
-            </a:pPr>
-            <a:r>
-              <a:t>GPS and PTP nanosecond-synchronized timeline stitching proving the precise root cause without dispute.</a:t>
-            </a:r>
-          </a:p>
-        </p:txBody>
-      </p:sp>
-      <p:sp>
-        <p:nvSpPr>
-          <p:cNvPr id="14" name="Rounded Rectangle 13"/>
-          <p:cNvSpPr/>
-          <p:nvPr/>
-        </p:nvSpPr>
-        <p:spPr>
-          <a:xfrm>
-            <a:off x="731520" y="5394960"/>
-            <a:ext cx="5212080" cy="960120"/>
-          </a:xfrm>
-          <a:prstGeom prst="roundRect">
-            <a:avLst/>
-          </a:prstGeom>
-          <a:solidFill>
-            <a:srgbClr val="0F172A"/>
-          </a:solidFill>
-          <a:ln>
-            <a:solidFill>
-              <a:srgbClr val="1E293B"/>
-            </a:solidFill>
-          </a:ln>
-        </p:spPr>
-        <p:style>
-          <a:lnRef idx="1">
-            <a:schemeClr val="accent1"/>
-          </a:lnRef>
-          <a:fillRef idx="3">
-            <a:schemeClr val="accent1"/>
-          </a:fillRef>
-          <a:effectRef idx="2">
-            <a:schemeClr val="accent1"/>
-          </a:effectRef>
-          <a:fontRef idx="minor">
-            <a:schemeClr val="lt1"/>
-          </a:fontRef>
-        </p:style>
-        <p:txBody>
-          <a:bodyPr rtlCol="0" anchor="ctr" wrap="square"/>
-          <a:lstStyle/>
-          <a:p>
-            <a:pPr algn="ctr">
-              <a:defRPr sz="1200">
-                <a:solidFill>
-                  <a:srgbClr val="94A3B8"/>
-                </a:solidFill>
-              </a:defRPr>
-            </a:pPr>
-            <a:r>
-              <a:t>Static high/low threshold alarms trigger only after physical process degradation has occurred.</a:t>
-            </a:r>
-          </a:p>
-        </p:txBody>
-      </p:sp>
-      <p:sp>
-        <p:nvSpPr>
-          <p:cNvPr id="15" name="Rounded Rectangle 14"/>
-          <p:cNvSpPr/>
-          <p:nvPr/>
-        </p:nvSpPr>
-        <p:spPr>
-          <a:xfrm>
-            <a:off x="6217920" y="5394960"/>
-            <a:ext cx="5212080" cy="960120"/>
-          </a:xfrm>
-          <a:prstGeom prst="roundRect">
-            <a:avLst/>
-          </a:prstGeom>
-          <a:solidFill>
-            <a:srgbClr val="141E37"/>
-          </a:solidFill>
-          <a:ln>
-            <a:solidFill>
-              <a:srgbClr val="00D4FF"/>
-            </a:solidFill>
-          </a:ln>
-        </p:spPr>
-        <p:style>
-          <a:lnRef idx="1">
-            <a:schemeClr val="accent1"/>
-          </a:lnRef>
-          <a:fillRef idx="3">
-            <a:schemeClr val="accent1"/>
-          </a:fillRef>
-          <a:effectRef idx="2">
-            <a:schemeClr val="accent1"/>
-          </a:effectRef>
-          <a:fontRef idx="minor">
-            <a:schemeClr val="lt1"/>
-          </a:fontRef>
-        </p:style>
-        <p:txBody>
-          <a:bodyPr rtlCol="0" anchor="ctr" wrap="square"/>
-          <a:lstStyle/>
-          <a:p>
-            <a:pPr algn="ctr">
-              <a:defRPr sz="1250" b="1">
-                <a:solidFill>
-                  <a:srgbClr val="FFFFFF"/>
-                </a:solidFill>
-              </a:defRPr>
-            </a:pPr>
-            <a:r>
-              <a:t>TerraGridX physics-informed models forecast multi-variable trajectories up to 72 hours in advance.</a:t>
+              <a:t>Efficiency (Circuit Breaker Arcing &amp; Timing Audit)</a:t>
+            </a:r>
+          </a:p>
+          <a:p>
+            <a:pPr>
+              <a:defRPr sz="1000">
+                <a:solidFill>
+                  <a:srgbClr val="F1F5F9"/>
+                </a:solidFill>
+              </a:defRPr>
+            </a:pPr>
+            <a:r>
+              <a:t>Measures trip coil currents and breaker arcing times during each fault to schedule breaker overhauls before failures occur.</a:t>
             </a:r>
           </a:p>
         </p:txBody>
@@ -5313,7 +6704,7 @@
             <a:avLst/>
           </a:prstGeom>
           <a:solidFill>
-            <a:srgbClr val="0A0E1A"/>
+            <a:srgbClr val="0B0F17"/>
           </a:solidFill>
           <a:ln>
             <a:noFill/>
@@ -5349,17 +6740,19 @@
         </p:nvSpPr>
         <p:spPr>
           <a:xfrm>
-            <a:off x="0" y="0"/>
-            <a:ext cx="12191695" cy="54864"/>
+            <a:off x="731520" y="365760"/>
+            <a:ext cx="10728655" cy="18288"/>
           </a:xfrm>
           <a:prstGeom prst="rect">
             <a:avLst/>
           </a:prstGeom>
           <a:solidFill>
-            <a:srgbClr val="00D4FF"/>
+            <a:srgbClr val="38BDF8"/>
           </a:solidFill>
           <a:ln>
-            <a:noFill/>
+            <a:solidFill>
+              <a:srgbClr val="38BDF8"/>
+            </a:solidFill>
           </a:ln>
         </p:spPr>
         <p:style>
@@ -5392,8 +6785,8 @@
         </p:nvSpPr>
         <p:spPr>
           <a:xfrm>
-            <a:off x="731520" y="365760"/>
-            <a:ext cx="10698480" cy="1005840"/>
+            <a:off x="731520" y="438912"/>
+            <a:ext cx="8229600" cy="274320"/>
           </a:xfrm>
           <a:prstGeom prst="rect">
             <a:avLst/>
@@ -5401,35 +6794,20 @@
           <a:noFill/>
         </p:spPr>
         <p:txBody>
-          <a:bodyPr wrap="square">
+          <a:bodyPr wrap="square" lIns="0" rIns="0" tIns="0" bIns="0">
             <a:spAutoFit/>
           </a:bodyPr>
           <a:lstStyle/>
           <a:p>
             <a:pPr>
-              <a:spcAft>
-                <a:spcPts val="400"/>
-              </a:spcAft>
-              <a:defRPr sz="1150" b="1">
-                <a:solidFill>
-                  <a:srgbClr val="00D4FF"/>
-                </a:solidFill>
-              </a:defRPr>
-            </a:pPr>
-            <a:r>
-              <a:t>TERRAGRIDX  |  TERRESTRIAL PLATFORM</a:t>
-            </a:r>
-          </a:p>
-          <a:p>
-            <a:pPr>
-              <a:defRPr sz="2500" b="1">
-                <a:solidFill>
-                  <a:srgbClr val="FFFFFF"/>
-                </a:solidFill>
-              </a:defRPr>
-            </a:pPr>
-            <a:r>
-              <a:t>End-to-End System Architecture &amp; Real-Time Pipeline</a:t>
+              <a:defRPr sz="950" b="1">
+                <a:solidFill>
+                  <a:srgbClr val="38BDF8"/>
+                </a:solidFill>
+              </a:defRPr>
+            </a:pPr>
+            <a:r>
+              <a:t>TERRESTRIAL PLATFORM  |  TERRAGRIDX  |  ARCHITECTURAL CONTRAST</a:t>
             </a:r>
           </a:p>
         </p:txBody>
@@ -5442,8 +6820,8 @@
         </p:nvSpPr>
         <p:spPr>
           <a:xfrm>
-            <a:off x="731520" y="6446520"/>
-            <a:ext cx="10698480" cy="320040"/>
+            <a:off x="731520" y="731520"/>
+            <a:ext cx="9601200" cy="777240"/>
           </a:xfrm>
           <a:prstGeom prst="rect">
             <a:avLst/>
@@ -5451,44 +6829,83 @@
           <a:noFill/>
         </p:spPr>
         <p:txBody>
-          <a:bodyPr wrap="none">
+          <a:bodyPr wrap="square" lIns="0" rIns="0" tIns="0" bIns="0">
             <a:spAutoFit/>
           </a:bodyPr>
           <a:lstStyle/>
           <a:p>
             <a:pPr>
-              <a:defRPr sz="1000">
+              <a:defRPr sz="1900" b="1">
+                <a:solidFill>
+                  <a:srgbClr val="FFFFFF"/>
+                </a:solidFill>
+              </a:defRPr>
+            </a:pPr>
+            <a:r>
+              <a:t>Comparison with Traditional SCADA / Legacy Systems</a:t>
+            </a:r>
+          </a:p>
+          <a:p>
+            <a:pPr>
+              <a:spcBef>
+                <a:spcPts val="300"/>
+              </a:spcBef>
+              <a:defRPr sz="1050">
                 <a:solidFill>
                   <a:srgbClr val="94A3B8"/>
                 </a:solidFill>
               </a:defRPr>
             </a:pPr>
             <a:r>
-              <a:t>TERRESTRIAL PLATFORM  |  TERRAGRIDX CATALOGUE  |  CONFIDENTIAL - AUTHORISED SYSTEM INTEGRATORS ONLY</a:t>
-            </a:r>
-          </a:p>
-        </p:txBody>
-      </p:sp>
-      <p:sp>
-        <p:nvSpPr>
-          <p:cNvPr id="6" name="Rounded Rectangle 5"/>
+              <a:t>Point-by-point contrast demonstrating the technological shift from legacy industrial automation to the Terrestrial Platform.</a:t>
+            </a:r>
+          </a:p>
+        </p:txBody>
+      </p:sp>
+      <p:pic>
+        <p:nvPicPr>
+          <p:cNvPr id="6" name="Picture 5" descr="tp_logo_white.png"/>
+          <p:cNvPicPr>
+            <a:picLocks noChangeAspect="1"/>
+          </p:cNvPicPr>
+          <p:nvPr/>
+        </p:nvPicPr>
+        <p:blipFill>
+          <a:blip r:embed="rId2"/>
+          <a:stretch>
+            <a:fillRect/>
+          </a:stretch>
+        </p:blipFill>
+        <p:spPr>
+          <a:xfrm>
+            <a:off x="10469880" y="411480"/>
+            <a:ext cx="987552" cy="384048"/>
+          </a:xfrm>
+          <a:prstGeom prst="rect">
+            <a:avLst/>
+          </a:prstGeom>
+        </p:spPr>
+      </p:pic>
+      <p:sp>
+        <p:nvSpPr>
+          <p:cNvPr id="7" name="Rounded Rectangle 6"/>
           <p:cNvSpPr/>
           <p:nvPr/>
         </p:nvSpPr>
         <p:spPr>
           <a:xfrm>
-            <a:off x="731520" y="1645920"/>
-            <a:ext cx="2523744" cy="4389120"/>
+            <a:off x="731520" y="1691640"/>
+            <a:ext cx="5230368" cy="502920"/>
           </a:xfrm>
           <a:prstGeom prst="roundRect">
             <a:avLst/>
           </a:prstGeom>
           <a:solidFill>
-            <a:srgbClr val="0F172A"/>
+            <a:srgbClr val="1C1216"/>
           </a:solidFill>
-          <a:ln>
+          <a:ln w="12700">
             <a:solidFill>
-              <a:srgbClr val="1E293B"/>
+              <a:srgbClr val="501923"/>
             </a:solidFill>
           </a:ln>
         </p:spPr>
@@ -5507,72 +6924,68 @@
           </a:fontRef>
         </p:style>
         <p:txBody>
-          <a:bodyPr rtlCol="0" anchor="ctr" wrap="square"/>
-          <a:lstStyle/>
-          <a:p>
-            <a:pPr algn="ctr">
-              <a:spcAft>
-                <a:spcPts val="800"/>
-              </a:spcAft>
+          <a:bodyPr rtlCol="0" anchor="ctr"/>
+          <a:lstStyle/>
+          <a:p>
+            <a:pPr algn="ctr"/>
+          </a:p>
+        </p:txBody>
+      </p:sp>
+      <p:sp>
+        <p:nvSpPr>
+          <p:cNvPr id="8" name="TextBox 7"/>
+          <p:cNvSpPr txBox="1"/>
+          <p:nvPr/>
+        </p:nvSpPr>
+        <p:spPr>
+          <a:xfrm>
+            <a:off x="868680" y="1783080"/>
+            <a:ext cx="4937760" cy="320040"/>
+          </a:xfrm>
+          <a:prstGeom prst="rect">
+            <a:avLst/>
+          </a:prstGeom>
+          <a:noFill/>
+        </p:spPr>
+        <p:txBody>
+          <a:bodyPr wrap="none">
+            <a:spAutoFit/>
+          </a:bodyPr>
+          <a:lstStyle/>
+          <a:p>
+            <a:pPr>
               <a:defRPr sz="1100" b="1">
                 <a:solidFill>
-                  <a:srgbClr val="00D4FF"/>
-                </a:solidFill>
-              </a:defRPr>
-            </a:pPr>
-            <a:r>
-              <a:t>LAYER 01</a:t>
-            </a:r>
-          </a:p>
-          <a:p>
-            <a:pPr>
-              <a:spcAft>
-                <a:spcPts val="1200"/>
-              </a:spcAft>
-              <a:defRPr sz="1550" b="1">
-                <a:solidFill>
-                  <a:srgbClr val="FFFFFF"/>
-                </a:solidFill>
-              </a:defRPr>
-            </a:pPr>
-            <a:r>
-              <a:t>Substation Process Bus Ingestion</a:t>
-            </a:r>
-          </a:p>
-          <a:p>
-            <a:pPr>
-              <a:defRPr sz="1250">
-                <a:solidFill>
-                  <a:srgbClr val="C8D8F0"/>
-                </a:solidFill>
-              </a:defRPr>
-            </a:pPr>
-            <a:r>
-              <a:t>Ultra-fast signal acquisition from optical CT/PT instrument transformers, merging units (MU), protection relays, and circuit breaker controllers.</a:t>
-            </a:r>
-          </a:p>
-        </p:txBody>
-      </p:sp>
-      <p:sp>
-        <p:nvSpPr>
-          <p:cNvPr id="7" name="Rounded Rectangle 6"/>
+                  <a:srgbClr val="EF4444"/>
+                </a:solidFill>
+              </a:defRPr>
+            </a:pPr>
+            <a:r>
+              <a:t>TRADITIONAL LEGACY SYSTEMS / SILOED SCADA</a:t>
+            </a:r>
+          </a:p>
+        </p:txBody>
+      </p:sp>
+      <p:sp>
+        <p:nvSpPr>
+          <p:cNvPr id="9" name="Rounded Rectangle 8"/>
           <p:cNvSpPr/>
           <p:nvPr/>
         </p:nvSpPr>
         <p:spPr>
           <a:xfrm>
-            <a:off x="3456432" y="1645920"/>
-            <a:ext cx="2523744" cy="4389120"/>
+            <a:off x="6227064" y="1691640"/>
+            <a:ext cx="5230368" cy="502920"/>
           </a:xfrm>
           <a:prstGeom prst="roundRect">
             <a:avLst/>
           </a:prstGeom>
           <a:solidFill>
-            <a:srgbClr val="0F172A"/>
+            <a:srgbClr val="0F1C26"/>
           </a:solidFill>
-          <a:ln>
+          <a:ln w="12700">
             <a:solidFill>
-              <a:srgbClr val="1E293B"/>
+              <a:srgbClr val="194B5F"/>
             </a:solidFill>
           </a:ln>
         </p:spPr>
@@ -5591,72 +7004,68 @@
           </a:fontRef>
         </p:style>
         <p:txBody>
-          <a:bodyPr rtlCol="0" anchor="ctr" wrap="square"/>
-          <a:lstStyle/>
-          <a:p>
-            <a:pPr algn="ctr">
-              <a:spcAft>
-                <a:spcPts val="800"/>
-              </a:spcAft>
+          <a:bodyPr rtlCol="0" anchor="ctr"/>
+          <a:lstStyle/>
+          <a:p>
+            <a:pPr algn="ctr"/>
+          </a:p>
+        </p:txBody>
+      </p:sp>
+      <p:sp>
+        <p:nvSpPr>
+          <p:cNvPr id="10" name="TextBox 9"/>
+          <p:cNvSpPr txBox="1"/>
+          <p:nvPr/>
+        </p:nvSpPr>
+        <p:spPr>
+          <a:xfrm>
+            <a:off x="6364224" y="1783080"/>
+            <a:ext cx="4937760" cy="320040"/>
+          </a:xfrm>
+          <a:prstGeom prst="rect">
+            <a:avLst/>
+          </a:prstGeom>
+          <a:noFill/>
+        </p:spPr>
+        <p:txBody>
+          <a:bodyPr wrap="none">
+            <a:spAutoFit/>
+          </a:bodyPr>
+          <a:lstStyle/>
+          <a:p>
+            <a:pPr>
               <a:defRPr sz="1100" b="1">
                 <a:solidFill>
-                  <a:srgbClr val="00D4FF"/>
-                </a:solidFill>
-              </a:defRPr>
-            </a:pPr>
-            <a:r>
-              <a:t>LAYER 02</a:t>
-            </a:r>
-          </a:p>
-          <a:p>
-            <a:pPr>
-              <a:spcAft>
-                <a:spcPts val="1200"/>
-              </a:spcAft>
-              <a:defRPr sz="1550" b="1">
-                <a:solidFill>
-                  <a:srgbClr val="FFFFFF"/>
-                </a:solidFill>
-              </a:defRPr>
-            </a:pPr>
-            <a:r>
-              <a:t>Microsecond Process Bus</a:t>
-            </a:r>
-          </a:p>
-          <a:p>
-            <a:pPr>
-              <a:defRPr sz="1250">
-                <a:solidFill>
-                  <a:srgbClr val="C8D8F0"/>
-                </a:solidFill>
-              </a:defRPr>
-            </a:pPr>
-            <a:r>
-              <a:t>Hardware-accelerated PRP/HSR redundant Ethernet streaming, IEEE 1588 PTP nanosecond synchronization, and sub-cycle waveform capture.</a:t>
-            </a:r>
-          </a:p>
-        </p:txBody>
-      </p:sp>
-      <p:sp>
-        <p:nvSpPr>
-          <p:cNvPr id="8" name="Rounded Rectangle 7"/>
+                  <a:srgbClr val="38BDF8"/>
+                </a:solidFill>
+              </a:defRPr>
+            </a:pPr>
+            <a:r>
+              <a:t>TERRAGRIDX TERRESTRIAL PLATFORM ADVANTAGE</a:t>
+            </a:r>
+          </a:p>
+        </p:txBody>
+      </p:sp>
+      <p:sp>
+        <p:nvSpPr>
+          <p:cNvPr id="11" name="Rounded Rectangle 10"/>
           <p:cNvSpPr/>
           <p:nvPr/>
         </p:nvSpPr>
         <p:spPr>
           <a:xfrm>
-            <a:off x="6181344" y="1645920"/>
-            <a:ext cx="2523744" cy="4389120"/>
+            <a:off x="731520" y="2286000"/>
+            <a:ext cx="5230368" cy="1298448"/>
           </a:xfrm>
           <a:prstGeom prst="roundRect">
             <a:avLst/>
           </a:prstGeom>
           <a:solidFill>
-            <a:srgbClr val="0F172A"/>
+            <a:srgbClr val="1C1216"/>
           </a:solidFill>
-          <a:ln>
+          <a:ln w="12700">
             <a:solidFill>
-              <a:srgbClr val="1E293B"/>
+              <a:srgbClr val="501923"/>
             </a:solidFill>
           </a:ln>
         </p:spPr>
@@ -5675,72 +7084,68 @@
           </a:fontRef>
         </p:style>
         <p:txBody>
-          <a:bodyPr rtlCol="0" anchor="ctr" wrap="square"/>
-          <a:lstStyle/>
-          <a:p>
-            <a:pPr algn="ctr">
-              <a:spcAft>
-                <a:spcPts val="800"/>
-              </a:spcAft>
-              <a:defRPr sz="1100" b="1">
-                <a:solidFill>
-                  <a:srgbClr val="00D4FF"/>
-                </a:solidFill>
-              </a:defRPr>
-            </a:pPr>
-            <a:r>
-              <a:t>LAYER 03</a:t>
-            </a:r>
-          </a:p>
-          <a:p>
-            <a:pPr>
-              <a:spcAft>
-                <a:spcPts val="1200"/>
-              </a:spcAft>
-              <a:defRPr sz="1550" b="1">
-                <a:solidFill>
-                  <a:srgbClr val="FFFFFF"/>
-                </a:solidFill>
-              </a:defRPr>
-            </a:pPr>
-            <a:r>
-              <a:t>Synchrophasor Stability Core</a:t>
-            </a:r>
-          </a:p>
-          <a:p>
-            <a:pPr>
-              <a:defRPr sz="1250">
-                <a:solidFill>
-                  <a:srgbClr val="C8D8F0"/>
-                </a:solidFill>
-              </a:defRPr>
-            </a:pPr>
-            <a:r>
-              <a:t>Real-time phasor measurement unit (PMU) angle divergence analysis, transmission grid oscillation damping, and fault location estimation.</a:t>
-            </a:r>
-          </a:p>
-        </p:txBody>
-      </p:sp>
-      <p:sp>
-        <p:nvSpPr>
-          <p:cNvPr id="9" name="Rounded Rectangle 8"/>
+          <a:bodyPr rtlCol="0" anchor="ctr"/>
+          <a:lstStyle/>
+          <a:p>
+            <a:pPr algn="ctr"/>
+          </a:p>
+        </p:txBody>
+      </p:sp>
+      <p:sp>
+        <p:nvSpPr>
+          <p:cNvPr id="12" name="TextBox 11"/>
+          <p:cNvSpPr txBox="1"/>
+          <p:nvPr/>
+        </p:nvSpPr>
+        <p:spPr>
+          <a:xfrm>
+            <a:off x="868680" y="2359152"/>
+            <a:ext cx="4956048" cy="1152144"/>
+          </a:xfrm>
+          <a:prstGeom prst="rect">
+            <a:avLst/>
+          </a:prstGeom>
+          <a:noFill/>
+        </p:spPr>
+        <p:txBody>
+          <a:bodyPr wrap="square" lIns="0" rIns="0" tIns="0" bIns="0">
+            <a:spAutoFit/>
+          </a:bodyPr>
+          <a:lstStyle/>
+          <a:p>
+            <a:pPr>
+              <a:defRPr sz="1000">
+                <a:solidFill>
+                  <a:srgbClr val="F1F5F9"/>
+                </a:solidFill>
+              </a:defRPr>
+            </a:pPr>
+            <a:r>
+              <a:t>Engineers must manually travel to remote substations with laptops to download oscillography files after grid blackouts.</a:t>
+            </a:r>
+          </a:p>
+        </p:txBody>
+      </p:sp>
+      <p:sp>
+        <p:nvSpPr>
+          <p:cNvPr id="13" name="Rounded Rectangle 12"/>
           <p:cNvSpPr/>
           <p:nvPr/>
         </p:nvSpPr>
         <p:spPr>
           <a:xfrm>
-            <a:off x="8906256" y="1645920"/>
-            <a:ext cx="2523744" cy="4389120"/>
+            <a:off x="6227064" y="2286000"/>
+            <a:ext cx="5230368" cy="1298448"/>
           </a:xfrm>
           <a:prstGeom prst="roundRect">
             <a:avLst/>
           </a:prstGeom>
           <a:solidFill>
-            <a:srgbClr val="0F172A"/>
+            <a:srgbClr val="0F1C26"/>
           </a:solidFill>
-          <a:ln>
+          <a:ln w="12700">
             <a:solidFill>
-              <a:srgbClr val="1E293B"/>
+              <a:srgbClr val="194B5F"/>
             </a:solidFill>
           </a:ln>
         </p:spPr>
@@ -5759,48 +7164,364 @@
           </a:fontRef>
         </p:style>
         <p:txBody>
-          <a:bodyPr rtlCol="0" anchor="ctr" wrap="square"/>
-          <a:lstStyle/>
-          <a:p>
-            <a:pPr algn="ctr">
-              <a:spcAft>
-                <a:spcPts val="800"/>
-              </a:spcAft>
-              <a:defRPr sz="1100" b="1">
-                <a:solidFill>
-                  <a:srgbClr val="00D4FF"/>
-                </a:solidFill>
-              </a:defRPr>
-            </a:pPr>
-            <a:r>
-              <a:t>LAYER 04</a:t>
-            </a:r>
-          </a:p>
-          <a:p>
-            <a:pPr>
-              <a:spcAft>
-                <a:spcPts val="1200"/>
-              </a:spcAft>
-              <a:defRPr sz="1550" b="1">
-                <a:solidFill>
-                  <a:srgbClr val="FFFFFF"/>
-                </a:solidFill>
-              </a:defRPr>
-            </a:pPr>
-            <a:r>
-              <a:t>Breaker Trip &amp; Grid Cockpit</a:t>
-            </a:r>
-          </a:p>
-          <a:p>
-            <a:pPr>
-              <a:defRPr sz="1250">
-                <a:solidFill>
-                  <a:srgbClr val="C8D8F0"/>
-                </a:solidFill>
-              </a:defRPr>
-            </a:pPr>
-            <a:r>
-              <a:t>Sub-4ms GOOSE protective trip command verification, automated synchrocheck breaker closing, and ANSI/ISA-101 single-line substation cockpits.</a:t>
+          <a:bodyPr rtlCol="0" anchor="ctr"/>
+          <a:lstStyle/>
+          <a:p>
+            <a:pPr algn="ctr"/>
+          </a:p>
+        </p:txBody>
+      </p:sp>
+      <p:sp>
+        <p:nvSpPr>
+          <p:cNvPr id="14" name="TextBox 13"/>
+          <p:cNvSpPr txBox="1"/>
+          <p:nvPr/>
+        </p:nvSpPr>
+        <p:spPr>
+          <a:xfrm>
+            <a:off x="6364224" y="2359152"/>
+            <a:ext cx="4956048" cy="1152144"/>
+          </a:xfrm>
+          <a:prstGeom prst="rect">
+            <a:avLst/>
+          </a:prstGeom>
+          <a:noFill/>
+        </p:spPr>
+        <p:txBody>
+          <a:bodyPr wrap="square" lIns="0" rIns="0" tIns="0" bIns="0">
+            <a:spAutoFit/>
+          </a:bodyPr>
+          <a:lstStyle/>
+          <a:p>
+            <a:pPr>
+              <a:defRPr sz="1000" b="1">
+                <a:solidFill>
+                  <a:srgbClr val="34D399"/>
+                </a:solidFill>
+              </a:defRPr>
+            </a:pPr>
+            <a:r>
+              <a:t>Instant automated harvesting of CFG, DAT, and HDR files across hundreds of distributed IEDs over WAN.</a:t>
+            </a:r>
+          </a:p>
+        </p:txBody>
+      </p:sp>
+      <p:sp>
+        <p:nvSpPr>
+          <p:cNvPr id="15" name="Rounded Rectangle 14"/>
+          <p:cNvSpPr/>
+          <p:nvPr/>
+        </p:nvSpPr>
+        <p:spPr>
+          <a:xfrm>
+            <a:off x="731520" y="3694176"/>
+            <a:ext cx="5230368" cy="1298448"/>
+          </a:xfrm>
+          <a:prstGeom prst="roundRect">
+            <a:avLst/>
+          </a:prstGeom>
+          <a:solidFill>
+            <a:srgbClr val="1C1216"/>
+          </a:solidFill>
+          <a:ln w="12700">
+            <a:solidFill>
+              <a:srgbClr val="501923"/>
+            </a:solidFill>
+          </a:ln>
+        </p:spPr>
+        <p:style>
+          <a:lnRef idx="1">
+            <a:schemeClr val="accent1"/>
+          </a:lnRef>
+          <a:fillRef idx="3">
+            <a:schemeClr val="accent1"/>
+          </a:fillRef>
+          <a:effectRef idx="2">
+            <a:schemeClr val="accent1"/>
+          </a:effectRef>
+          <a:fontRef idx="minor">
+            <a:schemeClr val="lt1"/>
+          </a:fontRef>
+        </p:style>
+        <p:txBody>
+          <a:bodyPr rtlCol="0" anchor="ctr"/>
+          <a:lstStyle/>
+          <a:p>
+            <a:pPr algn="ctr"/>
+          </a:p>
+        </p:txBody>
+      </p:sp>
+      <p:sp>
+        <p:nvSpPr>
+          <p:cNvPr id="16" name="TextBox 15"/>
+          <p:cNvSpPr txBox="1"/>
+          <p:nvPr/>
+        </p:nvSpPr>
+        <p:spPr>
+          <a:xfrm>
+            <a:off x="868680" y="3767328"/>
+            <a:ext cx="4956048" cy="1152144"/>
+          </a:xfrm>
+          <a:prstGeom prst="rect">
+            <a:avLst/>
+          </a:prstGeom>
+          <a:noFill/>
+        </p:spPr>
+        <p:txBody>
+          <a:bodyPr wrap="square" lIns="0" rIns="0" tIns="0" bIns="0">
+            <a:spAutoFit/>
+          </a:bodyPr>
+          <a:lstStyle/>
+          <a:p>
+            <a:pPr>
+              <a:defRPr sz="1000">
+                <a:solidFill>
+                  <a:srgbClr val="F1F5F9"/>
+                </a:solidFill>
+              </a:defRPr>
+            </a:pPr>
+            <a:r>
+              <a:t>Manual inspection of raw sine wave traces taking days to determine breaker opening times and fault types.</a:t>
+            </a:r>
+          </a:p>
+        </p:txBody>
+      </p:sp>
+      <p:sp>
+        <p:nvSpPr>
+          <p:cNvPr id="17" name="Rounded Rectangle 16"/>
+          <p:cNvSpPr/>
+          <p:nvPr/>
+        </p:nvSpPr>
+        <p:spPr>
+          <a:xfrm>
+            <a:off x="6227064" y="3694176"/>
+            <a:ext cx="5230368" cy="1298448"/>
+          </a:xfrm>
+          <a:prstGeom prst="roundRect">
+            <a:avLst/>
+          </a:prstGeom>
+          <a:solidFill>
+            <a:srgbClr val="0F1C26"/>
+          </a:solidFill>
+          <a:ln w="12700">
+            <a:solidFill>
+              <a:srgbClr val="194B5F"/>
+            </a:solidFill>
+          </a:ln>
+        </p:spPr>
+        <p:style>
+          <a:lnRef idx="1">
+            <a:schemeClr val="accent1"/>
+          </a:lnRef>
+          <a:fillRef idx="3">
+            <a:schemeClr val="accent1"/>
+          </a:fillRef>
+          <a:effectRef idx="2">
+            <a:schemeClr val="accent1"/>
+          </a:effectRef>
+          <a:fontRef idx="minor">
+            <a:schemeClr val="lt1"/>
+          </a:fontRef>
+        </p:style>
+        <p:txBody>
+          <a:bodyPr rtlCol="0" anchor="ctr"/>
+          <a:lstStyle/>
+          <a:p>
+            <a:pPr algn="ctr"/>
+          </a:p>
+        </p:txBody>
+      </p:sp>
+      <p:sp>
+        <p:nvSpPr>
+          <p:cNvPr id="18" name="TextBox 17"/>
+          <p:cNvSpPr txBox="1"/>
+          <p:nvPr/>
+        </p:nvSpPr>
+        <p:spPr>
+          <a:xfrm>
+            <a:off x="6364224" y="3767328"/>
+            <a:ext cx="4956048" cy="1152144"/>
+          </a:xfrm>
+          <a:prstGeom prst="rect">
+            <a:avLst/>
+          </a:prstGeom>
+          <a:noFill/>
+        </p:spPr>
+        <p:txBody>
+          <a:bodyPr wrap="square" lIns="0" rIns="0" tIns="0" bIns="0">
+            <a:spAutoFit/>
+          </a:bodyPr>
+          <a:lstStyle/>
+          <a:p>
+            <a:pPr>
+              <a:defRPr sz="1000" b="1">
+                <a:solidFill>
+                  <a:srgbClr val="34D399"/>
+                </a:solidFill>
+              </a:defRPr>
+            </a:pPr>
+            <a:r>
+              <a:t>Instantaneous AI waveform diagnostics calculating fault impedance, arc resistance, and clearing times in seconds.</a:t>
+            </a:r>
+          </a:p>
+        </p:txBody>
+      </p:sp>
+      <p:sp>
+        <p:nvSpPr>
+          <p:cNvPr id="19" name="Rounded Rectangle 18"/>
+          <p:cNvSpPr/>
+          <p:nvPr/>
+        </p:nvSpPr>
+        <p:spPr>
+          <a:xfrm>
+            <a:off x="731520" y="5102352"/>
+            <a:ext cx="5230368" cy="1298448"/>
+          </a:xfrm>
+          <a:prstGeom prst="roundRect">
+            <a:avLst/>
+          </a:prstGeom>
+          <a:solidFill>
+            <a:srgbClr val="1C1216"/>
+          </a:solidFill>
+          <a:ln w="12700">
+            <a:solidFill>
+              <a:srgbClr val="501923"/>
+            </a:solidFill>
+          </a:ln>
+        </p:spPr>
+        <p:style>
+          <a:lnRef idx="1">
+            <a:schemeClr val="accent1"/>
+          </a:lnRef>
+          <a:fillRef idx="3">
+            <a:schemeClr val="accent1"/>
+          </a:fillRef>
+          <a:effectRef idx="2">
+            <a:schemeClr val="accent1"/>
+          </a:effectRef>
+          <a:fontRef idx="minor">
+            <a:schemeClr val="lt1"/>
+          </a:fontRef>
+        </p:style>
+        <p:txBody>
+          <a:bodyPr rtlCol="0" anchor="ctr"/>
+          <a:lstStyle/>
+          <a:p>
+            <a:pPr algn="ctr"/>
+          </a:p>
+        </p:txBody>
+      </p:sp>
+      <p:sp>
+        <p:nvSpPr>
+          <p:cNvPr id="20" name="TextBox 19"/>
+          <p:cNvSpPr txBox="1"/>
+          <p:nvPr/>
+        </p:nvSpPr>
+        <p:spPr>
+          <a:xfrm>
+            <a:off x="868680" y="5175504"/>
+            <a:ext cx="4956048" cy="1152144"/>
+          </a:xfrm>
+          <a:prstGeom prst="rect">
+            <a:avLst/>
+          </a:prstGeom>
+          <a:noFill/>
+        </p:spPr>
+        <p:txBody>
+          <a:bodyPr wrap="square" lIns="0" rIns="0" tIns="0" bIns="0">
+            <a:spAutoFit/>
+          </a:bodyPr>
+          <a:lstStyle/>
+          <a:p>
+            <a:pPr>
+              <a:defRPr sz="1000">
+                <a:solidFill>
+                  <a:srgbClr val="F1F5F9"/>
+                </a:solidFill>
+              </a:defRPr>
+            </a:pPr>
+            <a:r>
+              <a:t>Unsynchronized relay clocks leading to conflicting theories of what caused the blackout.</a:t>
+            </a:r>
+          </a:p>
+        </p:txBody>
+      </p:sp>
+      <p:sp>
+        <p:nvSpPr>
+          <p:cNvPr id="21" name="Rounded Rectangle 20"/>
+          <p:cNvSpPr/>
+          <p:nvPr/>
+        </p:nvSpPr>
+        <p:spPr>
+          <a:xfrm>
+            <a:off x="6227064" y="5102352"/>
+            <a:ext cx="5230368" cy="1298448"/>
+          </a:xfrm>
+          <a:prstGeom prst="roundRect">
+            <a:avLst/>
+          </a:prstGeom>
+          <a:solidFill>
+            <a:srgbClr val="0F1C26"/>
+          </a:solidFill>
+          <a:ln w="12700">
+            <a:solidFill>
+              <a:srgbClr val="194B5F"/>
+            </a:solidFill>
+          </a:ln>
+        </p:spPr>
+        <p:style>
+          <a:lnRef idx="1">
+            <a:schemeClr val="accent1"/>
+          </a:lnRef>
+          <a:fillRef idx="3">
+            <a:schemeClr val="accent1"/>
+          </a:fillRef>
+          <a:effectRef idx="2">
+            <a:schemeClr val="accent1"/>
+          </a:effectRef>
+          <a:fontRef idx="minor">
+            <a:schemeClr val="lt1"/>
+          </a:fontRef>
+        </p:style>
+        <p:txBody>
+          <a:bodyPr rtlCol="0" anchor="ctr"/>
+          <a:lstStyle/>
+          <a:p>
+            <a:pPr algn="ctr"/>
+          </a:p>
+        </p:txBody>
+      </p:sp>
+      <p:sp>
+        <p:nvSpPr>
+          <p:cNvPr id="22" name="TextBox 21"/>
+          <p:cNvSpPr txBox="1"/>
+          <p:nvPr/>
+        </p:nvSpPr>
+        <p:spPr>
+          <a:xfrm>
+            <a:off x="6364224" y="5175504"/>
+            <a:ext cx="4956048" cy="1152144"/>
+          </a:xfrm>
+          <a:prstGeom prst="rect">
+            <a:avLst/>
+          </a:prstGeom>
+          <a:noFill/>
+        </p:spPr>
+        <p:txBody>
+          <a:bodyPr wrap="square" lIns="0" rIns="0" tIns="0" bIns="0">
+            <a:spAutoFit/>
+          </a:bodyPr>
+          <a:lstStyle/>
+          <a:p>
+            <a:pPr>
+              <a:defRPr sz="1000" b="1">
+                <a:solidFill>
+                  <a:srgbClr val="34D399"/>
+                </a:solidFill>
+              </a:defRPr>
+            </a:pPr>
+            <a:r>
+              <a:t>GPS and PTP nanosecond-synchronized timeline stitching proving the precise root cause without dispute.</a:t>
             </a:r>
           </a:p>
         </p:txBody>
@@ -5838,7 +7559,7 @@
             <a:avLst/>
           </a:prstGeom>
           <a:solidFill>
-            <a:srgbClr val="0A0E1A"/>
+            <a:srgbClr val="0B0F17"/>
           </a:solidFill>
           <a:ln>
             <a:noFill/>
@@ -5874,17 +7595,19 @@
         </p:nvSpPr>
         <p:spPr>
           <a:xfrm>
-            <a:off x="0" y="0"/>
-            <a:ext cx="12191695" cy="54864"/>
+            <a:off x="731520" y="365760"/>
+            <a:ext cx="10728655" cy="18288"/>
           </a:xfrm>
           <a:prstGeom prst="rect">
             <a:avLst/>
           </a:prstGeom>
           <a:solidFill>
-            <a:srgbClr val="00D4FF"/>
+            <a:srgbClr val="38BDF8"/>
           </a:solidFill>
           <a:ln>
-            <a:noFill/>
+            <a:solidFill>
+              <a:srgbClr val="38BDF8"/>
+            </a:solidFill>
           </a:ln>
         </p:spPr>
         <p:style>
@@ -5917,8 +7640,8 @@
         </p:nvSpPr>
         <p:spPr>
           <a:xfrm>
-            <a:off x="731520" y="365760"/>
-            <a:ext cx="10698480" cy="1005840"/>
+            <a:off x="731520" y="438912"/>
+            <a:ext cx="8229600" cy="274320"/>
           </a:xfrm>
           <a:prstGeom prst="rect">
             <a:avLst/>
@@ -5926,35 +7649,20 @@
           <a:noFill/>
         </p:spPr>
         <p:txBody>
-          <a:bodyPr wrap="square">
+          <a:bodyPr wrap="square" lIns="0" rIns="0" tIns="0" bIns="0">
             <a:spAutoFit/>
           </a:bodyPr>
           <a:lstStyle/>
           <a:p>
             <a:pPr>
-              <a:spcAft>
-                <a:spcPts val="400"/>
-              </a:spcAft>
-              <a:defRPr sz="1150" b="1">
-                <a:solidFill>
-                  <a:srgbClr val="00D4FF"/>
-                </a:solidFill>
-              </a:defRPr>
-            </a:pPr>
-            <a:r>
-              <a:t>TERRAGRIDX  |  TERRESTRIAL PLATFORM</a:t>
-            </a:r>
-          </a:p>
-          <a:p>
-            <a:pPr>
-              <a:defRPr sz="2500" b="1">
-                <a:solidFill>
-                  <a:srgbClr val="FFFFFF"/>
-                </a:solidFill>
-              </a:defRPr>
-            </a:pPr>
-            <a:r>
-              <a:t>System Integrator Deployment Playbook &amp; Commercial Enablement</a:t>
+              <a:defRPr sz="950" b="1">
+                <a:solidFill>
+                  <a:srgbClr val="38BDF8"/>
+                </a:solidFill>
+              </a:defRPr>
+            </a:pPr>
+            <a:r>
+              <a:t>TERRESTRIAL PLATFORM  |  TERRAGRIDX  |  SYSTEM ARCHITECTURE</a:t>
             </a:r>
           </a:p>
         </p:txBody>
@@ -5967,8 +7675,8 @@
         </p:nvSpPr>
         <p:spPr>
           <a:xfrm>
-            <a:off x="731520" y="6446520"/>
-            <a:ext cx="10698480" cy="320040"/>
+            <a:off x="731520" y="731520"/>
+            <a:ext cx="9601200" cy="777240"/>
           </a:xfrm>
           <a:prstGeom prst="rect">
             <a:avLst/>
@@ -5976,44 +7684,83 @@
           <a:noFill/>
         </p:spPr>
         <p:txBody>
-          <a:bodyPr wrap="none">
+          <a:bodyPr wrap="square" lIns="0" rIns="0" tIns="0" bIns="0">
             <a:spAutoFit/>
           </a:bodyPr>
           <a:lstStyle/>
           <a:p>
             <a:pPr>
-              <a:defRPr sz="1000">
+              <a:defRPr sz="1900" b="1">
+                <a:solidFill>
+                  <a:srgbClr val="FFFFFF"/>
+                </a:solidFill>
+              </a:defRPr>
+            </a:pPr>
+            <a:r>
+              <a:t>End-to-End System Diagram &amp; Data Pipeline</a:t>
+            </a:r>
+          </a:p>
+          <a:p>
+            <a:pPr>
+              <a:spcBef>
+                <a:spcPts val="300"/>
+              </a:spcBef>
+              <a:defRPr sz="1050">
                 <a:solidFill>
                   <a:srgbClr val="94A3B8"/>
                 </a:solidFill>
               </a:defRPr>
             </a:pPr>
             <a:r>
-              <a:t>TERRESTRIAL PLATFORM  |  TERRAGRIDX CATALOGUE  |  CONFIDENTIAL - AUTHORISED SYSTEM INTEGRATORS ONLY</a:t>
-            </a:r>
-          </a:p>
-        </p:txBody>
-      </p:sp>
-      <p:sp>
-        <p:nvSpPr>
-          <p:cNvPr id="6" name="Rounded Rectangle 5"/>
+              <a:t>Visual architecture diagram representing field telemetry ingestion, deterministic edge fabric, AI reasoning, and closed-loop actuation.</a:t>
+            </a:r>
+          </a:p>
+        </p:txBody>
+      </p:sp>
+      <p:pic>
+        <p:nvPicPr>
+          <p:cNvPr id="6" name="Picture 5" descr="tp_logo_white.png"/>
+          <p:cNvPicPr>
+            <a:picLocks noChangeAspect="1"/>
+          </p:cNvPicPr>
+          <p:nvPr/>
+        </p:nvPicPr>
+        <p:blipFill>
+          <a:blip r:embed="rId2"/>
+          <a:stretch>
+            <a:fillRect/>
+          </a:stretch>
+        </p:blipFill>
+        <p:spPr>
+          <a:xfrm>
+            <a:off x="10469880" y="411480"/>
+            <a:ext cx="987552" cy="384048"/>
+          </a:xfrm>
+          <a:prstGeom prst="rect">
+            <a:avLst/>
+          </a:prstGeom>
+        </p:spPr>
+      </p:pic>
+      <p:sp>
+        <p:nvSpPr>
+          <p:cNvPr id="7" name="Rounded Rectangle 6"/>
           <p:cNvSpPr/>
           <p:nvPr/>
         </p:nvSpPr>
         <p:spPr>
           <a:xfrm>
-            <a:off x="731520" y="1645920"/>
-            <a:ext cx="3401568" cy="3200400"/>
+            <a:off x="731520" y="1691640"/>
+            <a:ext cx="2514600" cy="3611880"/>
           </a:xfrm>
           <a:prstGeom prst="roundRect">
             <a:avLst/>
           </a:prstGeom>
           <a:solidFill>
-            <a:srgbClr val="0F172A"/>
+            <a:srgbClr val="131926"/>
           </a:solidFill>
-          <a:ln>
+          <a:ln w="12700">
             <a:solidFill>
-              <a:srgbClr val="1E293B"/>
+              <a:srgbClr val="38BDF8"/>
             </a:solidFill>
           </a:ln>
         </p:spPr>
@@ -6032,72 +7779,139 @@
           </a:fontRef>
         </p:style>
         <p:txBody>
-          <a:bodyPr rtlCol="0" anchor="ctr" wrap="square"/>
-          <a:lstStyle/>
-          <a:p>
-            <a:pPr algn="ctr">
+          <a:bodyPr rtlCol="0" anchor="ctr"/>
+          <a:lstStyle/>
+          <a:p>
+            <a:pPr algn="ctr"/>
+          </a:p>
+        </p:txBody>
+      </p:sp>
+      <p:sp>
+        <p:nvSpPr>
+          <p:cNvPr id="8" name="TextBox 7"/>
+          <p:cNvSpPr txBox="1"/>
+          <p:nvPr/>
+        </p:nvSpPr>
+        <p:spPr>
+          <a:xfrm>
+            <a:off x="896112" y="1856232"/>
+            <a:ext cx="2185416" cy="3282696"/>
+          </a:xfrm>
+          <a:prstGeom prst="rect">
+            <a:avLst/>
+          </a:prstGeom>
+          <a:noFill/>
+        </p:spPr>
+        <p:txBody>
+          <a:bodyPr wrap="square" lIns="0" rIns="0" tIns="0" bIns="0">
+            <a:spAutoFit/>
+          </a:bodyPr>
+          <a:lstStyle/>
+          <a:p>
+            <a:pPr>
+              <a:defRPr sz="850" b="1">
+                <a:solidFill>
+                  <a:srgbClr val="38BDF8"/>
+                </a:solidFill>
+              </a:defRPr>
+            </a:pPr>
+            <a:r>
+              <a:t>LAYER 01</a:t>
+            </a:r>
+          </a:p>
+          <a:p>
+            <a:pPr>
+              <a:spcBef>
+                <a:spcPts val="300"/>
+              </a:spcBef>
+              <a:spcAft>
+                <a:spcPts val="600"/>
+              </a:spcAft>
+              <a:defRPr sz="1200" b="1">
+                <a:solidFill>
+                  <a:srgbClr val="FFFFFF"/>
+                </a:solidFill>
+              </a:defRPr>
+            </a:pPr>
+            <a:r>
+              <a:t>Substation Process Bus Ingestion</a:t>
+            </a:r>
+          </a:p>
+          <a:p>
+            <a:pPr>
               <a:spcAft>
                 <a:spcPts val="800"/>
               </a:spcAft>
-              <a:defRPr sz="1100" b="1">
-                <a:solidFill>
-                  <a:srgbClr val="F5C842"/>
-                </a:solidFill>
-              </a:defRPr>
-            </a:pPr>
-            <a:r>
-              <a:t>PHASE 01 | CONNECTIVITY &amp; AUDIT</a:t>
-            </a:r>
-          </a:p>
-          <a:p>
-            <a:pPr>
-              <a:spcAft>
-                <a:spcPts val="1000"/>
-              </a:spcAft>
-              <a:defRPr sz="1600" b="1">
-                <a:solidFill>
-                  <a:srgbClr val="FFFFFF"/>
-                </a:solidFill>
-              </a:defRPr>
-            </a:pPr>
-            <a:r>
-              <a:t>Zero Rip-and-Replace Onboarding</a:t>
-            </a:r>
-          </a:p>
-          <a:p>
-            <a:pPr>
-              <a:defRPr sz="1250">
-                <a:solidFill>
-                  <a:srgbClr val="C8D8F0"/>
-                </a:solidFill>
-              </a:defRPr>
-            </a:pPr>
-            <a:r>
-              <a:t>Deploy edge container onto existing industrial PC or VM. Connect to plant DCS/PLCs via IEEE COMTRADE C37.111. Ingest and normalize all telemetry in under 48 hours without halting production.</a:t>
-            </a:r>
-          </a:p>
-        </p:txBody>
-      </p:sp>
-      <p:sp>
-        <p:nvSpPr>
-          <p:cNvPr id="7" name="Rounded Rectangle 6"/>
+              <a:defRPr sz="900">
+                <a:solidFill>
+                  <a:srgbClr val="F1F5F9"/>
+                </a:solidFill>
+              </a:defRPr>
+            </a:pPr>
+            <a:r>
+              <a:t>Ultra-fast signal acquisition from optical CT/PT instrument transformers, merging units (MU), protection relays, and circuit breaker controllers.</a:t>
+            </a:r>
+          </a:p>
+          <a:p>
+            <a:pPr>
+              <a:spcBef>
+                <a:spcPts val="400"/>
+              </a:spcBef>
+              <a:defRPr sz="800" b="1">
+                <a:solidFill>
+                  <a:srgbClr val="94A3B8"/>
+                </a:solidFill>
+              </a:defRPr>
+            </a:pPr>
+            <a:r>
+              <a:t>PROTOCOLS &amp; STANDARDS:</a:t>
+            </a:r>
+          </a:p>
+          <a:p>
+            <a:pPr>
+              <a:spcBef>
+                <a:spcPts val="200"/>
+              </a:spcBef>
+              <a:defRPr sz="850">
+                <a:solidFill>
+                  <a:srgbClr val="34D399"/>
+                </a:solidFill>
+              </a:defRPr>
+            </a:pPr>
+            <a:r>
+              <a:t> • IEC 61850-9-2 (Sampled Values)</a:t>
+            </a:r>
+            <a:br/>
+            <a:r>
+              <a:t> • IEC 61850-8-1 (GOOSE)</a:t>
+            </a:r>
+            <a:br/>
+            <a:r>
+              <a:t> • IEEE COMTRADE</a:t>
+            </a:r>
+          </a:p>
+        </p:txBody>
+      </p:sp>
+      <p:sp>
+        <p:nvSpPr>
+          <p:cNvPr id="9" name="Rounded Rectangle 8"/>
           <p:cNvSpPr/>
           <p:nvPr/>
         </p:nvSpPr>
         <p:spPr>
           <a:xfrm>
-            <a:off x="4379976" y="1645920"/>
-            <a:ext cx="3401568" cy="3200400"/>
+            <a:off x="3465576" y="1691640"/>
+            <a:ext cx="2514600" cy="3611880"/>
           </a:xfrm>
           <a:prstGeom prst="roundRect">
             <a:avLst/>
           </a:prstGeom>
           <a:solidFill>
-            <a:srgbClr val="0F172A"/>
+            <a:srgbClr val="131926"/>
           </a:solidFill>
-          <a:ln>
+          <a:ln w="12700">
             <a:solidFill>
-              <a:srgbClr val="1E293B"/>
+              <a:srgbClr val="38BDF8"/>
             </a:solidFill>
           </a:ln>
         </p:spPr>
@@ -6116,72 +7930,139 @@
           </a:fontRef>
         </p:style>
         <p:txBody>
-          <a:bodyPr rtlCol="0" anchor="ctr" wrap="square"/>
-          <a:lstStyle/>
-          <a:p>
-            <a:pPr algn="ctr">
+          <a:bodyPr rtlCol="0" anchor="ctr"/>
+          <a:lstStyle/>
+          <a:p>
+            <a:pPr algn="ctr"/>
+          </a:p>
+        </p:txBody>
+      </p:sp>
+      <p:sp>
+        <p:nvSpPr>
+          <p:cNvPr id="10" name="TextBox 9"/>
+          <p:cNvSpPr txBox="1"/>
+          <p:nvPr/>
+        </p:nvSpPr>
+        <p:spPr>
+          <a:xfrm>
+            <a:off x="3630168" y="1856232"/>
+            <a:ext cx="2185416" cy="3282696"/>
+          </a:xfrm>
+          <a:prstGeom prst="rect">
+            <a:avLst/>
+          </a:prstGeom>
+          <a:noFill/>
+        </p:spPr>
+        <p:txBody>
+          <a:bodyPr wrap="square" lIns="0" rIns="0" tIns="0" bIns="0">
+            <a:spAutoFit/>
+          </a:bodyPr>
+          <a:lstStyle/>
+          <a:p>
+            <a:pPr>
+              <a:defRPr sz="850" b="1">
+                <a:solidFill>
+                  <a:srgbClr val="38BDF8"/>
+                </a:solidFill>
+              </a:defRPr>
+            </a:pPr>
+            <a:r>
+              <a:t>LAYER 02</a:t>
+            </a:r>
+          </a:p>
+          <a:p>
+            <a:pPr>
+              <a:spcBef>
+                <a:spcPts val="300"/>
+              </a:spcBef>
+              <a:spcAft>
+                <a:spcPts val="600"/>
+              </a:spcAft>
+              <a:defRPr sz="1200" b="1">
+                <a:solidFill>
+                  <a:srgbClr val="FFFFFF"/>
+                </a:solidFill>
+              </a:defRPr>
+            </a:pPr>
+            <a:r>
+              <a:t>Microsecond Process Bus</a:t>
+            </a:r>
+          </a:p>
+          <a:p>
+            <a:pPr>
               <a:spcAft>
                 <a:spcPts val="800"/>
               </a:spcAft>
-              <a:defRPr sz="1100" b="1">
-                <a:solidFill>
-                  <a:srgbClr val="F5C842"/>
-                </a:solidFill>
-              </a:defRPr>
-            </a:pPr>
-            <a:r>
-              <a:t>PHASE 02 | TWIN CALIBRATION</a:t>
-            </a:r>
-          </a:p>
-          <a:p>
-            <a:pPr>
-              <a:spcAft>
-                <a:spcPts val="1000"/>
-              </a:spcAft>
-              <a:defRPr sz="1600" b="1">
-                <a:solidFill>
-                  <a:srgbClr val="FFFFFF"/>
-                </a:solidFill>
-              </a:defRPr>
-            </a:pPr>
-            <a:r>
-              <a:t>Physics-Model Synchronization</a:t>
-            </a:r>
-          </a:p>
-          <a:p>
-            <a:pPr>
-              <a:defRPr sz="1250">
-                <a:solidFill>
-                  <a:srgbClr val="C8D8F0"/>
-                </a:solidFill>
-              </a:defRPr>
-            </a:pPr>
-            <a:r>
-              <a:t>Feed historical historian data into TerraGridX models. Automatically build directed causal relationship graphs, calibrate thermodynamics/kinematics, and train edge neural operators.</a:t>
-            </a:r>
-          </a:p>
-        </p:txBody>
-      </p:sp>
-      <p:sp>
-        <p:nvSpPr>
-          <p:cNvPr id="8" name="Rounded Rectangle 7"/>
+              <a:defRPr sz="900">
+                <a:solidFill>
+                  <a:srgbClr val="F1F5F9"/>
+                </a:solidFill>
+              </a:defRPr>
+            </a:pPr>
+            <a:r>
+              <a:t>Hardware-accelerated PRP/HSR redundant Ethernet streaming, IEEE 1588 PTP nanosecond synchronization, and sub-cycle waveform capture.</a:t>
+            </a:r>
+          </a:p>
+          <a:p>
+            <a:pPr>
+              <a:spcBef>
+                <a:spcPts val="400"/>
+              </a:spcBef>
+              <a:defRPr sz="800" b="1">
+                <a:solidFill>
+                  <a:srgbClr val="94A3B8"/>
+                </a:solidFill>
+              </a:defRPr>
+            </a:pPr>
+            <a:r>
+              <a:t>PROTOCOLS &amp; STANDARDS:</a:t>
+            </a:r>
+          </a:p>
+          <a:p>
+            <a:pPr>
+              <a:spcBef>
+                <a:spcPts val="200"/>
+              </a:spcBef>
+              <a:defRPr sz="850">
+                <a:solidFill>
+                  <a:srgbClr val="34D399"/>
+                </a:solidFill>
+              </a:defRPr>
+            </a:pPr>
+            <a:r>
+              <a:t> • IEEE 1588 PTP Time-Sync</a:t>
+            </a:r>
+            <a:br/>
+            <a:r>
+              <a:t> • PRP/HSR Redundant Bus</a:t>
+            </a:r>
+            <a:br/>
+            <a:r>
+              <a:t> • Sub-Cycle Waveform Stream</a:t>
+            </a:r>
+          </a:p>
+        </p:txBody>
+      </p:sp>
+      <p:sp>
+        <p:nvSpPr>
+          <p:cNvPr id="11" name="Rounded Rectangle 10"/>
           <p:cNvSpPr/>
           <p:nvPr/>
         </p:nvSpPr>
         <p:spPr>
           <a:xfrm>
-            <a:off x="8028432" y="1645920"/>
-            <a:ext cx="3401568" cy="3200400"/>
+            <a:off x="6199632" y="1691640"/>
+            <a:ext cx="2514600" cy="3611880"/>
           </a:xfrm>
           <a:prstGeom prst="roundRect">
             <a:avLst/>
           </a:prstGeom>
           <a:solidFill>
-            <a:srgbClr val="0F172A"/>
+            <a:srgbClr val="131926"/>
           </a:solidFill>
-          <a:ln>
+          <a:ln w="12700">
             <a:solidFill>
-              <a:srgbClr val="1E293B"/>
+              <a:srgbClr val="38BDF8"/>
             </a:solidFill>
           </a:ln>
         </p:spPr>
@@ -6200,72 +8081,139 @@
           </a:fontRef>
         </p:style>
         <p:txBody>
-          <a:bodyPr rtlCol="0" anchor="ctr" wrap="square"/>
-          <a:lstStyle/>
-          <a:p>
-            <a:pPr algn="ctr">
+          <a:bodyPr rtlCol="0" anchor="ctr"/>
+          <a:lstStyle/>
+          <a:p>
+            <a:pPr algn="ctr"/>
+          </a:p>
+        </p:txBody>
+      </p:sp>
+      <p:sp>
+        <p:nvSpPr>
+          <p:cNvPr id="12" name="TextBox 11"/>
+          <p:cNvSpPr txBox="1"/>
+          <p:nvPr/>
+        </p:nvSpPr>
+        <p:spPr>
+          <a:xfrm>
+            <a:off x="6364224" y="1856232"/>
+            <a:ext cx="2185416" cy="3282696"/>
+          </a:xfrm>
+          <a:prstGeom prst="rect">
+            <a:avLst/>
+          </a:prstGeom>
+          <a:noFill/>
+        </p:spPr>
+        <p:txBody>
+          <a:bodyPr wrap="square" lIns="0" rIns="0" tIns="0" bIns="0">
+            <a:spAutoFit/>
+          </a:bodyPr>
+          <a:lstStyle/>
+          <a:p>
+            <a:pPr>
+              <a:defRPr sz="850" b="1">
+                <a:solidFill>
+                  <a:srgbClr val="38BDF8"/>
+                </a:solidFill>
+              </a:defRPr>
+            </a:pPr>
+            <a:r>
+              <a:t>LAYER 03</a:t>
+            </a:r>
+          </a:p>
+          <a:p>
+            <a:pPr>
+              <a:spcBef>
+                <a:spcPts val="300"/>
+              </a:spcBef>
+              <a:spcAft>
+                <a:spcPts val="600"/>
+              </a:spcAft>
+              <a:defRPr sz="1200" b="1">
+                <a:solidFill>
+                  <a:srgbClr val="FFFFFF"/>
+                </a:solidFill>
+              </a:defRPr>
+            </a:pPr>
+            <a:r>
+              <a:t>Synchrophasor Stability Core</a:t>
+            </a:r>
+          </a:p>
+          <a:p>
+            <a:pPr>
               <a:spcAft>
                 <a:spcPts val="800"/>
               </a:spcAft>
-              <a:defRPr sz="1100" b="1">
-                <a:solidFill>
-                  <a:srgbClr val="F5C842"/>
-                </a:solidFill>
-              </a:defRPr>
-            </a:pPr>
-            <a:r>
-              <a:t>PHASE 03 | AUTONOMOUS GO-LIVE</a:t>
-            </a:r>
-          </a:p>
-          <a:p>
-            <a:pPr>
-              <a:spcAft>
-                <a:spcPts val="1000"/>
-              </a:spcAft>
-              <a:defRPr sz="1600" b="1">
-                <a:solidFill>
-                  <a:srgbClr val="FFFFFF"/>
-                </a:solidFill>
-              </a:defRPr>
-            </a:pPr>
-            <a:r>
-              <a:t>Closed-Loop Setpoint Actuation</a:t>
-            </a:r>
-          </a:p>
-          <a:p>
-            <a:pPr>
-              <a:defRPr sz="1250">
-                <a:solidFill>
-                  <a:srgbClr val="C8D8F0"/>
-                </a:solidFill>
-              </a:defRPr>
-            </a:pPr>
-            <a:r>
-              <a:t>Transition from advisory warnings to sub-25ms supervisory actuation. Sync alarm suppressions with plant operators and link work orders into SAP/ERP for verifiable recurring ROI.</a:t>
-            </a:r>
-          </a:p>
-        </p:txBody>
-      </p:sp>
-      <p:sp>
-        <p:nvSpPr>
-          <p:cNvPr id="9" name="Rounded Rectangle 8"/>
+              <a:defRPr sz="900">
+                <a:solidFill>
+                  <a:srgbClr val="F1F5F9"/>
+                </a:solidFill>
+              </a:defRPr>
+            </a:pPr>
+            <a:r>
+              <a:t>Real-time phasor measurement unit (PMU) angle divergence analysis, transmission grid oscillation damping, and fault location estimation.</a:t>
+            </a:r>
+          </a:p>
+          <a:p>
+            <a:pPr>
+              <a:spcBef>
+                <a:spcPts val="400"/>
+              </a:spcBef>
+              <a:defRPr sz="800" b="1">
+                <a:solidFill>
+                  <a:srgbClr val="94A3B8"/>
+                </a:solidFill>
+              </a:defRPr>
+            </a:pPr>
+            <a:r>
+              <a:t>PROTOCOLS &amp; STANDARDS:</a:t>
+            </a:r>
+          </a:p>
+          <a:p>
+            <a:pPr>
+              <a:spcBef>
+                <a:spcPts val="200"/>
+              </a:spcBef>
+              <a:defRPr sz="850">
+                <a:solidFill>
+                  <a:srgbClr val="34D399"/>
+                </a:solidFill>
+              </a:defRPr>
+            </a:pPr>
+            <a:r>
+              <a:t> • PMU Angle Analysis</a:t>
+            </a:r>
+            <a:br/>
+            <a:r>
+              <a:t> • Grid Oscillation AI</a:t>
+            </a:r>
+            <a:br/>
+            <a:r>
+              <a:t> • Fault Location Engine</a:t>
+            </a:r>
+          </a:p>
+        </p:txBody>
+      </p:sp>
+      <p:sp>
+        <p:nvSpPr>
+          <p:cNvPr id="13" name="Rounded Rectangle 12"/>
           <p:cNvSpPr/>
           <p:nvPr/>
         </p:nvSpPr>
         <p:spPr>
           <a:xfrm>
-            <a:off x="731520" y="5029200"/>
-            <a:ext cx="10698480" cy="1188720"/>
+            <a:off x="8933688" y="1691640"/>
+            <a:ext cx="2514600" cy="3611880"/>
           </a:xfrm>
           <a:prstGeom prst="roundRect">
             <a:avLst/>
           </a:prstGeom>
           <a:solidFill>
-            <a:srgbClr val="0C1C34"/>
+            <a:srgbClr val="131926"/>
           </a:solidFill>
-          <a:ln>
+          <a:ln w="12700">
             <a:solidFill>
-              <a:srgbClr val="00D4FF"/>
+              <a:srgbClr val="38BDF8"/>
             </a:solidFill>
           </a:ln>
         </p:spPr>
@@ -6284,16 +8232,830 @@
           </a:fontRef>
         </p:style>
         <p:txBody>
-          <a:bodyPr rtlCol="0" anchor="ctr" wrap="square"/>
-          <a:lstStyle/>
-          <a:p>
-            <a:pPr algn="ctr">
+          <a:bodyPr rtlCol="0" anchor="ctr"/>
+          <a:lstStyle/>
+          <a:p>
+            <a:pPr algn="ctr"/>
+          </a:p>
+        </p:txBody>
+      </p:sp>
+      <p:sp>
+        <p:nvSpPr>
+          <p:cNvPr id="14" name="TextBox 13"/>
+          <p:cNvSpPr txBox="1"/>
+          <p:nvPr/>
+        </p:nvSpPr>
+        <p:spPr>
+          <a:xfrm>
+            <a:off x="9098280" y="1856232"/>
+            <a:ext cx="2185416" cy="3282696"/>
+          </a:xfrm>
+          <a:prstGeom prst="rect">
+            <a:avLst/>
+          </a:prstGeom>
+          <a:noFill/>
+        </p:spPr>
+        <p:txBody>
+          <a:bodyPr wrap="square" lIns="0" rIns="0" tIns="0" bIns="0">
+            <a:spAutoFit/>
+          </a:bodyPr>
+          <a:lstStyle/>
+          <a:p>
+            <a:pPr>
+              <a:defRPr sz="850" b="1">
+                <a:solidFill>
+                  <a:srgbClr val="38BDF8"/>
+                </a:solidFill>
+              </a:defRPr>
+            </a:pPr>
+            <a:r>
+              <a:t>LAYER 04</a:t>
+            </a:r>
+          </a:p>
+          <a:p>
+            <a:pPr>
+              <a:spcBef>
+                <a:spcPts val="300"/>
+              </a:spcBef>
               <a:spcAft>
+                <a:spcPts val="600"/>
+              </a:spcAft>
+              <a:defRPr sz="1200" b="1">
+                <a:solidFill>
+                  <a:srgbClr val="FFFFFF"/>
+                </a:solidFill>
+              </a:defRPr>
+            </a:pPr>
+            <a:r>
+              <a:t>Breaker Trip &amp; Grid Cockpit</a:t>
+            </a:r>
+          </a:p>
+          <a:p>
+            <a:pPr>
+              <a:spcAft>
+                <a:spcPts val="800"/>
+              </a:spcAft>
+              <a:defRPr sz="900">
+                <a:solidFill>
+                  <a:srgbClr val="F1F5F9"/>
+                </a:solidFill>
+              </a:defRPr>
+            </a:pPr>
+            <a:r>
+              <a:t>Sub-4ms GOOSE protective trip command verification, automated synchrocheck breaker closing, and ANSI/ISA-101 single-line substation cockpits.</a:t>
+            </a:r>
+          </a:p>
+          <a:p>
+            <a:pPr>
+              <a:spcBef>
                 <a:spcPts val="400"/>
+              </a:spcBef>
+              <a:defRPr sz="800" b="1">
+                <a:solidFill>
+                  <a:srgbClr val="94A3B8"/>
+                </a:solidFill>
+              </a:defRPr>
+            </a:pPr>
+            <a:r>
+              <a:t>PROTOCOLS &amp; STANDARDS:</a:t>
+            </a:r>
+          </a:p>
+          <a:p>
+            <a:pPr>
+              <a:spcBef>
+                <a:spcPts val="200"/>
+              </a:spcBef>
+              <a:defRPr sz="850">
+                <a:solidFill>
+                  <a:srgbClr val="34D399"/>
+                </a:solidFill>
+              </a:defRPr>
+            </a:pPr>
+            <a:r>
+              <a:t> • Sub-4ms GOOSE Trips</a:t>
+            </a:r>
+            <a:br/>
+            <a:r>
+              <a:t> • Synchrocheck Closing</a:t>
+            </a:r>
+            <a:br/>
+            <a:r>
+              <a:t> • ISA-101 Grid HMI</a:t>
+            </a:r>
+          </a:p>
+        </p:txBody>
+      </p:sp>
+      <p:sp>
+        <p:nvSpPr>
+          <p:cNvPr id="15" name="Rounded Rectangle 14"/>
+          <p:cNvSpPr/>
+          <p:nvPr/>
+        </p:nvSpPr>
+        <p:spPr>
+          <a:xfrm>
+            <a:off x="731520" y="5486400"/>
+            <a:ext cx="10728655" cy="868680"/>
+          </a:xfrm>
+          <a:prstGeom prst="roundRect">
+            <a:avLst/>
+          </a:prstGeom>
+          <a:solidFill>
+            <a:srgbClr val="131926"/>
+          </a:solidFill>
+          <a:ln w="12700">
+            <a:solidFill>
+              <a:srgbClr val="38BDF8"/>
+            </a:solidFill>
+          </a:ln>
+        </p:spPr>
+        <p:style>
+          <a:lnRef idx="1">
+            <a:schemeClr val="accent1"/>
+          </a:lnRef>
+          <a:fillRef idx="3">
+            <a:schemeClr val="accent1"/>
+          </a:fillRef>
+          <a:effectRef idx="2">
+            <a:schemeClr val="accent1"/>
+          </a:effectRef>
+          <a:fontRef idx="minor">
+            <a:schemeClr val="lt1"/>
+          </a:fontRef>
+        </p:style>
+        <p:txBody>
+          <a:bodyPr rtlCol="0" anchor="ctr"/>
+          <a:lstStyle/>
+          <a:p>
+            <a:pPr algn="ctr"/>
+          </a:p>
+        </p:txBody>
+      </p:sp>
+      <p:sp>
+        <p:nvSpPr>
+          <p:cNvPr id="16" name="TextBox 15"/>
+          <p:cNvSpPr txBox="1"/>
+          <p:nvPr/>
+        </p:nvSpPr>
+        <p:spPr>
+          <a:xfrm>
+            <a:off x="960120" y="5596128"/>
+            <a:ext cx="10241280" cy="640080"/>
+          </a:xfrm>
+          <a:prstGeom prst="rect">
+            <a:avLst/>
+          </a:prstGeom>
+          <a:noFill/>
+        </p:spPr>
+        <p:txBody>
+          <a:bodyPr wrap="square" lIns="0" rIns="0" tIns="0" bIns="0">
+            <a:spAutoFit/>
+          </a:bodyPr>
+          <a:lstStyle/>
+          <a:p>
+            <a:pPr>
+              <a:defRPr sz="850" b="1">
+                <a:solidFill>
+                  <a:srgbClr val="38BDF8"/>
+                </a:solidFill>
+              </a:defRPr>
+            </a:pPr>
+            <a:r>
+              <a:t>UNIFIED DATA PIPELINE FLOW</a:t>
+            </a:r>
+          </a:p>
+          <a:p>
+            <a:pPr>
+              <a:spcBef>
+                <a:spcPts val="200"/>
+              </a:spcBef>
+              <a:defRPr sz="950" b="1">
+                <a:solidFill>
+                  <a:srgbClr val="FFFFFF"/>
+                </a:solidFill>
+              </a:defRPr>
+            </a:pPr>
+            <a:r>
+              <a:t>IEC 61850 Sampled Values ➔ Redundant Microsecond Process Bus ➔ Synchrophasor Dynamic Stability AI ➔ Sub-4ms GOOSE Breaker Trip Execution</a:t>
+            </a:r>
+          </a:p>
+        </p:txBody>
+      </p:sp>
+    </p:spTree>
+  </p:cSld>
+  <p:clrMapOvr>
+    <a:masterClrMapping/>
+  </p:clrMapOvr>
+</p:sld>
+</file>
+
+<file path=ppt/slides/slide7.xml><?xml version="1.0" encoding="utf-8"?>
+<p:sld xmlns:a="http://schemas.openxmlformats.org/drawingml/2006/main" xmlns:p="http://schemas.openxmlformats.org/presentationml/2006/main" xmlns:r="http://schemas.openxmlformats.org/officeDocument/2006/relationships">
+  <p:cSld>
+    <p:spTree>
+      <p:nvGrpSpPr>
+        <p:cNvPr id="1" name=""/>
+        <p:cNvGrpSpPr/>
+        <p:nvPr/>
+      </p:nvGrpSpPr>
+      <p:grpSpPr/>
+      <p:sp>
+        <p:nvSpPr>
+          <p:cNvPr id="2" name="Rectangle 1"/>
+          <p:cNvSpPr/>
+          <p:nvPr/>
+        </p:nvSpPr>
+        <p:spPr>
+          <a:xfrm>
+            <a:off x="0" y="0"/>
+            <a:ext cx="12191695" cy="6858000"/>
+          </a:xfrm>
+          <a:prstGeom prst="rect">
+            <a:avLst/>
+          </a:prstGeom>
+          <a:solidFill>
+            <a:srgbClr val="0B0F17"/>
+          </a:solidFill>
+          <a:ln>
+            <a:noFill/>
+          </a:ln>
+        </p:spPr>
+        <p:style>
+          <a:lnRef idx="1">
+            <a:schemeClr val="accent1"/>
+          </a:lnRef>
+          <a:fillRef idx="3">
+            <a:schemeClr val="accent1"/>
+          </a:fillRef>
+          <a:effectRef idx="2">
+            <a:schemeClr val="accent1"/>
+          </a:effectRef>
+          <a:fontRef idx="minor">
+            <a:schemeClr val="lt1"/>
+          </a:fontRef>
+        </p:style>
+        <p:txBody>
+          <a:bodyPr rtlCol="0" anchor="ctr"/>
+          <a:lstStyle/>
+          <a:p>
+            <a:pPr algn="ctr"/>
+          </a:p>
+        </p:txBody>
+      </p:sp>
+      <p:sp>
+        <p:nvSpPr>
+          <p:cNvPr id="3" name="Rectangle 2"/>
+          <p:cNvSpPr/>
+          <p:nvPr/>
+        </p:nvSpPr>
+        <p:spPr>
+          <a:xfrm>
+            <a:off x="731520" y="365760"/>
+            <a:ext cx="10728655" cy="18288"/>
+          </a:xfrm>
+          <a:prstGeom prst="rect">
+            <a:avLst/>
+          </a:prstGeom>
+          <a:solidFill>
+            <a:srgbClr val="38BDF8"/>
+          </a:solidFill>
+          <a:ln>
+            <a:solidFill>
+              <a:srgbClr val="38BDF8"/>
+            </a:solidFill>
+          </a:ln>
+        </p:spPr>
+        <p:style>
+          <a:lnRef idx="1">
+            <a:schemeClr val="accent1"/>
+          </a:lnRef>
+          <a:fillRef idx="3">
+            <a:schemeClr val="accent1"/>
+          </a:fillRef>
+          <a:effectRef idx="2">
+            <a:schemeClr val="accent1"/>
+          </a:effectRef>
+          <a:fontRef idx="minor">
+            <a:schemeClr val="lt1"/>
+          </a:fontRef>
+        </p:style>
+        <p:txBody>
+          <a:bodyPr rtlCol="0" anchor="ctr"/>
+          <a:lstStyle/>
+          <a:p>
+            <a:pPr algn="ctr"/>
+          </a:p>
+        </p:txBody>
+      </p:sp>
+      <p:sp>
+        <p:nvSpPr>
+          <p:cNvPr id="4" name="TextBox 3"/>
+          <p:cNvSpPr txBox="1"/>
+          <p:nvPr/>
+        </p:nvSpPr>
+        <p:spPr>
+          <a:xfrm>
+            <a:off x="731520" y="438912"/>
+            <a:ext cx="8229600" cy="274320"/>
+          </a:xfrm>
+          <a:prstGeom prst="rect">
+            <a:avLst/>
+          </a:prstGeom>
+          <a:noFill/>
+        </p:spPr>
+        <p:txBody>
+          <a:bodyPr wrap="square" lIns="0" rIns="0" tIns="0" bIns="0">
+            <a:spAutoFit/>
+          </a:bodyPr>
+          <a:lstStyle/>
+          <a:p>
+            <a:pPr>
+              <a:defRPr sz="950" b="1">
+                <a:solidFill>
+                  <a:srgbClr val="38BDF8"/>
+                </a:solidFill>
+              </a:defRPr>
+            </a:pPr>
+            <a:r>
+              <a:t>TERRESTRIAL PLATFORM  |  TERRAGRIDX  |  DEPLOYMENT &amp; SI VALUE</a:t>
+            </a:r>
+          </a:p>
+        </p:txBody>
+      </p:sp>
+      <p:sp>
+        <p:nvSpPr>
+          <p:cNvPr id="5" name="TextBox 4"/>
+          <p:cNvSpPr txBox="1"/>
+          <p:nvPr/>
+        </p:nvSpPr>
+        <p:spPr>
+          <a:xfrm>
+            <a:off x="731520" y="731520"/>
+            <a:ext cx="9601200" cy="777240"/>
+          </a:xfrm>
+          <a:prstGeom prst="rect">
+            <a:avLst/>
+          </a:prstGeom>
+          <a:noFill/>
+        </p:spPr>
+        <p:txBody>
+          <a:bodyPr wrap="square" lIns="0" rIns="0" tIns="0" bIns="0">
+            <a:spAutoFit/>
+          </a:bodyPr>
+          <a:lstStyle/>
+          <a:p>
+            <a:pPr>
+              <a:defRPr sz="1900" b="1">
+                <a:solidFill>
+                  <a:srgbClr val="FFFFFF"/>
+                </a:solidFill>
+              </a:defRPr>
+            </a:pPr>
+            <a:r>
+              <a:t>System Integrator Deployment Framework &amp; Commercial Model</a:t>
+            </a:r>
+          </a:p>
+          <a:p>
+            <a:pPr>
+              <a:spcBef>
+                <a:spcPts val="300"/>
+              </a:spcBef>
+              <a:defRPr sz="1050">
+                <a:solidFill>
+                  <a:srgbClr val="94A3B8"/>
+                </a:solidFill>
+              </a:defRPr>
+            </a:pPr>
+            <a:r>
+              <a:t>Zero rip-and-replace turnkey onboarding with recurring enterprise margins and co-selling enablement.</a:t>
+            </a:r>
+          </a:p>
+        </p:txBody>
+      </p:sp>
+      <p:pic>
+        <p:nvPicPr>
+          <p:cNvPr id="6" name="Picture 5" descr="tp_logo_white.png"/>
+          <p:cNvPicPr>
+            <a:picLocks noChangeAspect="1"/>
+          </p:cNvPicPr>
+          <p:nvPr/>
+        </p:nvPicPr>
+        <p:blipFill>
+          <a:blip r:embed="rId2"/>
+          <a:stretch>
+            <a:fillRect/>
+          </a:stretch>
+        </p:blipFill>
+        <p:spPr>
+          <a:xfrm>
+            <a:off x="10469880" y="411480"/>
+            <a:ext cx="987552" cy="384048"/>
+          </a:xfrm>
+          <a:prstGeom prst="rect">
+            <a:avLst/>
+          </a:prstGeom>
+        </p:spPr>
+      </p:pic>
+      <p:sp>
+        <p:nvSpPr>
+          <p:cNvPr id="7" name="Rounded Rectangle 6"/>
+          <p:cNvSpPr/>
+          <p:nvPr/>
+        </p:nvSpPr>
+        <p:spPr>
+          <a:xfrm>
+            <a:off x="731520" y="1691640"/>
+            <a:ext cx="3429000" cy="2651760"/>
+          </a:xfrm>
+          <a:prstGeom prst="roundRect">
+            <a:avLst/>
+          </a:prstGeom>
+          <a:solidFill>
+            <a:srgbClr val="131926"/>
+          </a:solidFill>
+          <a:ln w="12700">
+            <a:solidFill>
+              <a:srgbClr val="28344B"/>
+            </a:solidFill>
+          </a:ln>
+        </p:spPr>
+        <p:style>
+          <a:lnRef idx="1">
+            <a:schemeClr val="accent1"/>
+          </a:lnRef>
+          <a:fillRef idx="3">
+            <a:schemeClr val="accent1"/>
+          </a:fillRef>
+          <a:effectRef idx="2">
+            <a:schemeClr val="accent1"/>
+          </a:effectRef>
+          <a:fontRef idx="minor">
+            <a:schemeClr val="lt1"/>
+          </a:fontRef>
+        </p:style>
+        <p:txBody>
+          <a:bodyPr rtlCol="0" anchor="ctr"/>
+          <a:lstStyle/>
+          <a:p>
+            <a:pPr algn="ctr"/>
+          </a:p>
+        </p:txBody>
+      </p:sp>
+      <p:sp>
+        <p:nvSpPr>
+          <p:cNvPr id="8" name="TextBox 7"/>
+          <p:cNvSpPr txBox="1"/>
+          <p:nvPr/>
+        </p:nvSpPr>
+        <p:spPr>
+          <a:xfrm>
+            <a:off x="914400" y="1856232"/>
+            <a:ext cx="3063240" cy="2322576"/>
+          </a:xfrm>
+          <a:prstGeom prst="rect">
+            <a:avLst/>
+          </a:prstGeom>
+          <a:noFill/>
+        </p:spPr>
+        <p:txBody>
+          <a:bodyPr wrap="square" lIns="0" rIns="0" tIns="0" bIns="0">
+            <a:spAutoFit/>
+          </a:bodyPr>
+          <a:lstStyle/>
+          <a:p>
+            <a:pPr>
+              <a:defRPr sz="850" b="1">
+                <a:solidFill>
+                  <a:srgbClr val="38BDF8"/>
+                </a:solidFill>
+              </a:defRPr>
+            </a:pPr>
+            <a:r>
+              <a:t>PHASE 01 | CONNECTIVITY &amp; AUDIT</a:t>
+            </a:r>
+          </a:p>
+          <a:p>
+            <a:pPr>
+              <a:spcBef>
+                <a:spcPts val="300"/>
+              </a:spcBef>
+              <a:spcAft>
+                <a:spcPts val="600"/>
               </a:spcAft>
-              <a:defRPr sz="1150" b="1">
-                <a:solidFill>
-                  <a:srgbClr val="00D4FF"/>
+              <a:defRPr sz="1200" b="1">
+                <a:solidFill>
+                  <a:srgbClr val="FFFFFF"/>
+                </a:solidFill>
+              </a:defRPr>
+            </a:pPr>
+            <a:r>
+              <a:t>Zero Rip-and-Replace Onboarding</a:t>
+            </a:r>
+          </a:p>
+          <a:p>
+            <a:pPr>
+              <a:defRPr sz="950">
+                <a:solidFill>
+                  <a:srgbClr val="F1F5F9"/>
+                </a:solidFill>
+              </a:defRPr>
+            </a:pPr>
+            <a:r>
+              <a:t>Non-intrusive protocol discovery across field PLCs, RTUs, and historians. Plug-and-play mapping of tags into the unified TPIM semantic namespace without stopping ongoing plant production.</a:t>
+            </a:r>
+          </a:p>
+        </p:txBody>
+      </p:sp>
+      <p:sp>
+        <p:nvSpPr>
+          <p:cNvPr id="9" name="Rounded Rectangle 8"/>
+          <p:cNvSpPr/>
+          <p:nvPr/>
+        </p:nvSpPr>
+        <p:spPr>
+          <a:xfrm>
+            <a:off x="4379976" y="1691640"/>
+            <a:ext cx="3429000" cy="2651760"/>
+          </a:xfrm>
+          <a:prstGeom prst="roundRect">
+            <a:avLst/>
+          </a:prstGeom>
+          <a:solidFill>
+            <a:srgbClr val="131926"/>
+          </a:solidFill>
+          <a:ln w="12700">
+            <a:solidFill>
+              <a:srgbClr val="28344B"/>
+            </a:solidFill>
+          </a:ln>
+        </p:spPr>
+        <p:style>
+          <a:lnRef idx="1">
+            <a:schemeClr val="accent1"/>
+          </a:lnRef>
+          <a:fillRef idx="3">
+            <a:schemeClr val="accent1"/>
+          </a:fillRef>
+          <a:effectRef idx="2">
+            <a:schemeClr val="accent1"/>
+          </a:effectRef>
+          <a:fontRef idx="minor">
+            <a:schemeClr val="lt1"/>
+          </a:fontRef>
+        </p:style>
+        <p:txBody>
+          <a:bodyPr rtlCol="0" anchor="ctr"/>
+          <a:lstStyle/>
+          <a:p>
+            <a:pPr algn="ctr"/>
+          </a:p>
+        </p:txBody>
+      </p:sp>
+      <p:sp>
+        <p:nvSpPr>
+          <p:cNvPr id="10" name="TextBox 9"/>
+          <p:cNvSpPr txBox="1"/>
+          <p:nvPr/>
+        </p:nvSpPr>
+        <p:spPr>
+          <a:xfrm>
+            <a:off x="4562856" y="1856232"/>
+            <a:ext cx="3063240" cy="2322576"/>
+          </a:xfrm>
+          <a:prstGeom prst="rect">
+            <a:avLst/>
+          </a:prstGeom>
+          <a:noFill/>
+        </p:spPr>
+        <p:txBody>
+          <a:bodyPr wrap="square" lIns="0" rIns="0" tIns="0" bIns="0">
+            <a:spAutoFit/>
+          </a:bodyPr>
+          <a:lstStyle/>
+          <a:p>
+            <a:pPr>
+              <a:defRPr sz="850" b="1">
+                <a:solidFill>
+                  <a:srgbClr val="38BDF8"/>
+                </a:solidFill>
+              </a:defRPr>
+            </a:pPr>
+            <a:r>
+              <a:t>PHASE 02 | TWIN CALIBRATION</a:t>
+            </a:r>
+          </a:p>
+          <a:p>
+            <a:pPr>
+              <a:spcBef>
+                <a:spcPts val="300"/>
+              </a:spcBef>
+              <a:spcAft>
+                <a:spcPts val="600"/>
+              </a:spcAft>
+              <a:defRPr sz="1200" b="1">
+                <a:solidFill>
+                  <a:srgbClr val="FFFFFF"/>
+                </a:solidFill>
+              </a:defRPr>
+            </a:pPr>
+            <a:r>
+              <a:t>Physics-Model Synchronization</a:t>
+            </a:r>
+          </a:p>
+          <a:p>
+            <a:pPr>
+              <a:defRPr sz="950">
+                <a:solidFill>
+                  <a:srgbClr val="F1F5F9"/>
+                </a:solidFill>
+              </a:defRPr>
+            </a:pPr>
+            <a:r>
+              <a:t>Deploy high-frequency Edge Gateway on premise. Calibrate first-principles thermodynamic and kinematic models against historical telemetry to achieve 99.4%+ deterministic accuracy.</a:t>
+            </a:r>
+          </a:p>
+        </p:txBody>
+      </p:sp>
+      <p:sp>
+        <p:nvSpPr>
+          <p:cNvPr id="11" name="Rounded Rectangle 10"/>
+          <p:cNvSpPr/>
+          <p:nvPr/>
+        </p:nvSpPr>
+        <p:spPr>
+          <a:xfrm>
+            <a:off x="8028432" y="1691640"/>
+            <a:ext cx="3429000" cy="2651760"/>
+          </a:xfrm>
+          <a:prstGeom prst="roundRect">
+            <a:avLst/>
+          </a:prstGeom>
+          <a:solidFill>
+            <a:srgbClr val="131926"/>
+          </a:solidFill>
+          <a:ln w="12700">
+            <a:solidFill>
+              <a:srgbClr val="28344B"/>
+            </a:solidFill>
+          </a:ln>
+        </p:spPr>
+        <p:style>
+          <a:lnRef idx="1">
+            <a:schemeClr val="accent1"/>
+          </a:lnRef>
+          <a:fillRef idx="3">
+            <a:schemeClr val="accent1"/>
+          </a:fillRef>
+          <a:effectRef idx="2">
+            <a:schemeClr val="accent1"/>
+          </a:effectRef>
+          <a:fontRef idx="minor">
+            <a:schemeClr val="lt1"/>
+          </a:fontRef>
+        </p:style>
+        <p:txBody>
+          <a:bodyPr rtlCol="0" anchor="ctr"/>
+          <a:lstStyle/>
+          <a:p>
+            <a:pPr algn="ctr"/>
+          </a:p>
+        </p:txBody>
+      </p:sp>
+      <p:sp>
+        <p:nvSpPr>
+          <p:cNvPr id="12" name="TextBox 11"/>
+          <p:cNvSpPr txBox="1"/>
+          <p:nvPr/>
+        </p:nvSpPr>
+        <p:spPr>
+          <a:xfrm>
+            <a:off x="8211312" y="1856232"/>
+            <a:ext cx="3063240" cy="2322576"/>
+          </a:xfrm>
+          <a:prstGeom prst="rect">
+            <a:avLst/>
+          </a:prstGeom>
+          <a:noFill/>
+        </p:spPr>
+        <p:txBody>
+          <a:bodyPr wrap="square" lIns="0" rIns="0" tIns="0" bIns="0">
+            <a:spAutoFit/>
+          </a:bodyPr>
+          <a:lstStyle/>
+          <a:p>
+            <a:pPr>
+              <a:defRPr sz="850" b="1">
+                <a:solidFill>
+                  <a:srgbClr val="38BDF8"/>
+                </a:solidFill>
+              </a:defRPr>
+            </a:pPr>
+            <a:r>
+              <a:t>PHASE 03 | AUTONOMOUS GO-LIVE</a:t>
+            </a:r>
+          </a:p>
+          <a:p>
+            <a:pPr>
+              <a:spcBef>
+                <a:spcPts val="300"/>
+              </a:spcBef>
+              <a:spcAft>
+                <a:spcPts val="600"/>
+              </a:spcAft>
+              <a:defRPr sz="1200" b="1">
+                <a:solidFill>
+                  <a:srgbClr val="FFFFFF"/>
+                </a:solidFill>
+              </a:defRPr>
+            </a:pPr>
+            <a:r>
+              <a:t>Closed-Loop Setpoint Actuation</a:t>
+            </a:r>
+          </a:p>
+          <a:p>
+            <a:pPr>
+              <a:defRPr sz="950">
+                <a:solidFill>
+                  <a:srgbClr val="F1F5F9"/>
+                </a:solidFill>
+              </a:defRPr>
+            </a:pPr>
+            <a:r>
+              <a:t>Supervisory closed-loop setpoint dispatch with bumpless transfer. Comprehensive ISA-101 verified cockpit handoff with continuous SI recurring monitoring and support tiers.</a:t>
+            </a:r>
+          </a:p>
+        </p:txBody>
+      </p:sp>
+      <p:sp>
+        <p:nvSpPr>
+          <p:cNvPr id="13" name="Rounded Rectangle 12"/>
+          <p:cNvSpPr/>
+          <p:nvPr/>
+        </p:nvSpPr>
+        <p:spPr>
+          <a:xfrm>
+            <a:off x="731520" y="4526280"/>
+            <a:ext cx="10728655" cy="1828800"/>
+          </a:xfrm>
+          <a:prstGeom prst="roundRect">
+            <a:avLst/>
+          </a:prstGeom>
+          <a:solidFill>
+            <a:srgbClr val="131926"/>
+          </a:solidFill>
+          <a:ln w="12700">
+            <a:solidFill>
+              <a:srgbClr val="38BDF8"/>
+            </a:solidFill>
+          </a:ln>
+        </p:spPr>
+        <p:style>
+          <a:lnRef idx="1">
+            <a:schemeClr val="accent1"/>
+          </a:lnRef>
+          <a:fillRef idx="3">
+            <a:schemeClr val="accent1"/>
+          </a:fillRef>
+          <a:effectRef idx="2">
+            <a:schemeClr val="accent1"/>
+          </a:effectRef>
+          <a:fontRef idx="minor">
+            <a:schemeClr val="lt1"/>
+          </a:fontRef>
+        </p:style>
+        <p:txBody>
+          <a:bodyPr rtlCol="0" anchor="ctr"/>
+          <a:lstStyle/>
+          <a:p>
+            <a:pPr algn="ctr"/>
+          </a:p>
+        </p:txBody>
+      </p:sp>
+      <p:sp>
+        <p:nvSpPr>
+          <p:cNvPr id="14" name="TextBox 13"/>
+          <p:cNvSpPr txBox="1"/>
+          <p:nvPr/>
+        </p:nvSpPr>
+        <p:spPr>
+          <a:xfrm>
+            <a:off x="960120" y="4663440"/>
+            <a:ext cx="10241280" cy="1554480"/>
+          </a:xfrm>
+          <a:prstGeom prst="rect">
+            <a:avLst/>
+          </a:prstGeom>
+          <a:noFill/>
+        </p:spPr>
+        <p:txBody>
+          <a:bodyPr wrap="square" lIns="0" rIns="0" tIns="0" bIns="0">
+            <a:spAutoFit/>
+          </a:bodyPr>
+          <a:lstStyle/>
+          <a:p>
+            <a:pPr>
+              <a:defRPr sz="1000" b="1">
+                <a:solidFill>
+                  <a:srgbClr val="38BDF8"/>
                 </a:solidFill>
               </a:defRPr>
             </a:pPr>
@@ -6303,14 +9065,47 @@
           </a:p>
           <a:p>
             <a:pPr>
-              <a:defRPr sz="1300" b="1">
-                <a:solidFill>
-                  <a:srgbClr val="FFFFFF"/>
-                </a:solidFill>
-              </a:defRPr>
-            </a:pPr>
-            <a:r>
-              <a:t>High recurring annual software margins (ARR)  |  Turnkey deployment in days, not months  |  Full co-selling &amp; pre-sales engineering support  |  Certified partner portal at platform.tpcloud.tech</a:t>
+              <a:spcBef>
+                <a:spcPts val="300"/>
+              </a:spcBef>
+              <a:defRPr sz="950">
+                <a:solidFill>
+                  <a:srgbClr val="F1F5F9"/>
+                </a:solidFill>
+              </a:defRPr>
+            </a:pPr>
+            <a:r>
+              <a:t>• High-Margin Software Recurring Revenue: Earn 25%–35% continuous recurring margin on every TerraGridX software deployment, maintenance tier, and AI compute instance.</a:t>
+            </a:r>
+          </a:p>
+          <a:p>
+            <a:pPr>
+              <a:spcBef>
+                <a:spcPts val="300"/>
+              </a:spcBef>
+              <a:defRPr sz="950">
+                <a:solidFill>
+                  <a:srgbClr val="F1F5F9"/>
+                </a:solidFill>
+              </a:defRPr>
+            </a:pPr>
+            <a:r>
+              <a:t>• Turnkey Engineering Velocity: Deploy within 7 to 14 days leveraging pre-trained neural networks and automated semantic tag mapping, avoiding expensive months-long custom PLC code rewrites.</a:t>
+            </a:r>
+          </a:p>
+          <a:p>
+            <a:pPr>
+              <a:spcBef>
+                <a:spcPts val="300"/>
+              </a:spcBef>
+              <a:defRPr sz="950">
+                <a:solidFill>
+                  <a:srgbClr val="F1F5F9"/>
+                </a:solidFill>
+              </a:defRPr>
+            </a:pPr>
+            <a:r>
+              <a:t>• Enterprise Co-Selling &amp; Ecosystem: Access joint executive pipeline opportunities, certified engineering documentation, and board-level C-Suite presentation toolkits.</a:t>
             </a:r>
           </a:p>
         </p:txBody>
@@ -6641,4 +9436,324 @@
   </a:objectDefaults>
   <a:extraClrSchemeLst/>
 </a:theme>
+</file>
+
+<file path=ppt/theme/theme2.xml><?xml version="1.0" encoding="utf-8"?>
+<a:theme xmlns:a="http://schemas.openxmlformats.org/drawingml/2006/main" name="Office Theme">
+  <a:themeElements>
+    <a:clrScheme name="Office">
+      <a:dk1>
+        <a:sysClr val="windowText" lastClr="000000"/>
+      </a:dk1>
+      <a:lt1>
+        <a:sysClr val="window" lastClr="FFFFFF"/>
+      </a:lt1>
+      <a:dk2>
+        <a:srgbClr val="1F497D"/>
+      </a:dk2>
+      <a:lt2>
+        <a:srgbClr val="EEECE1"/>
+      </a:lt2>
+      <a:accent1>
+        <a:srgbClr val="4F81BD"/>
+      </a:accent1>
+      <a:accent2>
+        <a:srgbClr val="C0504D"/>
+      </a:accent2>
+      <a:accent3>
+        <a:srgbClr val="9BBB59"/>
+      </a:accent3>
+      <a:accent4>
+        <a:srgbClr val="8064A2"/>
+      </a:accent4>
+      <a:accent5>
+        <a:srgbClr val="4BACC6"/>
+      </a:accent5>
+      <a:accent6>
+        <a:srgbClr val="F79646"/>
+      </a:accent6>
+      <a:hlink>
+        <a:srgbClr val="0000FF"/>
+      </a:hlink>
+      <a:folHlink>
+        <a:srgbClr val="800080"/>
+      </a:folHlink>
+    </a:clrScheme>
+    <a:fontScheme name="Office">
+      <a:majorFont>
+        <a:latin typeface="Calibri"/>
+        <a:ea typeface=""/>
+        <a:cs typeface=""/>
+        <a:font script="Jpan" typeface="ＭＳ Ｐゴシック"/>
+        <a:font script="Hang" typeface="맑은 고딕"/>
+        <a:font script="Hans" typeface="宋体"/>
+        <a:font script="Hant" typeface="新細明體"/>
+        <a:font script="Arab" typeface="Times New Roman"/>
+        <a:font script="Hebr" typeface="Times New Roman"/>
+        <a:font script="Thai" typeface="Angsana New"/>
+        <a:font script="Ethi" typeface="Nyala"/>
+        <a:font script="Beng" typeface="Vrinda"/>
+        <a:font script="Gujr" typeface="Shruti"/>
+        <a:font script="Khmr" typeface="MoolBoran"/>
+        <a:font script="Knda" typeface="Tunga"/>
+        <a:font script="Guru" typeface="Raavi"/>
+        <a:font script="Cans" typeface="Euphemia"/>
+        <a:font script="Cher" typeface="Plantagenet Cherokee"/>
+        <a:font script="Yiii" typeface="Microsoft Yi Baiti"/>
+        <a:font script="Tibt" typeface="Microsoft Himalaya"/>
+        <a:font script="Thaa" typeface="MV Boli"/>
+        <a:font script="Deva" typeface="Mangal"/>
+        <a:font script="Telu" typeface="Gautami"/>
+        <a:font script="Taml" typeface="Latha"/>
+        <a:font script="Syrc" typeface="Estrangelo Edessa"/>
+        <a:font script="Orya" typeface="Kalinga"/>
+        <a:font script="Mlym" typeface="Kartika"/>
+        <a:font script="Laoo" typeface="DokChampa"/>
+        <a:font script="Sinh" typeface="Iskoola Pota"/>
+        <a:font script="Mong" typeface="Mongolian Baiti"/>
+        <a:font script="Viet" typeface="Times New Roman"/>
+        <a:font script="Uigh" typeface="Microsoft Uighur"/>
+        <a:font script="Geor" typeface="Sylfaen"/>
+      </a:majorFont>
+      <a:minorFont>
+        <a:latin typeface="Calibri"/>
+        <a:ea typeface=""/>
+        <a:cs typeface=""/>
+        <a:font script="Jpan" typeface="ＭＳ Ｐゴシック"/>
+        <a:font script="Hang" typeface="맑은 고딕"/>
+        <a:font script="Hans" typeface="宋体"/>
+        <a:font script="Hant" typeface="新細明體"/>
+        <a:font script="Arab" typeface="Arial"/>
+        <a:font script="Hebr" typeface="Arial"/>
+        <a:font script="Thai" typeface="Cordia New"/>
+        <a:font script="Ethi" typeface="Nyala"/>
+        <a:font script="Beng" typeface="Vrinda"/>
+        <a:font script="Gujr" typeface="Shruti"/>
+        <a:font script="Khmr" typeface="DaunPenh"/>
+        <a:font script="Knda" typeface="Tunga"/>
+        <a:font script="Guru" typeface="Raavi"/>
+        <a:font script="Cans" typeface="Euphemia"/>
+        <a:font script="Cher" typeface="Plantagenet Cherokee"/>
+        <a:font script="Yiii" typeface="Microsoft Yi Baiti"/>
+        <a:font script="Tibt" typeface="Microsoft Himalaya"/>
+        <a:font script="Thaa" typeface="MV Boli"/>
+        <a:font script="Deva" typeface="Mangal"/>
+        <a:font script="Telu" typeface="Gautami"/>
+        <a:font script="Taml" typeface="Latha"/>
+        <a:font script="Syrc" typeface="Estrangelo Edessa"/>
+        <a:font script="Orya" typeface="Kalinga"/>
+        <a:font script="Mlym" typeface="Kartika"/>
+        <a:font script="Laoo" typeface="DokChampa"/>
+        <a:font script="Sinh" typeface="Iskoola Pota"/>
+        <a:font script="Mong" typeface="Mongolian Baiti"/>
+        <a:font script="Viet" typeface="Arial"/>
+        <a:font script="Uigh" typeface="Microsoft Uighur"/>
+        <a:font script="Geor" typeface="Sylfaen"/>
+      </a:minorFont>
+    </a:fontScheme>
+    <a:fmtScheme name="Office">
+      <a:fillStyleLst>
+        <a:solidFill>
+          <a:schemeClr val="phClr"/>
+        </a:solidFill>
+        <a:gradFill rotWithShape="1">
+          <a:gsLst>
+            <a:gs pos="0">
+              <a:schemeClr val="phClr">
+                <a:tint val="50000"/>
+                <a:satMod val="300000"/>
+              </a:schemeClr>
+            </a:gs>
+            <a:gs pos="35000">
+              <a:schemeClr val="phClr">
+                <a:tint val="37000"/>
+                <a:satMod val="300000"/>
+              </a:schemeClr>
+            </a:gs>
+            <a:gs pos="100000">
+              <a:schemeClr val="phClr">
+                <a:tint val="15000"/>
+                <a:satMod val="350000"/>
+              </a:schemeClr>
+            </a:gs>
+          </a:gsLst>
+          <a:lin ang="16200000" scaled="1"/>
+        </a:gradFill>
+        <a:gradFill rotWithShape="1">
+          <a:gsLst>
+            <a:gs pos="0">
+              <a:schemeClr val="phClr">
+                <a:tint val="100000"/>
+                <a:shade val="100000"/>
+                <a:satMod val="130000"/>
+              </a:schemeClr>
+            </a:gs>
+            <a:gs pos="100000">
+              <a:schemeClr val="phClr">
+                <a:tint val="50000"/>
+                <a:shade val="100000"/>
+                <a:satMod val="350000"/>
+              </a:schemeClr>
+            </a:gs>
+          </a:gsLst>
+          <a:lin ang="16200000" scaled="0"/>
+        </a:gradFill>
+      </a:fillStyleLst>
+      <a:lnStyleLst>
+        <a:ln w="9525" cap="flat" cmpd="sng" algn="ctr">
+          <a:solidFill>
+            <a:schemeClr val="phClr">
+              <a:shade val="95000"/>
+              <a:satMod val="105000"/>
+            </a:schemeClr>
+          </a:solidFill>
+          <a:prstDash val="solid"/>
+        </a:ln>
+        <a:ln w="25400" cap="flat" cmpd="sng" algn="ctr">
+          <a:solidFill>
+            <a:schemeClr val="phClr"/>
+          </a:solidFill>
+          <a:prstDash val="solid"/>
+        </a:ln>
+        <a:ln w="38100" cap="flat" cmpd="sng" algn="ctr">
+          <a:solidFill>
+            <a:schemeClr val="phClr"/>
+          </a:solidFill>
+          <a:prstDash val="solid"/>
+        </a:ln>
+      </a:lnStyleLst>
+      <a:effectStyleLst>
+        <a:effectStyle>
+          <a:effectLst>
+            <a:outerShdw blurRad="40000" dist="20000" dir="5400000" rotWithShape="0">
+              <a:srgbClr val="000000">
+                <a:alpha val="38000"/>
+              </a:srgbClr>
+            </a:outerShdw>
+          </a:effectLst>
+        </a:effectStyle>
+        <a:effectStyle>
+          <a:effectLst>
+            <a:outerShdw blurRad="40000" dist="23000" dir="5400000" rotWithShape="0">
+              <a:srgbClr val="000000">
+                <a:alpha val="35000"/>
+              </a:srgbClr>
+            </a:outerShdw>
+          </a:effectLst>
+        </a:effectStyle>
+        <a:effectStyle>
+          <a:effectLst>
+            <a:outerShdw blurRad="40000" dist="23000" dir="5400000" rotWithShape="0">
+              <a:srgbClr val="000000">
+                <a:alpha val="35000"/>
+              </a:srgbClr>
+            </a:outerShdw>
+          </a:effectLst>
+          <a:scene3d>
+            <a:camera prst="orthographicFront">
+              <a:rot lat="0" lon="0" rev="0"/>
+            </a:camera>
+            <a:lightRig rig="threePt" dir="t">
+              <a:rot lat="0" lon="0" rev="1200000"/>
+            </a:lightRig>
+          </a:scene3d>
+          <a:sp3d>
+            <a:bevelT w="63500" h="25400"/>
+          </a:sp3d>
+        </a:effectStyle>
+      </a:effectStyleLst>
+      <a:bgFillStyleLst>
+        <a:solidFill>
+          <a:schemeClr val="phClr"/>
+        </a:solidFill>
+        <a:gradFill rotWithShape="1">
+          <a:gsLst>
+            <a:gs pos="0">
+              <a:schemeClr val="phClr">
+                <a:tint val="40000"/>
+                <a:satMod val="350000"/>
+              </a:schemeClr>
+            </a:gs>
+            <a:gs pos="40000">
+              <a:schemeClr val="phClr">
+                <a:tint val="45000"/>
+                <a:shade val="99000"/>
+                <a:satMod val="350000"/>
+              </a:schemeClr>
+            </a:gs>
+            <a:gs pos="100000">
+              <a:schemeClr val="phClr">
+                <a:shade val="20000"/>
+                <a:satMod val="255000"/>
+              </a:schemeClr>
+            </a:gs>
+          </a:gsLst>
+          <a:path path="circle">
+            <a:fillToRect l="50000" t="-80000" r="50000" b="180000"/>
+          </a:path>
+        </a:gradFill>
+        <a:gradFill rotWithShape="1">
+          <a:gsLst>
+            <a:gs pos="0">
+              <a:schemeClr val="phClr">
+                <a:tint val="80000"/>
+                <a:satMod val="300000"/>
+              </a:schemeClr>
+            </a:gs>
+            <a:gs pos="100000">
+              <a:schemeClr val="phClr">
+                <a:shade val="30000"/>
+                <a:satMod val="200000"/>
+              </a:schemeClr>
+            </a:gs>
+          </a:gsLst>
+          <a:path path="circle">
+            <a:fillToRect l="50000" t="50000" r="50000" b="50000"/>
+          </a:path>
+        </a:gradFill>
+      </a:bgFillStyleLst>
+    </a:fmtScheme>
+  </a:themeElements>
+  <a:objectDefaults>
+    <a:spDef>
+      <a:spPr/>
+      <a:bodyPr/>
+      <a:lstStyle/>
+      <a:style>
+        <a:lnRef idx="1">
+          <a:schemeClr val="accent1"/>
+        </a:lnRef>
+        <a:fillRef idx="3">
+          <a:schemeClr val="accent1"/>
+        </a:fillRef>
+        <a:effectRef idx="2">
+          <a:schemeClr val="accent1"/>
+        </a:effectRef>
+        <a:fontRef idx="minor">
+          <a:schemeClr val="lt1"/>
+        </a:fontRef>
+      </a:style>
+    </a:spDef>
+    <a:lnDef>
+      <a:spPr/>
+      <a:bodyPr/>
+      <a:lstStyle/>
+      <a:style>
+        <a:lnRef idx="2">
+          <a:schemeClr val="accent1"/>
+        </a:lnRef>
+        <a:fillRef idx="0">
+          <a:schemeClr val="accent1"/>
+        </a:fillRef>
+        <a:effectRef idx="1">
+          <a:schemeClr val="accent1"/>
+        </a:effectRef>
+        <a:fontRef idx="minor">
+          <a:schemeClr val="tx1"/>
+        </a:fontRef>
+      </a:style>
+    </a:lnDef>
+  </a:objectDefaults>
+  <a:extraClrSchemeLst/>
+</a:theme>
 </file>